--- a/documents/Presentation_JS.pptx
+++ b/documents/Presentation_JS.pptx
@@ -226,7 +226,7 @@
           <a:p>
             <a:fld id="{828A8F36-A643-4FAA-8649-965D6B1446A9}" type="datetimeFigureOut">
               <a:rPr lang="fr-FR" smtClean="0"/>
-              <a:t>19/12/2025</a:t>
+              <a:t>02/01/2026</a:t>
             </a:fld>
             <a:endParaRPr lang="fr-FR"/>
           </a:p>
@@ -403,7 +403,7 @@
           <a:p>
             <a:fld id="{2456FC83-ED93-4984-B7AA-3DB9F84FF409}" type="datetimeFigureOut">
               <a:rPr lang="fr-FR" smtClean="0"/>
-              <a:t>19/12/2025</a:t>
+              <a:t>02/01/2026</a:t>
             </a:fld>
             <a:endParaRPr lang="fr-FR"/>
           </a:p>
@@ -915,7 +915,7 @@
           <a:p>
             <a:fld id="{06137112-888A-40C4-BD31-96BD10D39A6F}" type="datetimeFigureOut">
               <a:rPr lang="fr-CH" smtClean="0"/>
-              <a:t>19.12.2025</a:t>
+              <a:t>02.01.2026</a:t>
             </a:fld>
             <a:endParaRPr lang="fr-CH"/>
           </a:p>
@@ -1115,7 +1115,7 @@
           <a:p>
             <a:fld id="{06137112-888A-40C4-BD31-96BD10D39A6F}" type="datetimeFigureOut">
               <a:rPr lang="fr-CH" smtClean="0"/>
-              <a:t>19.12.2025</a:t>
+              <a:t>02.01.2026</a:t>
             </a:fld>
             <a:endParaRPr lang="fr-CH"/>
           </a:p>
@@ -1325,7 +1325,7 @@
           <a:p>
             <a:fld id="{06137112-888A-40C4-BD31-96BD10D39A6F}" type="datetimeFigureOut">
               <a:rPr lang="fr-CH" smtClean="0"/>
-              <a:t>19.12.2025</a:t>
+              <a:t>02.01.2026</a:t>
             </a:fld>
             <a:endParaRPr lang="fr-CH"/>
           </a:p>
@@ -1525,7 +1525,7 @@
           <a:p>
             <a:fld id="{06137112-888A-40C4-BD31-96BD10D39A6F}" type="datetimeFigureOut">
               <a:rPr lang="fr-CH" smtClean="0"/>
-              <a:t>19.12.2025</a:t>
+              <a:t>02.01.2026</a:t>
             </a:fld>
             <a:endParaRPr lang="fr-CH"/>
           </a:p>
@@ -1801,7 +1801,7 @@
           <a:p>
             <a:fld id="{06137112-888A-40C4-BD31-96BD10D39A6F}" type="datetimeFigureOut">
               <a:rPr lang="fr-CH" smtClean="0"/>
-              <a:t>19.12.2025</a:t>
+              <a:t>02.01.2026</a:t>
             </a:fld>
             <a:endParaRPr lang="fr-CH"/>
           </a:p>
@@ -2069,7 +2069,7 @@
           <a:p>
             <a:fld id="{06137112-888A-40C4-BD31-96BD10D39A6F}" type="datetimeFigureOut">
               <a:rPr lang="fr-CH" smtClean="0"/>
-              <a:t>19.12.2025</a:t>
+              <a:t>02.01.2026</a:t>
             </a:fld>
             <a:endParaRPr lang="fr-CH"/>
           </a:p>
@@ -2484,7 +2484,7 @@
           <a:p>
             <a:fld id="{06137112-888A-40C4-BD31-96BD10D39A6F}" type="datetimeFigureOut">
               <a:rPr lang="fr-CH" smtClean="0"/>
-              <a:t>19.12.2025</a:t>
+              <a:t>02.01.2026</a:t>
             </a:fld>
             <a:endParaRPr lang="fr-CH"/>
           </a:p>
@@ -2626,7 +2626,7 @@
           <a:p>
             <a:fld id="{06137112-888A-40C4-BD31-96BD10D39A6F}" type="datetimeFigureOut">
               <a:rPr lang="fr-CH" smtClean="0"/>
-              <a:t>19.12.2025</a:t>
+              <a:t>02.01.2026</a:t>
             </a:fld>
             <a:endParaRPr lang="fr-CH"/>
           </a:p>
@@ -2739,7 +2739,7 @@
           <a:p>
             <a:fld id="{06137112-888A-40C4-BD31-96BD10D39A6F}" type="datetimeFigureOut">
               <a:rPr lang="fr-CH" smtClean="0"/>
-              <a:t>19.12.2025</a:t>
+              <a:t>02.01.2026</a:t>
             </a:fld>
             <a:endParaRPr lang="fr-CH"/>
           </a:p>
@@ -3052,7 +3052,7 @@
           <a:p>
             <a:fld id="{06137112-888A-40C4-BD31-96BD10D39A6F}" type="datetimeFigureOut">
               <a:rPr lang="fr-CH" smtClean="0"/>
-              <a:t>19.12.2025</a:t>
+              <a:t>02.01.2026</a:t>
             </a:fld>
             <a:endParaRPr lang="fr-CH"/>
           </a:p>
@@ -3341,7 +3341,7 @@
           <a:p>
             <a:fld id="{06137112-888A-40C4-BD31-96BD10D39A6F}" type="datetimeFigureOut">
               <a:rPr lang="fr-CH" smtClean="0"/>
-              <a:t>19.12.2025</a:t>
+              <a:t>02.01.2026</a:t>
             </a:fld>
             <a:endParaRPr lang="fr-CH"/>
           </a:p>
@@ -3593,7 +3593,7 @@
           <a:p>
             <a:fld id="{06137112-888A-40C4-BD31-96BD10D39A6F}" type="datetimeFigureOut">
               <a:rPr lang="fr-CH" smtClean="0"/>
-              <a:t>19.12.2025</a:t>
+              <a:t>02.01.2026</a:t>
             </a:fld>
             <a:endParaRPr lang="fr-CH"/>
           </a:p>
@@ -6262,7 +6262,7 @@
         </p:spPr>
         <p:txBody>
           <a:bodyPr vert="horz" lIns="91440" tIns="45720" rIns="91440" bIns="45720" rtlCol="0" anchor="b">
-            <a:normAutofit fontScale="92500"/>
+            <a:normAutofit/>
           </a:bodyPr>
           <a:lstStyle/>
           <a:p>
@@ -9261,6 +9261,222 @@
           </a:p>
         </p:txBody>
       </p:sp>
+      <p:pic>
+        <p:nvPicPr>
+          <p:cNvPr id="7" name="Image 6">
+            <a:extLst>
+              <a:ext uri="{FF2B5EF4-FFF2-40B4-BE49-F238E27FC236}">
+                <a16:creationId xmlns:a16="http://schemas.microsoft.com/office/drawing/2014/main" id="{70BD0F02-09CF-4313-8E33-9C10E694E3B3}"/>
+              </a:ext>
+            </a:extLst>
+          </p:cNvPr>
+          <p:cNvPicPr>
+            <a:picLocks noChangeAspect="1"/>
+          </p:cNvPicPr>
+          <p:nvPr/>
+        </p:nvPicPr>
+        <p:blipFill>
+          <a:blip r:embed="rId2">
+            <a:extLst>
+              <a:ext uri="{28A0092B-C50C-407E-A947-70E740481C1C}">
+                <a14:useLocalDpi xmlns:a14="http://schemas.microsoft.com/office/drawing/2010/main" val="0"/>
+              </a:ext>
+            </a:extLst>
+          </a:blip>
+          <a:stretch>
+            <a:fillRect/>
+          </a:stretch>
+        </p:blipFill>
+        <p:spPr>
+          <a:xfrm>
+            <a:off x="324829" y="1810344"/>
+            <a:ext cx="2122536" cy="3454064"/>
+          </a:xfrm>
+          <a:prstGeom prst="rect">
+            <a:avLst/>
+          </a:prstGeom>
+        </p:spPr>
+      </p:pic>
+      <p:pic>
+        <p:nvPicPr>
+          <p:cNvPr id="13" name="Image 12">
+            <a:extLst>
+              <a:ext uri="{FF2B5EF4-FFF2-40B4-BE49-F238E27FC236}">
+                <a16:creationId xmlns:a16="http://schemas.microsoft.com/office/drawing/2014/main" id="{15BEDDC1-876F-4322-8455-5FDD8B056D90}"/>
+              </a:ext>
+            </a:extLst>
+          </p:cNvPr>
+          <p:cNvPicPr>
+            <a:picLocks noChangeAspect="1"/>
+          </p:cNvPicPr>
+          <p:nvPr/>
+        </p:nvPicPr>
+        <p:blipFill>
+          <a:blip r:embed="rId3">
+            <a:extLst>
+              <a:ext uri="{28A0092B-C50C-407E-A947-70E740481C1C}">
+                <a14:useLocalDpi xmlns:a14="http://schemas.microsoft.com/office/drawing/2010/main" val="0"/>
+              </a:ext>
+            </a:extLst>
+          </a:blip>
+          <a:stretch>
+            <a:fillRect/>
+          </a:stretch>
+        </p:blipFill>
+        <p:spPr>
+          <a:xfrm>
+            <a:off x="2650009" y="303511"/>
+            <a:ext cx="2861361" cy="6250974"/>
+          </a:xfrm>
+          <a:prstGeom prst="rect">
+            <a:avLst/>
+          </a:prstGeom>
+        </p:spPr>
+      </p:pic>
+      <p:pic>
+        <p:nvPicPr>
+          <p:cNvPr id="15" name="Image 14">
+            <a:extLst>
+              <a:ext uri="{FF2B5EF4-FFF2-40B4-BE49-F238E27FC236}">
+                <a16:creationId xmlns:a16="http://schemas.microsoft.com/office/drawing/2014/main" id="{A2A39655-10C6-42C1-BC72-7639B2A6776A}"/>
+              </a:ext>
+            </a:extLst>
+          </p:cNvPr>
+          <p:cNvPicPr>
+            <a:picLocks noChangeAspect="1"/>
+          </p:cNvPicPr>
+          <p:nvPr/>
+        </p:nvPicPr>
+        <p:blipFill>
+          <a:blip r:embed="rId4">
+            <a:extLst>
+              <a:ext uri="{28A0092B-C50C-407E-A947-70E740481C1C}">
+                <a14:useLocalDpi xmlns:a14="http://schemas.microsoft.com/office/drawing/2010/main" val="0"/>
+              </a:ext>
+            </a:extLst>
+          </a:blip>
+          <a:stretch>
+            <a:fillRect/>
+          </a:stretch>
+        </p:blipFill>
+        <p:spPr>
+          <a:xfrm>
+            <a:off x="5587264" y="1238629"/>
+            <a:ext cx="2924583" cy="1505160"/>
+          </a:xfrm>
+          <a:prstGeom prst="rect">
+            <a:avLst/>
+          </a:prstGeom>
+        </p:spPr>
+      </p:pic>
+      <p:pic>
+        <p:nvPicPr>
+          <p:cNvPr id="17" name="Image 16">
+            <a:extLst>
+              <a:ext uri="{FF2B5EF4-FFF2-40B4-BE49-F238E27FC236}">
+                <a16:creationId xmlns:a16="http://schemas.microsoft.com/office/drawing/2014/main" id="{E82EB796-BACB-4C02-BE8D-2904617F7989}"/>
+              </a:ext>
+            </a:extLst>
+          </p:cNvPr>
+          <p:cNvPicPr>
+            <a:picLocks noChangeAspect="1"/>
+          </p:cNvPicPr>
+          <p:nvPr/>
+        </p:nvPicPr>
+        <p:blipFill>
+          <a:blip r:embed="rId5">
+            <a:extLst>
+              <a:ext uri="{28A0092B-C50C-407E-A947-70E740481C1C}">
+                <a14:useLocalDpi xmlns:a14="http://schemas.microsoft.com/office/drawing/2010/main" val="0"/>
+              </a:ext>
+            </a:extLst>
+          </a:blip>
+          <a:stretch>
+            <a:fillRect/>
+          </a:stretch>
+        </p:blipFill>
+        <p:spPr>
+          <a:xfrm>
+            <a:off x="5889539" y="2947122"/>
+            <a:ext cx="2324424" cy="1219370"/>
+          </a:xfrm>
+          <a:prstGeom prst="rect">
+            <a:avLst/>
+          </a:prstGeom>
+        </p:spPr>
+      </p:pic>
+      <p:pic>
+        <p:nvPicPr>
+          <p:cNvPr id="22" name="Image 21">
+            <a:extLst>
+              <a:ext uri="{FF2B5EF4-FFF2-40B4-BE49-F238E27FC236}">
+                <a16:creationId xmlns:a16="http://schemas.microsoft.com/office/drawing/2014/main" id="{B78DA315-E7D3-4BA8-8B40-F5FF14939628}"/>
+              </a:ext>
+            </a:extLst>
+          </p:cNvPr>
+          <p:cNvPicPr>
+            <a:picLocks noChangeAspect="1"/>
+          </p:cNvPicPr>
+          <p:nvPr/>
+        </p:nvPicPr>
+        <p:blipFill>
+          <a:blip r:embed="rId6">
+            <a:extLst>
+              <a:ext uri="{28A0092B-C50C-407E-A947-70E740481C1C}">
+                <a14:useLocalDpi xmlns:a14="http://schemas.microsoft.com/office/drawing/2010/main" val="0"/>
+              </a:ext>
+            </a:extLst>
+          </a:blip>
+          <a:stretch>
+            <a:fillRect/>
+          </a:stretch>
+        </p:blipFill>
+        <p:spPr>
+          <a:xfrm>
+            <a:off x="5596790" y="4748126"/>
+            <a:ext cx="2915057" cy="1247949"/>
+          </a:xfrm>
+          <a:prstGeom prst="rect">
+            <a:avLst/>
+          </a:prstGeom>
+        </p:spPr>
+      </p:pic>
+      <p:pic>
+        <p:nvPicPr>
+          <p:cNvPr id="28" name="Image 27">
+            <a:extLst>
+              <a:ext uri="{FF2B5EF4-FFF2-40B4-BE49-F238E27FC236}">
+                <a16:creationId xmlns:a16="http://schemas.microsoft.com/office/drawing/2014/main" id="{88FB63AE-ED32-436B-BAA0-0E7C06706C35}"/>
+              </a:ext>
+            </a:extLst>
+          </p:cNvPr>
+          <p:cNvPicPr>
+            <a:picLocks noChangeAspect="1"/>
+          </p:cNvPicPr>
+          <p:nvPr/>
+        </p:nvPicPr>
+        <p:blipFill>
+          <a:blip r:embed="rId7">
+            <a:extLst>
+              <a:ext uri="{28A0092B-C50C-407E-A947-70E740481C1C}">
+                <a14:useLocalDpi xmlns:a14="http://schemas.microsoft.com/office/drawing/2010/main" val="0"/>
+              </a:ext>
+            </a:extLst>
+          </a:blip>
+          <a:stretch>
+            <a:fillRect/>
+          </a:stretch>
+        </p:blipFill>
+        <p:spPr>
+          <a:xfrm>
+            <a:off x="8592133" y="343456"/>
+            <a:ext cx="3128591" cy="5755653"/>
+          </a:xfrm>
+          <a:prstGeom prst="rect">
+            <a:avLst/>
+          </a:prstGeom>
+        </p:spPr>
+      </p:pic>
     </p:spTree>
     <p:extLst>
       <p:ext uri="{BB962C8B-B14F-4D97-AF65-F5344CB8AC3E}">

--- a/documents/Presentation_JS.pptx
+++ b/documents/Presentation_JS.pptx
@@ -15,10 +15,10 @@
     <p:sldId id="276" r:id="rId3"/>
     <p:sldId id="285" r:id="rId4"/>
     <p:sldId id="278" r:id="rId5"/>
-    <p:sldId id="279" r:id="rId6"/>
-    <p:sldId id="280" r:id="rId7"/>
-    <p:sldId id="290" r:id="rId8"/>
-    <p:sldId id="286" r:id="rId9"/>
+    <p:sldId id="280" r:id="rId6"/>
+    <p:sldId id="290" r:id="rId7"/>
+    <p:sldId id="286" r:id="rId8"/>
+    <p:sldId id="279" r:id="rId9"/>
     <p:sldId id="287" r:id="rId10"/>
     <p:sldId id="289" r:id="rId11"/>
     <p:sldId id="288" r:id="rId12"/>
@@ -226,7 +226,7 @@
           <a:p>
             <a:fld id="{828A8F36-A643-4FAA-8649-965D6B1446A9}" type="datetimeFigureOut">
               <a:rPr lang="fr-FR" smtClean="0"/>
-              <a:t>02/01/2026</a:t>
+              <a:t>04/01/2026</a:t>
             </a:fld>
             <a:endParaRPr lang="fr-FR"/>
           </a:p>
@@ -403,7 +403,7 @@
           <a:p>
             <a:fld id="{2456FC83-ED93-4984-B7AA-3DB9F84FF409}" type="datetimeFigureOut">
               <a:rPr lang="fr-FR" smtClean="0"/>
-              <a:t>02/01/2026</a:t>
+              <a:t>04/01/2026</a:t>
             </a:fld>
             <a:endParaRPr lang="fr-FR"/>
           </a:p>
@@ -714,19 +714,78 @@
           <a:bodyPr/>
           <a:lstStyle/>
           <a:p>
-            <a:r>
-              <a:rPr lang="fr-FR" dirty="0"/>
-              <a:t>Le fameux </a:t>
-            </a:r>
-            <a:r>
-              <a:rPr lang="fr-FR" b="1" dirty="0"/>
-              <a:t>POURQUOI</a:t>
-            </a:r>
-            <a:r>
-              <a:rPr lang="fr-FR" dirty="0"/>
-              <a:t> ?</a:t>
-            </a:r>
-            <a:endParaRPr lang="fr-CH" dirty="0"/>
+            <a:pPr marL="228600" indent="-228600">
+              <a:buAutoNum type="arabicPeriod"/>
+            </a:pPr>
+            <a:r>
+              <a:rPr lang="fr-CH" b="1" dirty="0">
+                <a:effectLst/>
+              </a:rPr>
+              <a:t>Introduction</a:t>
+            </a:r>
+          </a:p>
+          <a:p>
+            <a:pPr marL="0" indent="0">
+              <a:buNone/>
+            </a:pPr>
+            <a:endParaRPr lang="fr-CH" b="1" dirty="0">
+              <a:effectLst/>
+            </a:endParaRPr>
+          </a:p>
+          <a:p>
+            <a:r>
+              <a:rPr lang="fr-CH" dirty="0">
+                <a:effectLst/>
+              </a:rPr>
+              <a:t>Bienvenue à tous. </a:t>
+            </a:r>
+          </a:p>
+          <a:p>
+            <a:r>
+              <a:rPr lang="fr-CH" dirty="0">
+                <a:effectLst/>
+              </a:rPr>
+              <a:t>Aujourd’hui, on vous présente notre projet </a:t>
+            </a:r>
+            <a:r>
+              <a:rPr lang="fr-CH" dirty="0" err="1">
+                <a:effectLst/>
+              </a:rPr>
+              <a:t>SmartCockpit</a:t>
+            </a:r>
+            <a:r>
+              <a:rPr lang="fr-CH" dirty="0">
+                <a:effectLst/>
+              </a:rPr>
+              <a:t>, une solution JavaScript qui permet de suivre en temps réel les données d’un smartphone dans des environnements extrêmes. L’objectif : </a:t>
+            </a:r>
+          </a:p>
+          <a:p>
+            <a:pPr lvl="1"/>
+            <a:r>
+              <a:rPr lang="fr-CH" dirty="0">
+                <a:effectLst/>
+              </a:rPr>
+              <a:t>centraliser</a:t>
+            </a:r>
+          </a:p>
+          <a:p>
+            <a:pPr lvl="1"/>
+            <a:r>
+              <a:rPr lang="fr-CH" dirty="0">
+                <a:effectLst/>
+              </a:rPr>
+              <a:t> visualiser et exploiter les capteurs du téléphone à distance</a:t>
+            </a:r>
+          </a:p>
+          <a:p>
+            <a:pPr lvl="1"/>
+            <a:r>
+              <a:rPr lang="fr-CH" dirty="0">
+                <a:effectLst/>
+              </a:rPr>
+              <a:t>là où l’observation directe est impossible</a:t>
+            </a:r>
           </a:p>
         </p:txBody>
       </p:sp>
@@ -757,6 +816,1726 @@
     <p:extLst>
       <p:ext uri="{BB962C8B-B14F-4D97-AF65-F5344CB8AC3E}">
         <p14:creationId xmlns:p14="http://schemas.microsoft.com/office/powerpoint/2010/main" val="1984430122"/>
+      </p:ext>
+    </p:extLst>
+  </p:cSld>
+  <p:clrMapOvr>
+    <a:masterClrMapping/>
+  </p:clrMapOvr>
+</p:notes>
+</file>
+
+<file path=ppt/notesSlides/notesSlide10.xml><?xml version="1.0" encoding="utf-8"?>
+<p:notes xmlns:a="http://schemas.openxmlformats.org/drawingml/2006/main" xmlns:r="http://schemas.openxmlformats.org/officeDocument/2006/relationships" xmlns:p="http://schemas.openxmlformats.org/presentationml/2006/main">
+  <p:cSld>
+    <p:spTree>
+      <p:nvGrpSpPr>
+        <p:cNvPr id="1" name=""/>
+        <p:cNvGrpSpPr/>
+        <p:nvPr/>
+      </p:nvGrpSpPr>
+      <p:grpSpPr>
+        <a:xfrm>
+          <a:off x="0" y="0"/>
+          <a:ext cx="0" cy="0"/>
+          <a:chOff x="0" y="0"/>
+          <a:chExt cx="0" cy="0"/>
+        </a:xfrm>
+      </p:grpSpPr>
+      <p:sp>
+        <p:nvSpPr>
+          <p:cNvPr id="2" name="Espace réservé de l'image des diapositives 1"/>
+          <p:cNvSpPr>
+            <a:spLocks noGrp="1" noRot="1" noChangeAspect="1"/>
+          </p:cNvSpPr>
+          <p:nvPr>
+            <p:ph type="sldImg"/>
+          </p:nvPr>
+        </p:nvSpPr>
+        <p:spPr/>
+      </p:sp>
+      <p:sp>
+        <p:nvSpPr>
+          <p:cNvPr id="3" name="Espace réservé des notes 2"/>
+          <p:cNvSpPr>
+            <a:spLocks noGrp="1"/>
+          </p:cNvSpPr>
+          <p:nvPr>
+            <p:ph type="body" idx="1"/>
+          </p:nvPr>
+        </p:nvSpPr>
+        <p:spPr/>
+        <p:txBody>
+          <a:bodyPr/>
+          <a:lstStyle/>
+          <a:p>
+            <a:r>
+              <a:rPr lang="fr-CH" b="1" dirty="0">
+                <a:effectLst/>
+              </a:rPr>
+              <a:t>10. Perspectives d’évolution</a:t>
+            </a:r>
+          </a:p>
+          <a:p>
+            <a:endParaRPr lang="fr-CH" b="1" dirty="0">
+              <a:effectLst/>
+            </a:endParaRPr>
+          </a:p>
+          <a:p>
+            <a:r>
+              <a:rPr lang="fr-CH" dirty="0">
+                <a:effectLst/>
+              </a:rPr>
+              <a:t>Pour la suite, on envisage :</a:t>
+            </a:r>
+          </a:p>
+          <a:p>
+            <a:pPr lvl="1">
+              <a:buFont typeface="Arial" panose="020B0604020202020204" pitchFamily="34" charset="0"/>
+              <a:buChar char="•"/>
+            </a:pPr>
+            <a:r>
+              <a:rPr lang="fr-CH" dirty="0">
+                <a:effectLst/>
+              </a:rPr>
+              <a:t> d’ajouter plus de capteurs et widgets</a:t>
+            </a:r>
+          </a:p>
+          <a:p>
+            <a:pPr lvl="1">
+              <a:buFont typeface="Arial" panose="020B0604020202020204" pitchFamily="34" charset="0"/>
+              <a:buChar char="•"/>
+            </a:pPr>
+            <a:r>
+              <a:rPr lang="fr-CH" dirty="0">
+                <a:effectLst/>
+              </a:rPr>
+              <a:t> d’améliorer les interactions avec les widgets</a:t>
+            </a:r>
+          </a:p>
+          <a:p>
+            <a:pPr lvl="1">
+              <a:buFont typeface="Arial" panose="020B0604020202020204" pitchFamily="34" charset="0"/>
+              <a:buChar char="•"/>
+            </a:pPr>
+            <a:r>
+              <a:rPr lang="fr-CH" dirty="0">
+                <a:effectLst/>
+              </a:rPr>
+              <a:t> d’optimiser le flux de données</a:t>
+            </a:r>
+          </a:p>
+          <a:p>
+            <a:pPr lvl="1">
+              <a:buFont typeface="Arial" panose="020B0604020202020204" pitchFamily="34" charset="0"/>
+              <a:buChar char="•"/>
+            </a:pPr>
+            <a:r>
+              <a:rPr lang="fr-CH" dirty="0">
+                <a:effectLst/>
+              </a:rPr>
+              <a:t> d’ajouter un mode hors‑ligne et un historique des données Le cockpit peut évoluer vers une solution terrain complète</a:t>
+            </a:r>
+          </a:p>
+          <a:p>
+            <a:endParaRPr lang="fr-CH" dirty="0"/>
+          </a:p>
+        </p:txBody>
+      </p:sp>
+      <p:sp>
+        <p:nvSpPr>
+          <p:cNvPr id="4" name="Espace réservé du numéro de diapositive 3"/>
+          <p:cNvSpPr>
+            <a:spLocks noGrp="1"/>
+          </p:cNvSpPr>
+          <p:nvPr>
+            <p:ph type="sldNum" sz="quarter" idx="5"/>
+          </p:nvPr>
+        </p:nvSpPr>
+        <p:spPr/>
+        <p:txBody>
+          <a:bodyPr/>
+          <a:lstStyle/>
+          <a:p>
+            <a:fld id="{71653B15-6AAF-48C6-8ACB-6499FA667B64}" type="slidenum">
+              <a:rPr lang="fr-FR" smtClean="0"/>
+              <a:t>11</a:t>
+            </a:fld>
+            <a:endParaRPr lang="fr-FR"/>
+          </a:p>
+        </p:txBody>
+      </p:sp>
+    </p:spTree>
+    <p:extLst>
+      <p:ext uri="{BB962C8B-B14F-4D97-AF65-F5344CB8AC3E}">
+        <p14:creationId xmlns:p14="http://schemas.microsoft.com/office/powerpoint/2010/main" val="2519852892"/>
+      </p:ext>
+    </p:extLst>
+  </p:cSld>
+  <p:clrMapOvr>
+    <a:masterClrMapping/>
+  </p:clrMapOvr>
+</p:notes>
+</file>
+
+<file path=ppt/notesSlides/notesSlide11.xml><?xml version="1.0" encoding="utf-8"?>
+<p:notes xmlns:a="http://schemas.openxmlformats.org/drawingml/2006/main" xmlns:r="http://schemas.openxmlformats.org/officeDocument/2006/relationships" xmlns:p="http://schemas.openxmlformats.org/presentationml/2006/main">
+  <p:cSld>
+    <p:spTree>
+      <p:nvGrpSpPr>
+        <p:cNvPr id="1" name=""/>
+        <p:cNvGrpSpPr/>
+        <p:nvPr/>
+      </p:nvGrpSpPr>
+      <p:grpSpPr>
+        <a:xfrm>
+          <a:off x="0" y="0"/>
+          <a:ext cx="0" cy="0"/>
+          <a:chOff x="0" y="0"/>
+          <a:chExt cx="0" cy="0"/>
+        </a:xfrm>
+      </p:grpSpPr>
+      <p:sp>
+        <p:nvSpPr>
+          <p:cNvPr id="2" name="Espace réservé de l'image des diapositives 1"/>
+          <p:cNvSpPr>
+            <a:spLocks noGrp="1" noRot="1" noChangeAspect="1"/>
+          </p:cNvSpPr>
+          <p:nvPr>
+            <p:ph type="sldImg"/>
+          </p:nvPr>
+        </p:nvSpPr>
+        <p:spPr/>
+      </p:sp>
+      <p:sp>
+        <p:nvSpPr>
+          <p:cNvPr id="3" name="Espace réservé des notes 2"/>
+          <p:cNvSpPr>
+            <a:spLocks noGrp="1"/>
+          </p:cNvSpPr>
+          <p:nvPr>
+            <p:ph type="body" idx="1"/>
+          </p:nvPr>
+        </p:nvSpPr>
+        <p:spPr/>
+        <p:txBody>
+          <a:bodyPr/>
+          <a:lstStyle/>
+          <a:p>
+            <a:endParaRPr lang="fr-CH" dirty="0"/>
+          </a:p>
+        </p:txBody>
+      </p:sp>
+      <p:sp>
+        <p:nvSpPr>
+          <p:cNvPr id="4" name="Espace réservé du numéro de diapositive 3"/>
+          <p:cNvSpPr>
+            <a:spLocks noGrp="1"/>
+          </p:cNvSpPr>
+          <p:nvPr>
+            <p:ph type="sldNum" sz="quarter" idx="5"/>
+          </p:nvPr>
+        </p:nvSpPr>
+        <p:spPr/>
+        <p:txBody>
+          <a:bodyPr/>
+          <a:lstStyle/>
+          <a:p>
+            <a:fld id="{71653B15-6AAF-48C6-8ACB-6499FA667B64}" type="slidenum">
+              <a:rPr lang="fr-FR" smtClean="0"/>
+              <a:t>12</a:t>
+            </a:fld>
+            <a:endParaRPr lang="fr-FR"/>
+          </a:p>
+        </p:txBody>
+      </p:sp>
+    </p:spTree>
+    <p:extLst>
+      <p:ext uri="{BB962C8B-B14F-4D97-AF65-F5344CB8AC3E}">
+        <p14:creationId xmlns:p14="http://schemas.microsoft.com/office/powerpoint/2010/main" val="3096406260"/>
+      </p:ext>
+    </p:extLst>
+  </p:cSld>
+  <p:clrMapOvr>
+    <a:masterClrMapping/>
+  </p:clrMapOvr>
+</p:notes>
+</file>
+
+<file path=ppt/notesSlides/notesSlide2.xml><?xml version="1.0" encoding="utf-8"?>
+<p:notes xmlns:a="http://schemas.openxmlformats.org/drawingml/2006/main" xmlns:r="http://schemas.openxmlformats.org/officeDocument/2006/relationships" xmlns:p="http://schemas.openxmlformats.org/presentationml/2006/main">
+  <p:cSld>
+    <p:spTree>
+      <p:nvGrpSpPr>
+        <p:cNvPr id="1" name=""/>
+        <p:cNvGrpSpPr/>
+        <p:nvPr/>
+      </p:nvGrpSpPr>
+      <p:grpSpPr>
+        <a:xfrm>
+          <a:off x="0" y="0"/>
+          <a:ext cx="0" cy="0"/>
+          <a:chOff x="0" y="0"/>
+          <a:chExt cx="0" cy="0"/>
+        </a:xfrm>
+      </p:grpSpPr>
+      <p:sp>
+        <p:nvSpPr>
+          <p:cNvPr id="2" name="Espace réservé de l'image des diapositives 1"/>
+          <p:cNvSpPr>
+            <a:spLocks noGrp="1" noRot="1" noChangeAspect="1"/>
+          </p:cNvSpPr>
+          <p:nvPr>
+            <p:ph type="sldImg"/>
+          </p:nvPr>
+        </p:nvSpPr>
+        <p:spPr/>
+      </p:sp>
+      <p:sp>
+        <p:nvSpPr>
+          <p:cNvPr id="3" name="Espace réservé des notes 2"/>
+          <p:cNvSpPr>
+            <a:spLocks noGrp="1"/>
+          </p:cNvSpPr>
+          <p:nvPr>
+            <p:ph type="body" idx="1"/>
+          </p:nvPr>
+        </p:nvSpPr>
+        <p:spPr/>
+        <p:txBody>
+          <a:bodyPr/>
+          <a:lstStyle/>
+          <a:p>
+            <a:r>
+              <a:rPr lang="fr-CH" b="1" dirty="0">
+                <a:effectLst/>
+              </a:rPr>
+              <a:t>2. Exemples de besoins couverts</a:t>
+            </a:r>
+          </a:p>
+          <a:p>
+            <a:endParaRPr lang="fr-CH" b="1" dirty="0">
+              <a:effectLst/>
+            </a:endParaRPr>
+          </a:p>
+          <a:p>
+            <a:r>
+              <a:rPr lang="fr-CH" dirty="0">
+                <a:effectLst/>
+              </a:rPr>
+              <a:t>Voici quelques cas concrets où notre solution est utile : </a:t>
+            </a:r>
+          </a:p>
+          <a:p>
+            <a:endParaRPr lang="fr-CH" dirty="0">
+              <a:effectLst/>
+            </a:endParaRPr>
+          </a:p>
+          <a:p>
+            <a:pPr lvl="1">
+              <a:buFont typeface="Arial" panose="020B0604020202020204" pitchFamily="34" charset="0"/>
+              <a:buChar char="•"/>
+            </a:pPr>
+            <a:r>
+              <a:rPr lang="fr-CH" dirty="0">
+                <a:effectLst/>
+              </a:rPr>
+              <a:t> suivi d’un drone, d’un skieur</a:t>
+            </a:r>
+          </a:p>
+          <a:p>
+            <a:pPr marL="457200" marR="0" lvl="1" indent="0" algn="l" defTabSz="914400" rtl="0" eaLnBrk="1" fontAlgn="auto" latinLnBrk="0" hangingPunct="1">
+              <a:lnSpc>
+                <a:spcPct val="100000"/>
+              </a:lnSpc>
+              <a:spcBef>
+                <a:spcPts val="0"/>
+              </a:spcBef>
+              <a:spcAft>
+                <a:spcPts val="0"/>
+              </a:spcAft>
+              <a:buClrTx/>
+              <a:buSzTx/>
+              <a:buFont typeface="Arial" panose="020B0604020202020204" pitchFamily="34" charset="0"/>
+              <a:buChar char="•"/>
+              <a:tabLst/>
+              <a:defRPr/>
+            </a:pPr>
+            <a:r>
+              <a:rPr lang="fr-CH" dirty="0">
+                <a:effectLst/>
+              </a:rPr>
+              <a:t> d’un parapentiste</a:t>
+            </a:r>
+          </a:p>
+          <a:p>
+            <a:pPr marL="457200" marR="0" lvl="1" indent="0" algn="l" defTabSz="914400" rtl="0" eaLnBrk="1" fontAlgn="auto" latinLnBrk="0" hangingPunct="1">
+              <a:lnSpc>
+                <a:spcPct val="100000"/>
+              </a:lnSpc>
+              <a:spcBef>
+                <a:spcPts val="0"/>
+              </a:spcBef>
+              <a:spcAft>
+                <a:spcPts val="0"/>
+              </a:spcAft>
+              <a:buClrTx/>
+              <a:buSzTx/>
+              <a:buFont typeface="Arial" panose="020B0604020202020204" pitchFamily="34" charset="0"/>
+              <a:buChar char="•"/>
+              <a:tabLst/>
+              <a:defRPr/>
+            </a:pPr>
+            <a:r>
+              <a:rPr lang="fr-CH" dirty="0">
+                <a:effectLst/>
+              </a:rPr>
+              <a:t> d’un bateau en mer</a:t>
+            </a:r>
+          </a:p>
+          <a:p>
+            <a:pPr lvl="1">
+              <a:buFont typeface="Arial" panose="020B0604020202020204" pitchFamily="34" charset="0"/>
+              <a:buChar char="•"/>
+            </a:pPr>
+            <a:endParaRPr lang="fr-CH" dirty="0">
+              <a:effectLst/>
+            </a:endParaRPr>
+          </a:p>
+          <a:p>
+            <a:endParaRPr lang="fr-CH" dirty="0">
+              <a:effectLst/>
+            </a:endParaRPr>
+          </a:p>
+        </p:txBody>
+      </p:sp>
+      <p:sp>
+        <p:nvSpPr>
+          <p:cNvPr id="4" name="Espace réservé du numéro de diapositive 3"/>
+          <p:cNvSpPr>
+            <a:spLocks noGrp="1"/>
+          </p:cNvSpPr>
+          <p:nvPr>
+            <p:ph type="sldNum" sz="quarter" idx="5"/>
+          </p:nvPr>
+        </p:nvSpPr>
+        <p:spPr/>
+        <p:txBody>
+          <a:bodyPr/>
+          <a:lstStyle/>
+          <a:p>
+            <a:fld id="{71653B15-6AAF-48C6-8ACB-6499FA667B64}" type="slidenum">
+              <a:rPr lang="fr-FR" smtClean="0"/>
+              <a:t>3</a:t>
+            </a:fld>
+            <a:endParaRPr lang="fr-FR"/>
+          </a:p>
+        </p:txBody>
+      </p:sp>
+    </p:spTree>
+    <p:extLst>
+      <p:ext uri="{BB962C8B-B14F-4D97-AF65-F5344CB8AC3E}">
+        <p14:creationId xmlns:p14="http://schemas.microsoft.com/office/powerpoint/2010/main" val="2872589628"/>
+      </p:ext>
+    </p:extLst>
+  </p:cSld>
+  <p:clrMapOvr>
+    <a:masterClrMapping/>
+  </p:clrMapOvr>
+</p:notes>
+</file>
+
+<file path=ppt/notesSlides/notesSlide3.xml><?xml version="1.0" encoding="utf-8"?>
+<p:notes xmlns:a="http://schemas.openxmlformats.org/drawingml/2006/main" xmlns:r="http://schemas.openxmlformats.org/officeDocument/2006/relationships" xmlns:p="http://schemas.openxmlformats.org/presentationml/2006/main">
+  <p:cSld>
+    <p:spTree>
+      <p:nvGrpSpPr>
+        <p:cNvPr id="1" name=""/>
+        <p:cNvGrpSpPr/>
+        <p:nvPr/>
+      </p:nvGrpSpPr>
+      <p:grpSpPr>
+        <a:xfrm>
+          <a:off x="0" y="0"/>
+          <a:ext cx="0" cy="0"/>
+          <a:chOff x="0" y="0"/>
+          <a:chExt cx="0" cy="0"/>
+        </a:xfrm>
+      </p:grpSpPr>
+      <p:sp>
+        <p:nvSpPr>
+          <p:cNvPr id="2" name="Espace réservé de l'image des diapositives 1"/>
+          <p:cNvSpPr>
+            <a:spLocks noGrp="1" noRot="1" noChangeAspect="1"/>
+          </p:cNvSpPr>
+          <p:nvPr>
+            <p:ph type="sldImg"/>
+          </p:nvPr>
+        </p:nvSpPr>
+        <p:spPr/>
+      </p:sp>
+      <p:sp>
+        <p:nvSpPr>
+          <p:cNvPr id="3" name="Espace réservé des notes 2"/>
+          <p:cNvSpPr>
+            <a:spLocks noGrp="1"/>
+          </p:cNvSpPr>
+          <p:nvPr>
+            <p:ph type="body" idx="1"/>
+          </p:nvPr>
+        </p:nvSpPr>
+        <p:spPr/>
+        <p:txBody>
+          <a:bodyPr/>
+          <a:lstStyle/>
+          <a:p>
+            <a:r>
+              <a:rPr lang="fr-CH" b="1" dirty="0">
+                <a:effectLst/>
+              </a:rPr>
+              <a:t>3. Concept du projet</a:t>
+            </a:r>
+          </a:p>
+          <a:p>
+            <a:endParaRPr lang="fr-CH" b="1" dirty="0">
+              <a:effectLst/>
+            </a:endParaRPr>
+          </a:p>
+          <a:p>
+            <a:r>
+              <a:rPr lang="fr-CH" dirty="0">
+                <a:effectLst/>
+              </a:rPr>
+              <a:t>Ce slide résume le cœur du projet : </a:t>
+            </a:r>
+          </a:p>
+          <a:p>
+            <a:r>
+              <a:rPr lang="fr-CH" dirty="0">
+                <a:effectLst/>
+              </a:rPr>
+              <a:t>	collecter les données des capteurs d’un smartphone Android et les transmettre en temps réel vers une interface web. </a:t>
+            </a:r>
+          </a:p>
+          <a:p>
+            <a:r>
+              <a:rPr lang="fr-CH" dirty="0">
+                <a:effectLst/>
+              </a:rPr>
+              <a:t>	L’utilisateur appuie sur ‘START’ sur le téléphone, et les données </a:t>
+            </a:r>
+          </a:p>
+          <a:p>
+            <a:r>
+              <a:rPr lang="fr-CH" dirty="0">
+                <a:effectLst/>
+              </a:rPr>
+              <a:t>		— GPS, orientation, micro, caméra, etc. </a:t>
+            </a:r>
+          </a:p>
+          <a:p>
+            <a:r>
+              <a:rPr lang="fr-CH" dirty="0">
+                <a:effectLst/>
+              </a:rPr>
+              <a:t>		— sont envoyées via </a:t>
+            </a:r>
+            <a:r>
+              <a:rPr lang="fr-CH" dirty="0" err="1">
+                <a:effectLst/>
+              </a:rPr>
+              <a:t>WebSocket</a:t>
+            </a:r>
+            <a:r>
+              <a:rPr lang="fr-CH" dirty="0">
+                <a:effectLst/>
+              </a:rPr>
+              <a:t> à notre serveur Node.js hébergé sur Render.com.. </a:t>
+            </a:r>
+          </a:p>
+          <a:p>
+            <a:endParaRPr lang="fr-CH" dirty="0">
+              <a:effectLst/>
+            </a:endParaRPr>
+          </a:p>
+          <a:p>
+            <a:r>
+              <a:rPr lang="fr-CH" dirty="0">
+                <a:effectLst/>
+              </a:rPr>
+              <a:t>Ensuite, elles sont affichées sous forme de widgets dans notre cockpit de supervision. </a:t>
+            </a:r>
+          </a:p>
+          <a:p>
+            <a:endParaRPr lang="fr-CH" dirty="0">
+              <a:effectLst/>
+            </a:endParaRPr>
+          </a:p>
+          <a:p>
+            <a:r>
+              <a:rPr lang="fr-CH" dirty="0">
+                <a:effectLst/>
+              </a:rPr>
+              <a:t>Ce concept nous permet de suivre des activités mobiles à distance, avec une interface claire, modulaire et réactive.</a:t>
+            </a:r>
+          </a:p>
+          <a:p>
+            <a:endParaRPr lang="fr-CH" dirty="0"/>
+          </a:p>
+        </p:txBody>
+      </p:sp>
+      <p:sp>
+        <p:nvSpPr>
+          <p:cNvPr id="4" name="Espace réservé du numéro de diapositive 3"/>
+          <p:cNvSpPr>
+            <a:spLocks noGrp="1"/>
+          </p:cNvSpPr>
+          <p:nvPr>
+            <p:ph type="sldNum" sz="quarter" idx="5"/>
+          </p:nvPr>
+        </p:nvSpPr>
+        <p:spPr/>
+        <p:txBody>
+          <a:bodyPr/>
+          <a:lstStyle/>
+          <a:p>
+            <a:fld id="{71653B15-6AAF-48C6-8ACB-6499FA667B64}" type="slidenum">
+              <a:rPr lang="fr-FR" smtClean="0"/>
+              <a:t>4</a:t>
+            </a:fld>
+            <a:endParaRPr lang="fr-FR"/>
+          </a:p>
+        </p:txBody>
+      </p:sp>
+    </p:spTree>
+    <p:extLst>
+      <p:ext uri="{BB962C8B-B14F-4D97-AF65-F5344CB8AC3E}">
+        <p14:creationId xmlns:p14="http://schemas.microsoft.com/office/powerpoint/2010/main" val="3277561093"/>
+      </p:ext>
+    </p:extLst>
+  </p:cSld>
+  <p:clrMapOvr>
+    <a:masterClrMapping/>
+  </p:clrMapOvr>
+</p:notes>
+</file>
+
+<file path=ppt/notesSlides/notesSlide4.xml><?xml version="1.0" encoding="utf-8"?>
+<p:notes xmlns:a="http://schemas.openxmlformats.org/drawingml/2006/main" xmlns:r="http://schemas.openxmlformats.org/officeDocument/2006/relationships" xmlns:p="http://schemas.openxmlformats.org/presentationml/2006/main">
+  <p:cSld>
+    <p:spTree>
+      <p:nvGrpSpPr>
+        <p:cNvPr id="1" name=""/>
+        <p:cNvGrpSpPr/>
+        <p:nvPr/>
+      </p:nvGrpSpPr>
+      <p:grpSpPr>
+        <a:xfrm>
+          <a:off x="0" y="0"/>
+          <a:ext cx="0" cy="0"/>
+          <a:chOff x="0" y="0"/>
+          <a:chExt cx="0" cy="0"/>
+        </a:xfrm>
+      </p:grpSpPr>
+      <p:sp>
+        <p:nvSpPr>
+          <p:cNvPr id="2" name="Espace réservé de l'image des diapositives 1"/>
+          <p:cNvSpPr>
+            <a:spLocks noGrp="1" noRot="1" noChangeAspect="1"/>
+          </p:cNvSpPr>
+          <p:nvPr>
+            <p:ph type="sldImg"/>
+          </p:nvPr>
+        </p:nvSpPr>
+        <p:spPr/>
+      </p:sp>
+      <p:sp>
+        <p:nvSpPr>
+          <p:cNvPr id="3" name="Espace réservé des notes 2"/>
+          <p:cNvSpPr>
+            <a:spLocks noGrp="1"/>
+          </p:cNvSpPr>
+          <p:nvPr>
+            <p:ph type="body" idx="1"/>
+          </p:nvPr>
+        </p:nvSpPr>
+        <p:spPr/>
+        <p:txBody>
+          <a:bodyPr/>
+          <a:lstStyle/>
+          <a:p>
+            <a:r>
+              <a:rPr lang="fr-CH" b="1" dirty="0">
+                <a:effectLst/>
+              </a:rPr>
+              <a:t>4. Architecture générale</a:t>
+            </a:r>
+          </a:p>
+          <a:p>
+            <a:endParaRPr lang="fr-CH" b="1" dirty="0">
+              <a:effectLst/>
+            </a:endParaRPr>
+          </a:p>
+          <a:p>
+            <a:r>
+              <a:rPr lang="fr-CH" dirty="0">
+                <a:effectLst/>
+              </a:rPr>
+              <a:t>Voici le schéma global.</a:t>
+            </a:r>
+          </a:p>
+          <a:p>
+            <a:endParaRPr lang="fr-CH" dirty="0">
+              <a:effectLst/>
+            </a:endParaRPr>
+          </a:p>
+          <a:p>
+            <a:r>
+              <a:rPr lang="fr-CH" dirty="0">
+                <a:effectLst/>
+              </a:rPr>
+              <a:t>Le smartphone envoie ses données capteurs via </a:t>
+            </a:r>
+            <a:r>
+              <a:rPr lang="fr-CH" dirty="0" err="1">
+                <a:effectLst/>
+              </a:rPr>
+              <a:t>WebSocket</a:t>
+            </a:r>
+            <a:r>
+              <a:rPr lang="fr-CH" dirty="0">
+                <a:effectLst/>
+              </a:rPr>
+              <a:t> à un serveur Node.js hébergé sur Render.com. </a:t>
+            </a:r>
+          </a:p>
+          <a:p>
+            <a:endParaRPr lang="fr-CH" dirty="0">
+              <a:effectLst/>
+            </a:endParaRPr>
+          </a:p>
+          <a:p>
+            <a:r>
+              <a:rPr lang="fr-CH" dirty="0">
+                <a:effectLst/>
+              </a:rPr>
+              <a:t>Ce serveur les transmet ensuite à notre interface cockpit, qui les affiche en temps réel sous forme de widgets visuels.</a:t>
+            </a:r>
+          </a:p>
+          <a:p>
+            <a:endParaRPr lang="fr-CH" dirty="0"/>
+          </a:p>
+        </p:txBody>
+      </p:sp>
+      <p:sp>
+        <p:nvSpPr>
+          <p:cNvPr id="4" name="Espace réservé du numéro de diapositive 3"/>
+          <p:cNvSpPr>
+            <a:spLocks noGrp="1"/>
+          </p:cNvSpPr>
+          <p:nvPr>
+            <p:ph type="sldNum" sz="quarter" idx="5"/>
+          </p:nvPr>
+        </p:nvSpPr>
+        <p:spPr/>
+        <p:txBody>
+          <a:bodyPr/>
+          <a:lstStyle/>
+          <a:p>
+            <a:fld id="{71653B15-6AAF-48C6-8ACB-6499FA667B64}" type="slidenum">
+              <a:rPr lang="fr-FR" smtClean="0"/>
+              <a:t>5</a:t>
+            </a:fld>
+            <a:endParaRPr lang="fr-FR"/>
+          </a:p>
+        </p:txBody>
+      </p:sp>
+    </p:spTree>
+    <p:extLst>
+      <p:ext uri="{BB962C8B-B14F-4D97-AF65-F5344CB8AC3E}">
+        <p14:creationId xmlns:p14="http://schemas.microsoft.com/office/powerpoint/2010/main" val="2605901230"/>
+      </p:ext>
+    </p:extLst>
+  </p:cSld>
+  <p:clrMapOvr>
+    <a:masterClrMapping/>
+  </p:clrMapOvr>
+</p:notes>
+</file>
+
+<file path=ppt/notesSlides/notesSlide5.xml><?xml version="1.0" encoding="utf-8"?>
+<p:notes xmlns:a="http://schemas.openxmlformats.org/drawingml/2006/main" xmlns:r="http://schemas.openxmlformats.org/officeDocument/2006/relationships" xmlns:p="http://schemas.openxmlformats.org/presentationml/2006/main">
+  <p:cSld>
+    <p:spTree>
+      <p:nvGrpSpPr>
+        <p:cNvPr id="1" name=""/>
+        <p:cNvGrpSpPr/>
+        <p:nvPr/>
+      </p:nvGrpSpPr>
+      <p:grpSpPr>
+        <a:xfrm>
+          <a:off x="0" y="0"/>
+          <a:ext cx="0" cy="0"/>
+          <a:chOff x="0" y="0"/>
+          <a:chExt cx="0" cy="0"/>
+        </a:xfrm>
+      </p:grpSpPr>
+      <p:sp>
+        <p:nvSpPr>
+          <p:cNvPr id="2" name="Espace réservé de l'image des diapositives 1"/>
+          <p:cNvSpPr>
+            <a:spLocks noGrp="1" noRot="1" noChangeAspect="1"/>
+          </p:cNvSpPr>
+          <p:nvPr>
+            <p:ph type="sldImg"/>
+          </p:nvPr>
+        </p:nvSpPr>
+        <p:spPr/>
+      </p:sp>
+      <p:sp>
+        <p:nvSpPr>
+          <p:cNvPr id="3" name="Espace réservé des notes 2"/>
+          <p:cNvSpPr>
+            <a:spLocks noGrp="1"/>
+          </p:cNvSpPr>
+          <p:nvPr>
+            <p:ph type="body" idx="1"/>
+          </p:nvPr>
+        </p:nvSpPr>
+        <p:spPr/>
+        <p:txBody>
+          <a:bodyPr/>
+          <a:lstStyle/>
+          <a:p>
+            <a:r>
+              <a:rPr lang="fr-CH" b="1" dirty="0">
+                <a:effectLst/>
+              </a:rPr>
+              <a:t>5. Organisation du projet</a:t>
+            </a:r>
+          </a:p>
+          <a:p>
+            <a:endParaRPr lang="fr-CH" b="1" dirty="0">
+              <a:effectLst/>
+            </a:endParaRPr>
+          </a:p>
+          <a:p>
+            <a:r>
+              <a:rPr lang="fr-CH" dirty="0">
+                <a:effectLst/>
+              </a:rPr>
+              <a:t>Notre projet est structuré en modules :</a:t>
+            </a:r>
+          </a:p>
+          <a:p>
+            <a:endParaRPr lang="fr-CH" dirty="0">
+              <a:effectLst/>
+            </a:endParaRPr>
+          </a:p>
+          <a:p>
+            <a:pPr lvl="1">
+              <a:buFont typeface="Arial" panose="020B0604020202020204" pitchFamily="34" charset="0"/>
+              <a:buChar char="•"/>
+            </a:pPr>
+            <a:r>
+              <a:rPr lang="fr-CH" dirty="0">
+                <a:effectLst/>
+              </a:rPr>
+              <a:t> cockpit/ contient les widgets et le code d’affichage</a:t>
+            </a:r>
+          </a:p>
+          <a:p>
+            <a:pPr lvl="1">
+              <a:buFont typeface="Arial" panose="020B0604020202020204" pitchFamily="34" charset="0"/>
+              <a:buChar char="•"/>
+            </a:pPr>
+            <a:r>
+              <a:rPr lang="fr-CH" dirty="0">
+                <a:effectLst/>
+              </a:rPr>
+              <a:t> server/ gère les connexions </a:t>
+            </a:r>
+            <a:r>
+              <a:rPr lang="fr-CH" dirty="0" err="1">
+                <a:effectLst/>
+              </a:rPr>
+              <a:t>WebSocket</a:t>
+            </a:r>
+            <a:endParaRPr lang="fr-CH" dirty="0">
+              <a:effectLst/>
+            </a:endParaRPr>
+          </a:p>
+          <a:p>
+            <a:pPr lvl="1">
+              <a:buFont typeface="Arial" panose="020B0604020202020204" pitchFamily="34" charset="0"/>
+              <a:buChar char="•"/>
+            </a:pPr>
+            <a:r>
+              <a:rPr lang="fr-CH" dirty="0">
+                <a:effectLst/>
+              </a:rPr>
+              <a:t> smartphone/ contient le code embarqué côté mobile</a:t>
+            </a:r>
+          </a:p>
+          <a:p>
+            <a:pPr lvl="1">
+              <a:buFont typeface="Arial" panose="020B0604020202020204" pitchFamily="34" charset="0"/>
+              <a:buChar char="•"/>
+            </a:pPr>
+            <a:r>
+              <a:rPr lang="fr-CH" dirty="0">
+                <a:effectLst/>
+              </a:rPr>
+              <a:t> documents/ regroupe les livrables Chaque widget est indépendant et chargé dynamiquement.</a:t>
+            </a:r>
+          </a:p>
+          <a:p>
+            <a:endParaRPr lang="fr-CH" dirty="0"/>
+          </a:p>
+        </p:txBody>
+      </p:sp>
+      <p:sp>
+        <p:nvSpPr>
+          <p:cNvPr id="4" name="Espace réservé du numéro de diapositive 3"/>
+          <p:cNvSpPr>
+            <a:spLocks noGrp="1"/>
+          </p:cNvSpPr>
+          <p:nvPr>
+            <p:ph type="sldNum" sz="quarter" idx="5"/>
+          </p:nvPr>
+        </p:nvSpPr>
+        <p:spPr/>
+        <p:txBody>
+          <a:bodyPr/>
+          <a:lstStyle/>
+          <a:p>
+            <a:fld id="{71653B15-6AAF-48C6-8ACB-6499FA667B64}" type="slidenum">
+              <a:rPr lang="fr-FR" smtClean="0"/>
+              <a:t>6</a:t>
+            </a:fld>
+            <a:endParaRPr lang="fr-FR"/>
+          </a:p>
+        </p:txBody>
+      </p:sp>
+    </p:spTree>
+    <p:extLst>
+      <p:ext uri="{BB962C8B-B14F-4D97-AF65-F5344CB8AC3E}">
+        <p14:creationId xmlns:p14="http://schemas.microsoft.com/office/powerpoint/2010/main" val="3871856801"/>
+      </p:ext>
+    </p:extLst>
+  </p:cSld>
+  <p:clrMapOvr>
+    <a:masterClrMapping/>
+  </p:clrMapOvr>
+</p:notes>
+</file>
+
+<file path=ppt/notesSlides/notesSlide6.xml><?xml version="1.0" encoding="utf-8"?>
+<p:notes xmlns:a="http://schemas.openxmlformats.org/drawingml/2006/main" xmlns:r="http://schemas.openxmlformats.org/officeDocument/2006/relationships" xmlns:p="http://schemas.openxmlformats.org/presentationml/2006/main">
+  <p:cSld>
+    <p:spTree>
+      <p:nvGrpSpPr>
+        <p:cNvPr id="1" name=""/>
+        <p:cNvGrpSpPr/>
+        <p:nvPr/>
+      </p:nvGrpSpPr>
+      <p:grpSpPr>
+        <a:xfrm>
+          <a:off x="0" y="0"/>
+          <a:ext cx="0" cy="0"/>
+          <a:chOff x="0" y="0"/>
+          <a:chExt cx="0" cy="0"/>
+        </a:xfrm>
+      </p:grpSpPr>
+      <p:sp>
+        <p:nvSpPr>
+          <p:cNvPr id="2" name="Espace réservé de l'image des diapositives 1"/>
+          <p:cNvSpPr>
+            <a:spLocks noGrp="1" noRot="1" noChangeAspect="1"/>
+          </p:cNvSpPr>
+          <p:nvPr>
+            <p:ph type="sldImg"/>
+          </p:nvPr>
+        </p:nvSpPr>
+        <p:spPr/>
+      </p:sp>
+      <p:sp>
+        <p:nvSpPr>
+          <p:cNvPr id="3" name="Espace réservé des notes 2"/>
+          <p:cNvSpPr>
+            <a:spLocks noGrp="1"/>
+          </p:cNvSpPr>
+          <p:nvPr>
+            <p:ph type="body" idx="1"/>
+          </p:nvPr>
+        </p:nvSpPr>
+        <p:spPr/>
+        <p:txBody>
+          <a:bodyPr/>
+          <a:lstStyle/>
+          <a:p>
+            <a:r>
+              <a:rPr lang="fr-CH" b="1" dirty="0">
+                <a:effectLst/>
+              </a:rPr>
+              <a:t>6. Technologies utilisées</a:t>
+            </a:r>
+          </a:p>
+          <a:p>
+            <a:endParaRPr lang="fr-CH" b="1" dirty="0">
+              <a:effectLst/>
+            </a:endParaRPr>
+          </a:p>
+          <a:p>
+            <a:r>
+              <a:rPr lang="fr-CH" dirty="0">
+                <a:effectLst/>
+              </a:rPr>
+              <a:t>On a découvert et utilisé plusieurs technologies modernes :</a:t>
+            </a:r>
+          </a:p>
+          <a:p>
+            <a:endParaRPr lang="fr-CH" dirty="0">
+              <a:effectLst/>
+            </a:endParaRPr>
+          </a:p>
+          <a:p>
+            <a:pPr lvl="1">
+              <a:buFont typeface="Arial" panose="020B0604020202020204" pitchFamily="34" charset="0"/>
+              <a:buChar char="•"/>
+            </a:pPr>
+            <a:r>
+              <a:rPr lang="fr-CH" dirty="0">
+                <a:effectLst/>
+              </a:rPr>
+              <a:t> </a:t>
+            </a:r>
+            <a:r>
+              <a:rPr lang="fr-CH" dirty="0" err="1">
+                <a:effectLst/>
+              </a:rPr>
+              <a:t>WebSocket</a:t>
+            </a:r>
+            <a:r>
+              <a:rPr lang="fr-CH" dirty="0">
+                <a:effectLst/>
+              </a:rPr>
+              <a:t> pour le flux temps réel</a:t>
+            </a:r>
+          </a:p>
+          <a:p>
+            <a:pPr lvl="1">
+              <a:buFont typeface="Arial" panose="020B0604020202020204" pitchFamily="34" charset="0"/>
+              <a:buChar char="•"/>
+            </a:pPr>
+            <a:r>
+              <a:rPr lang="fr-CH" dirty="0">
+                <a:effectLst/>
+              </a:rPr>
+              <a:t> </a:t>
+            </a:r>
+            <a:r>
+              <a:rPr lang="fr-CH" dirty="0" err="1">
+                <a:effectLst/>
+              </a:rPr>
+              <a:t>WebRTC</a:t>
+            </a:r>
+            <a:r>
+              <a:rPr lang="fr-CH" dirty="0">
+                <a:effectLst/>
+              </a:rPr>
+              <a:t> pour le streaming vidéo</a:t>
+            </a:r>
+          </a:p>
+          <a:p>
+            <a:pPr lvl="1">
+              <a:buFont typeface="Arial" panose="020B0604020202020204" pitchFamily="34" charset="0"/>
+              <a:buChar char="•"/>
+            </a:pPr>
+            <a:r>
+              <a:rPr lang="fr-CH" dirty="0">
+                <a:effectLst/>
+              </a:rPr>
+              <a:t> Node.js pour le backend</a:t>
+            </a:r>
+          </a:p>
+          <a:p>
+            <a:pPr lvl="1">
+              <a:buFont typeface="Arial" panose="020B0604020202020204" pitchFamily="34" charset="0"/>
+              <a:buChar char="•"/>
+            </a:pPr>
+            <a:r>
+              <a:rPr lang="fr-CH" dirty="0">
+                <a:effectLst/>
+              </a:rPr>
+              <a:t> Render.com pour le déploiement cloud Et bien sûr, JavaScript pour toute la logique cockpit.</a:t>
+            </a:r>
+          </a:p>
+          <a:p>
+            <a:endParaRPr lang="fr-CH" dirty="0"/>
+          </a:p>
+        </p:txBody>
+      </p:sp>
+      <p:sp>
+        <p:nvSpPr>
+          <p:cNvPr id="4" name="Espace réservé du numéro de diapositive 3"/>
+          <p:cNvSpPr>
+            <a:spLocks noGrp="1"/>
+          </p:cNvSpPr>
+          <p:nvPr>
+            <p:ph type="sldNum" sz="quarter" idx="5"/>
+          </p:nvPr>
+        </p:nvSpPr>
+        <p:spPr/>
+        <p:txBody>
+          <a:bodyPr/>
+          <a:lstStyle/>
+          <a:p>
+            <a:fld id="{71653B15-6AAF-48C6-8ACB-6499FA667B64}" type="slidenum">
+              <a:rPr lang="fr-FR" smtClean="0"/>
+              <a:t>7</a:t>
+            </a:fld>
+            <a:endParaRPr lang="fr-FR"/>
+          </a:p>
+        </p:txBody>
+      </p:sp>
+    </p:spTree>
+    <p:extLst>
+      <p:ext uri="{BB962C8B-B14F-4D97-AF65-F5344CB8AC3E}">
+        <p14:creationId xmlns:p14="http://schemas.microsoft.com/office/powerpoint/2010/main" val="380763877"/>
+      </p:ext>
+    </p:extLst>
+  </p:cSld>
+  <p:clrMapOvr>
+    <a:masterClrMapping/>
+  </p:clrMapOvr>
+</p:notes>
+</file>
+
+<file path=ppt/notesSlides/notesSlide7.xml><?xml version="1.0" encoding="utf-8"?>
+<p:notes xmlns:a="http://schemas.openxmlformats.org/drawingml/2006/main" xmlns:r="http://schemas.openxmlformats.org/officeDocument/2006/relationships" xmlns:p="http://schemas.openxmlformats.org/presentationml/2006/main">
+  <p:cSld>
+    <p:spTree>
+      <p:nvGrpSpPr>
+        <p:cNvPr id="1" name=""/>
+        <p:cNvGrpSpPr/>
+        <p:nvPr/>
+      </p:nvGrpSpPr>
+      <p:grpSpPr>
+        <a:xfrm>
+          <a:off x="0" y="0"/>
+          <a:ext cx="0" cy="0"/>
+          <a:chOff x="0" y="0"/>
+          <a:chExt cx="0" cy="0"/>
+        </a:xfrm>
+      </p:grpSpPr>
+      <p:sp>
+        <p:nvSpPr>
+          <p:cNvPr id="2" name="Espace réservé de l'image des diapositives 1"/>
+          <p:cNvSpPr>
+            <a:spLocks noGrp="1" noRot="1" noChangeAspect="1"/>
+          </p:cNvSpPr>
+          <p:nvPr>
+            <p:ph type="sldImg"/>
+          </p:nvPr>
+        </p:nvSpPr>
+        <p:spPr/>
+      </p:sp>
+      <p:sp>
+        <p:nvSpPr>
+          <p:cNvPr id="3" name="Espace réservé des notes 2"/>
+          <p:cNvSpPr>
+            <a:spLocks noGrp="1"/>
+          </p:cNvSpPr>
+          <p:nvPr>
+            <p:ph type="body" idx="1"/>
+          </p:nvPr>
+        </p:nvSpPr>
+        <p:spPr/>
+        <p:txBody>
+          <a:bodyPr/>
+          <a:lstStyle/>
+          <a:p>
+            <a:r>
+              <a:rPr lang="fr-CH" b="1" dirty="0">
+                <a:effectLst/>
+              </a:rPr>
+              <a:t>7. Exemple de widget : </a:t>
+            </a:r>
+          </a:p>
+          <a:p>
+            <a:r>
+              <a:rPr lang="fr-CH" b="0" dirty="0">
+                <a:effectLst/>
+              </a:rPr>
+              <a:t> </a:t>
+            </a:r>
+          </a:p>
+          <a:p>
+            <a:pPr lvl="1"/>
+            <a:r>
+              <a:rPr lang="fr-CH" dirty="0">
+                <a:effectLst/>
+              </a:rPr>
+              <a:t>Voici le widget boussole. </a:t>
+            </a:r>
+          </a:p>
+          <a:p>
+            <a:pPr lvl="2"/>
+            <a:r>
+              <a:rPr lang="fr-CH" dirty="0">
+                <a:effectLst/>
+              </a:rPr>
+              <a:t>Il utilise les angles d’Euler (alpha, beta, gamma) pour calculer le </a:t>
+            </a:r>
+            <a:r>
+              <a:rPr lang="fr-CH" dirty="0" err="1">
+                <a:effectLst/>
+              </a:rPr>
+              <a:t>heading</a:t>
+            </a:r>
+            <a:r>
+              <a:rPr lang="fr-CH" dirty="0">
+                <a:effectLst/>
+              </a:rPr>
+              <a:t>. </a:t>
+            </a:r>
+          </a:p>
+          <a:p>
+            <a:pPr lvl="2"/>
+            <a:r>
+              <a:rPr lang="fr-CH" dirty="0">
+                <a:effectLst/>
+              </a:rPr>
+              <a:t>On applique un filtre LPF et une interpolation </a:t>
+            </a:r>
+            <a:r>
+              <a:rPr lang="fr-CH" dirty="0" err="1">
+                <a:effectLst/>
+              </a:rPr>
+              <a:t>shortest‑path</a:t>
+            </a:r>
+            <a:r>
+              <a:rPr lang="fr-CH" dirty="0">
+                <a:effectLst/>
+              </a:rPr>
+              <a:t> pour éviter les sauts brusques à ±180°. </a:t>
+            </a:r>
+          </a:p>
+          <a:p>
+            <a:pPr lvl="2"/>
+            <a:r>
+              <a:rPr lang="fr-CH" dirty="0">
+                <a:effectLst/>
+              </a:rPr>
+              <a:t>Le rendu est fluide et cockpit‑</a:t>
+            </a:r>
+            <a:r>
+              <a:rPr lang="fr-CH" dirty="0" err="1">
+                <a:effectLst/>
+              </a:rPr>
+              <a:t>driven</a:t>
+            </a:r>
+            <a:r>
+              <a:rPr lang="fr-CH" dirty="0">
+                <a:effectLst/>
+              </a:rPr>
+              <a:t>.</a:t>
+            </a:r>
+          </a:p>
+          <a:p>
+            <a:endParaRPr lang="fr-CH" dirty="0">
+              <a:effectLst/>
+            </a:endParaRPr>
+          </a:p>
+          <a:p>
+            <a:r>
+              <a:rPr lang="fr-CH" dirty="0">
+                <a:effectLst/>
+              </a:rPr>
+              <a:t>	Le widget carte utilise Leaflet.</a:t>
+            </a:r>
+          </a:p>
+          <a:p>
+            <a:r>
+              <a:rPr lang="fr-CH" dirty="0">
+                <a:effectLst/>
+              </a:rPr>
+              <a:t>	 	À chaque position GPS reçue, on met à jour le marqueur et on trace le chemin parcouru. </a:t>
+            </a:r>
+          </a:p>
+          <a:p>
+            <a:r>
+              <a:rPr lang="fr-CH" dirty="0">
+                <a:effectLst/>
+              </a:rPr>
+              <a:t>		On peut aussi recentrer la carte ou réinitialiser le tracé. </a:t>
+            </a:r>
+          </a:p>
+          <a:p>
+            <a:r>
+              <a:rPr lang="fr-CH" dirty="0">
+                <a:effectLst/>
+              </a:rPr>
+              <a:t>		C’est utile pour suivre un déplacement en montagne ou en mer.</a:t>
+            </a:r>
+          </a:p>
+          <a:p>
+            <a:endParaRPr lang="fr-CH" dirty="0">
+              <a:effectLst/>
+            </a:endParaRPr>
+          </a:p>
+          <a:p>
+            <a:r>
+              <a:rPr lang="fr-CH" dirty="0">
+                <a:effectLst/>
+              </a:rPr>
+              <a:t>	Le widget horloge reçoit l’heure locale du smartphone et l’affiche en temps réel. </a:t>
+            </a:r>
+          </a:p>
+          <a:p>
+            <a:r>
+              <a:rPr lang="fr-CH" dirty="0">
+                <a:effectLst/>
+              </a:rPr>
+              <a:t>		On utilise un </a:t>
+            </a:r>
+            <a:r>
+              <a:rPr lang="fr-CH" dirty="0" err="1">
+                <a:effectLst/>
+              </a:rPr>
+              <a:t>canvas</a:t>
+            </a:r>
+            <a:r>
+              <a:rPr lang="fr-CH" dirty="0">
+                <a:effectLst/>
+              </a:rPr>
+              <a:t> avec des aiguilles dessinées à partir des angles. </a:t>
+            </a:r>
+          </a:p>
+          <a:p>
+            <a:r>
+              <a:rPr lang="fr-CH" dirty="0">
+                <a:effectLst/>
+              </a:rPr>
+              <a:t>		C’est un bon exemple d’interface cockpit simple mais efficace.</a:t>
+            </a:r>
+          </a:p>
+          <a:p>
+            <a:endParaRPr lang="fr-CH" dirty="0"/>
+          </a:p>
+        </p:txBody>
+      </p:sp>
+      <p:sp>
+        <p:nvSpPr>
+          <p:cNvPr id="4" name="Espace réservé du numéro de diapositive 3"/>
+          <p:cNvSpPr>
+            <a:spLocks noGrp="1"/>
+          </p:cNvSpPr>
+          <p:nvPr>
+            <p:ph type="sldNum" sz="quarter" idx="5"/>
+          </p:nvPr>
+        </p:nvSpPr>
+        <p:spPr/>
+        <p:txBody>
+          <a:bodyPr/>
+          <a:lstStyle/>
+          <a:p>
+            <a:fld id="{71653B15-6AAF-48C6-8ACB-6499FA667B64}" type="slidenum">
+              <a:rPr lang="fr-FR" smtClean="0"/>
+              <a:t>8</a:t>
+            </a:fld>
+            <a:endParaRPr lang="fr-FR"/>
+          </a:p>
+        </p:txBody>
+      </p:sp>
+    </p:spTree>
+    <p:extLst>
+      <p:ext uri="{BB962C8B-B14F-4D97-AF65-F5344CB8AC3E}">
+        <p14:creationId xmlns:p14="http://schemas.microsoft.com/office/powerpoint/2010/main" val="1387988109"/>
+      </p:ext>
+    </p:extLst>
+  </p:cSld>
+  <p:clrMapOvr>
+    <a:masterClrMapping/>
+  </p:clrMapOvr>
+</p:notes>
+</file>
+
+<file path=ppt/notesSlides/notesSlide8.xml><?xml version="1.0" encoding="utf-8"?>
+<p:notes xmlns:a="http://schemas.openxmlformats.org/drawingml/2006/main" xmlns:r="http://schemas.openxmlformats.org/officeDocument/2006/relationships" xmlns:p="http://schemas.openxmlformats.org/presentationml/2006/main">
+  <p:cSld>
+    <p:spTree>
+      <p:nvGrpSpPr>
+        <p:cNvPr id="1" name=""/>
+        <p:cNvGrpSpPr/>
+        <p:nvPr/>
+      </p:nvGrpSpPr>
+      <p:grpSpPr>
+        <a:xfrm>
+          <a:off x="0" y="0"/>
+          <a:ext cx="0" cy="0"/>
+          <a:chOff x="0" y="0"/>
+          <a:chExt cx="0" cy="0"/>
+        </a:xfrm>
+      </p:grpSpPr>
+      <p:sp>
+        <p:nvSpPr>
+          <p:cNvPr id="2" name="Espace réservé de l'image des diapositives 1"/>
+          <p:cNvSpPr>
+            <a:spLocks noGrp="1" noRot="1" noChangeAspect="1"/>
+          </p:cNvSpPr>
+          <p:nvPr>
+            <p:ph type="sldImg"/>
+          </p:nvPr>
+        </p:nvSpPr>
+        <p:spPr/>
+      </p:sp>
+      <p:sp>
+        <p:nvSpPr>
+          <p:cNvPr id="3" name="Espace réservé des notes 2"/>
+          <p:cNvSpPr>
+            <a:spLocks noGrp="1"/>
+          </p:cNvSpPr>
+          <p:nvPr>
+            <p:ph type="body" idx="1"/>
+          </p:nvPr>
+        </p:nvSpPr>
+        <p:spPr/>
+        <p:txBody>
+          <a:bodyPr/>
+          <a:lstStyle/>
+          <a:p>
+            <a:r>
+              <a:rPr lang="fr-CH" b="1" dirty="0">
+                <a:effectLst/>
+              </a:rPr>
+              <a:t>8. Difficultés rencontrées</a:t>
+            </a:r>
+          </a:p>
+          <a:p>
+            <a:endParaRPr lang="fr-CH" dirty="0">
+              <a:effectLst/>
+            </a:endParaRPr>
+          </a:p>
+          <a:p>
+            <a:r>
+              <a:rPr lang="fr-CH" dirty="0"/>
+              <a:t>Comme tout projet ambitieux, </a:t>
+            </a:r>
+            <a:r>
+              <a:rPr lang="fr-CH" dirty="0" err="1"/>
+              <a:t>SmartCockpit</a:t>
+            </a:r>
+            <a:r>
+              <a:rPr lang="fr-CH" dirty="0"/>
+              <a:t> nous a confrontés à plusieurs défis techniques. </a:t>
+            </a:r>
+          </a:p>
+          <a:p>
+            <a:endParaRPr lang="fr-CH" dirty="0"/>
+          </a:p>
+          <a:p>
+            <a:r>
+              <a:rPr lang="fr-CH" dirty="0"/>
+              <a:t>D’abord, l’</a:t>
+            </a:r>
+            <a:r>
+              <a:rPr lang="fr-CH" b="1" dirty="0">
+                <a:effectLst/>
+              </a:rPr>
+              <a:t>instabilité des capteurs du smartphone</a:t>
+            </a:r>
+            <a:r>
+              <a:rPr lang="fr-CH" dirty="0"/>
+              <a:t> : </a:t>
+            </a:r>
+          </a:p>
+          <a:p>
+            <a:r>
+              <a:rPr lang="fr-CH" dirty="0"/>
+              <a:t>	les données sont bruitées, parfois incohérentes, et varient selon les modèles. </a:t>
+            </a:r>
+          </a:p>
+          <a:p>
+            <a:r>
+              <a:rPr lang="fr-CH" dirty="0"/>
+              <a:t>	On a dû filtrer, interpoler, et stabiliser les angles pour obtenir un rendu fiable. </a:t>
+            </a:r>
+          </a:p>
+          <a:p>
+            <a:endParaRPr lang="fr-CH" dirty="0"/>
+          </a:p>
+          <a:p>
+            <a:r>
+              <a:rPr lang="fr-CH" dirty="0"/>
+              <a:t>Ensuite, la </a:t>
+            </a:r>
+            <a:r>
+              <a:rPr lang="fr-CH" b="1" dirty="0">
+                <a:effectLst/>
+              </a:rPr>
+              <a:t>transmission en temps réel via </a:t>
+            </a:r>
+            <a:r>
+              <a:rPr lang="fr-CH" b="1" dirty="0" err="1">
+                <a:effectLst/>
+              </a:rPr>
+              <a:t>WebSocket</a:t>
+            </a:r>
+            <a:r>
+              <a:rPr lang="fr-CH" dirty="0"/>
+              <a:t> : </a:t>
+            </a:r>
+          </a:p>
+          <a:p>
+            <a:r>
+              <a:rPr lang="fr-CH" dirty="0"/>
+              <a:t>	gérer la latence, les pertes de paquets, les reconnexions, surtout en mobilité, demande une architecture robuste. </a:t>
+            </a:r>
+          </a:p>
+          <a:p>
+            <a:r>
+              <a:rPr lang="fr-CH" dirty="0"/>
+              <a:t>	Enfin, la </a:t>
+            </a:r>
+            <a:r>
+              <a:rPr lang="fr-CH" b="1" dirty="0">
+                <a:effectLst/>
+              </a:rPr>
+              <a:t>visualisation en direct</a:t>
+            </a:r>
+            <a:r>
+              <a:rPr lang="fr-CH" dirty="0"/>
+              <a:t> : afficher simultanément carte, boussole, audio, logs, widgets… sans saturer le navigateur, c’est un vrai défi d’optimisation. </a:t>
+            </a:r>
+          </a:p>
+          <a:p>
+            <a:r>
+              <a:rPr lang="fr-CH" dirty="0"/>
+              <a:t>	Ces difficultés nous ont poussés à structurer le projet de façon modulaire, cockpit‑</a:t>
+            </a:r>
+            <a:r>
+              <a:rPr lang="fr-CH" dirty="0" err="1"/>
+              <a:t>driven</a:t>
+            </a:r>
+            <a:r>
+              <a:rPr lang="fr-CH" dirty="0"/>
+              <a:t>, pour garder fluidité et clarté.</a:t>
+            </a:r>
+            <a:endParaRPr lang="fr-CH" dirty="0">
+              <a:effectLst/>
+            </a:endParaRPr>
+          </a:p>
+          <a:p>
+            <a:endParaRPr lang="fr-CH" dirty="0"/>
+          </a:p>
+        </p:txBody>
+      </p:sp>
+      <p:sp>
+        <p:nvSpPr>
+          <p:cNvPr id="4" name="Espace réservé du numéro de diapositive 3"/>
+          <p:cNvSpPr>
+            <a:spLocks noGrp="1"/>
+          </p:cNvSpPr>
+          <p:nvPr>
+            <p:ph type="sldNum" sz="quarter" idx="5"/>
+          </p:nvPr>
+        </p:nvSpPr>
+        <p:spPr/>
+        <p:txBody>
+          <a:bodyPr/>
+          <a:lstStyle/>
+          <a:p>
+            <a:fld id="{71653B15-6AAF-48C6-8ACB-6499FA667B64}" type="slidenum">
+              <a:rPr lang="fr-FR" smtClean="0"/>
+              <a:t>9</a:t>
+            </a:fld>
+            <a:endParaRPr lang="fr-FR"/>
+          </a:p>
+        </p:txBody>
+      </p:sp>
+    </p:spTree>
+    <p:extLst>
+      <p:ext uri="{BB962C8B-B14F-4D97-AF65-F5344CB8AC3E}">
+        <p14:creationId xmlns:p14="http://schemas.microsoft.com/office/powerpoint/2010/main" val="3352102303"/>
+      </p:ext>
+    </p:extLst>
+  </p:cSld>
+  <p:clrMapOvr>
+    <a:masterClrMapping/>
+  </p:clrMapOvr>
+</p:notes>
+</file>
+
+<file path=ppt/notesSlides/notesSlide9.xml><?xml version="1.0" encoding="utf-8"?>
+<p:notes xmlns:a="http://schemas.openxmlformats.org/drawingml/2006/main" xmlns:r="http://schemas.openxmlformats.org/officeDocument/2006/relationships" xmlns:p="http://schemas.openxmlformats.org/presentationml/2006/main">
+  <p:cSld>
+    <p:spTree>
+      <p:nvGrpSpPr>
+        <p:cNvPr id="1" name=""/>
+        <p:cNvGrpSpPr/>
+        <p:nvPr/>
+      </p:nvGrpSpPr>
+      <p:grpSpPr>
+        <a:xfrm>
+          <a:off x="0" y="0"/>
+          <a:ext cx="0" cy="0"/>
+          <a:chOff x="0" y="0"/>
+          <a:chExt cx="0" cy="0"/>
+        </a:xfrm>
+      </p:grpSpPr>
+      <p:sp>
+        <p:nvSpPr>
+          <p:cNvPr id="2" name="Espace réservé de l'image des diapositives 1"/>
+          <p:cNvSpPr>
+            <a:spLocks noGrp="1" noRot="1" noChangeAspect="1"/>
+          </p:cNvSpPr>
+          <p:nvPr>
+            <p:ph type="sldImg"/>
+          </p:nvPr>
+        </p:nvSpPr>
+        <p:spPr/>
+      </p:sp>
+      <p:sp>
+        <p:nvSpPr>
+          <p:cNvPr id="3" name="Espace réservé des notes 2"/>
+          <p:cNvSpPr>
+            <a:spLocks noGrp="1"/>
+          </p:cNvSpPr>
+          <p:nvPr>
+            <p:ph type="body" idx="1"/>
+          </p:nvPr>
+        </p:nvSpPr>
+        <p:spPr/>
+        <p:txBody>
+          <a:bodyPr/>
+          <a:lstStyle/>
+          <a:p>
+            <a:r>
+              <a:rPr lang="fr-CH" b="1" dirty="0">
+                <a:effectLst/>
+              </a:rPr>
+              <a:t>9. Points positifs</a:t>
+            </a:r>
+          </a:p>
+          <a:p>
+            <a:endParaRPr lang="fr-CH" b="1" dirty="0">
+              <a:effectLst/>
+            </a:endParaRPr>
+          </a:p>
+          <a:p>
+            <a:r>
+              <a:rPr lang="fr-CH" dirty="0">
+                <a:effectLst/>
+              </a:rPr>
+              <a:t>Ce projet nous a permis :</a:t>
+            </a:r>
+          </a:p>
+          <a:p>
+            <a:pPr lvl="1">
+              <a:buFont typeface="Arial" panose="020B0604020202020204" pitchFamily="34" charset="0"/>
+              <a:buChar char="•"/>
+            </a:pPr>
+            <a:r>
+              <a:rPr lang="fr-CH" dirty="0">
+                <a:effectLst/>
+              </a:rPr>
+              <a:t> de pratiquer JavaScript en profondeur</a:t>
+            </a:r>
+          </a:p>
+          <a:p>
+            <a:pPr lvl="1">
+              <a:buFont typeface="Arial" panose="020B0604020202020204" pitchFamily="34" charset="0"/>
+              <a:buChar char="•"/>
+            </a:pPr>
+            <a:r>
+              <a:rPr lang="fr-CH" dirty="0">
+                <a:effectLst/>
+              </a:rPr>
+              <a:t> de travailler en équipe sur un projet modulaire</a:t>
+            </a:r>
+          </a:p>
+          <a:p>
+            <a:pPr lvl="1">
+              <a:buFont typeface="Arial" panose="020B0604020202020204" pitchFamily="34" charset="0"/>
+              <a:buChar char="•"/>
+            </a:pPr>
+            <a:r>
+              <a:rPr lang="fr-CH" dirty="0">
+                <a:effectLst/>
+              </a:rPr>
+              <a:t> de découvrir </a:t>
+            </a:r>
+            <a:r>
+              <a:rPr lang="fr-CH" dirty="0" err="1">
+                <a:effectLst/>
+              </a:rPr>
+              <a:t>WebSocket</a:t>
+            </a:r>
+            <a:r>
+              <a:rPr lang="fr-CH" dirty="0">
+                <a:effectLst/>
+              </a:rPr>
+              <a:t>, </a:t>
+            </a:r>
+            <a:r>
+              <a:rPr lang="fr-CH" dirty="0" err="1">
+                <a:effectLst/>
+              </a:rPr>
+              <a:t>WebRTC</a:t>
+            </a:r>
+            <a:r>
+              <a:rPr lang="fr-CH" dirty="0">
+                <a:effectLst/>
+              </a:rPr>
+              <a:t>, Node.js, Render.com</a:t>
+            </a:r>
+          </a:p>
+          <a:p>
+            <a:pPr lvl="1">
+              <a:buFont typeface="Arial" panose="020B0604020202020204" pitchFamily="34" charset="0"/>
+              <a:buChar char="•"/>
+            </a:pPr>
+            <a:r>
+              <a:rPr lang="fr-CH" dirty="0">
+                <a:effectLst/>
+              </a:rPr>
+              <a:t> de comprendre le fonctionnement des capteurs mobiles Et surtout, de construire une vraie interface cockpit temps réel.</a:t>
+            </a:r>
+          </a:p>
+          <a:p>
+            <a:endParaRPr lang="fr-CH" dirty="0"/>
+          </a:p>
+        </p:txBody>
+      </p:sp>
+      <p:sp>
+        <p:nvSpPr>
+          <p:cNvPr id="4" name="Espace réservé du numéro de diapositive 3"/>
+          <p:cNvSpPr>
+            <a:spLocks noGrp="1"/>
+          </p:cNvSpPr>
+          <p:nvPr>
+            <p:ph type="sldNum" sz="quarter" idx="5"/>
+          </p:nvPr>
+        </p:nvSpPr>
+        <p:spPr/>
+        <p:txBody>
+          <a:bodyPr/>
+          <a:lstStyle/>
+          <a:p>
+            <a:fld id="{71653B15-6AAF-48C6-8ACB-6499FA667B64}" type="slidenum">
+              <a:rPr lang="fr-FR" smtClean="0"/>
+              <a:t>10</a:t>
+            </a:fld>
+            <a:endParaRPr lang="fr-FR"/>
+          </a:p>
+        </p:txBody>
+      </p:sp>
+    </p:spTree>
+    <p:extLst>
+      <p:ext uri="{BB962C8B-B14F-4D97-AF65-F5344CB8AC3E}">
+        <p14:creationId xmlns:p14="http://schemas.microsoft.com/office/powerpoint/2010/main" val="622923081"/>
       </p:ext>
     </p:extLst>
   </p:cSld>
@@ -915,7 +2694,7 @@
           <a:p>
             <a:fld id="{06137112-888A-40C4-BD31-96BD10D39A6F}" type="datetimeFigureOut">
               <a:rPr lang="fr-CH" smtClean="0"/>
-              <a:t>02.01.2026</a:t>
+              <a:t>04.01.2026</a:t>
             </a:fld>
             <a:endParaRPr lang="fr-CH"/>
           </a:p>
@@ -1115,7 +2894,7 @@
           <a:p>
             <a:fld id="{06137112-888A-40C4-BD31-96BD10D39A6F}" type="datetimeFigureOut">
               <a:rPr lang="fr-CH" smtClean="0"/>
-              <a:t>02.01.2026</a:t>
+              <a:t>04.01.2026</a:t>
             </a:fld>
             <a:endParaRPr lang="fr-CH"/>
           </a:p>
@@ -1325,7 +3104,7 @@
           <a:p>
             <a:fld id="{06137112-888A-40C4-BD31-96BD10D39A6F}" type="datetimeFigureOut">
               <a:rPr lang="fr-CH" smtClean="0"/>
-              <a:t>02.01.2026</a:t>
+              <a:t>04.01.2026</a:t>
             </a:fld>
             <a:endParaRPr lang="fr-CH"/>
           </a:p>
@@ -1525,7 +3304,7 @@
           <a:p>
             <a:fld id="{06137112-888A-40C4-BD31-96BD10D39A6F}" type="datetimeFigureOut">
               <a:rPr lang="fr-CH" smtClean="0"/>
-              <a:t>02.01.2026</a:t>
+              <a:t>04.01.2026</a:t>
             </a:fld>
             <a:endParaRPr lang="fr-CH"/>
           </a:p>
@@ -1801,7 +3580,7 @@
           <a:p>
             <a:fld id="{06137112-888A-40C4-BD31-96BD10D39A6F}" type="datetimeFigureOut">
               <a:rPr lang="fr-CH" smtClean="0"/>
-              <a:t>02.01.2026</a:t>
+              <a:t>04.01.2026</a:t>
             </a:fld>
             <a:endParaRPr lang="fr-CH"/>
           </a:p>
@@ -2069,7 +3848,7 @@
           <a:p>
             <a:fld id="{06137112-888A-40C4-BD31-96BD10D39A6F}" type="datetimeFigureOut">
               <a:rPr lang="fr-CH" smtClean="0"/>
-              <a:t>02.01.2026</a:t>
+              <a:t>04.01.2026</a:t>
             </a:fld>
             <a:endParaRPr lang="fr-CH"/>
           </a:p>
@@ -2484,7 +4263,7 @@
           <a:p>
             <a:fld id="{06137112-888A-40C4-BD31-96BD10D39A6F}" type="datetimeFigureOut">
               <a:rPr lang="fr-CH" smtClean="0"/>
-              <a:t>02.01.2026</a:t>
+              <a:t>04.01.2026</a:t>
             </a:fld>
             <a:endParaRPr lang="fr-CH"/>
           </a:p>
@@ -2626,7 +4405,7 @@
           <a:p>
             <a:fld id="{06137112-888A-40C4-BD31-96BD10D39A6F}" type="datetimeFigureOut">
               <a:rPr lang="fr-CH" smtClean="0"/>
-              <a:t>02.01.2026</a:t>
+              <a:t>04.01.2026</a:t>
             </a:fld>
             <a:endParaRPr lang="fr-CH"/>
           </a:p>
@@ -2739,7 +4518,7 @@
           <a:p>
             <a:fld id="{06137112-888A-40C4-BD31-96BD10D39A6F}" type="datetimeFigureOut">
               <a:rPr lang="fr-CH" smtClean="0"/>
-              <a:t>02.01.2026</a:t>
+              <a:t>04.01.2026</a:t>
             </a:fld>
             <a:endParaRPr lang="fr-CH"/>
           </a:p>
@@ -3052,7 +4831,7 @@
           <a:p>
             <a:fld id="{06137112-888A-40C4-BD31-96BD10D39A6F}" type="datetimeFigureOut">
               <a:rPr lang="fr-CH" smtClean="0"/>
-              <a:t>02.01.2026</a:t>
+              <a:t>04.01.2026</a:t>
             </a:fld>
             <a:endParaRPr lang="fr-CH"/>
           </a:p>
@@ -3341,7 +5120,7 @@
           <a:p>
             <a:fld id="{06137112-888A-40C4-BD31-96BD10D39A6F}" type="datetimeFigureOut">
               <a:rPr lang="fr-CH" smtClean="0"/>
-              <a:t>02.01.2026</a:t>
+              <a:t>04.01.2026</a:t>
             </a:fld>
             <a:endParaRPr lang="fr-CH"/>
           </a:p>
@@ -3593,7 +5372,7 @@
           <a:p>
             <a:fld id="{06137112-888A-40C4-BD31-96BD10D39A6F}" type="datetimeFigureOut">
               <a:rPr lang="fr-CH" smtClean="0"/>
-              <a:t>02.01.2026</a:t>
+              <a:t>04.01.2026</a:t>
             </a:fld>
             <a:endParaRPr lang="fr-CH"/>
           </a:p>
@@ -4643,9 +6422,18 @@
           <a:lstStyle/>
           <a:p>
             <a:r>
+              <a:rPr lang="fr-CH" sz="2400" dirty="0"/>
+              <a:t>🌟 </a:t>
+            </a:r>
+            <a:r>
               <a:rPr lang="fr-CH" sz="2400" b="1" dirty="0"/>
-              <a:t>Points positifs</a:t>
-            </a:r>
+              <a:t>Points positifs du projet </a:t>
+            </a:r>
+            <a:r>
+              <a:rPr lang="fr-CH" sz="2400" b="1" dirty="0" err="1"/>
+              <a:t>SmartCockpit</a:t>
+            </a:r>
+            <a:endParaRPr lang="fr-CH" sz="2400" b="1" dirty="0"/>
           </a:p>
         </p:txBody>
       </p:sp>
@@ -4663,8 +6451,8 @@
         </p:nvSpPr>
         <p:spPr>
           <a:xfrm>
-            <a:off x="765916" y="1535981"/>
-            <a:ext cx="10131563" cy="3785652"/>
+            <a:off x="236693" y="1866178"/>
+            <a:ext cx="5464553" cy="3662541"/>
           </a:xfrm>
           <a:prstGeom prst="rect">
             <a:avLst/>
@@ -4677,103 +6465,474 @@
           </a:bodyPr>
           <a:lstStyle/>
           <a:p>
-            <a:pPr marL="342900" indent="-342900">
-              <a:buFont typeface="Wingdings" panose="05000000000000000000" pitchFamily="2" charset="2"/>
-              <a:buChar char="q"/>
+            <a:r>
+              <a:rPr lang="fr-CH" sz="2400" b="1" dirty="0">
+                <a:effectLst/>
+              </a:rPr>
+              <a:t>🧠 JavaScript en pratique</a:t>
+            </a:r>
+          </a:p>
+          <a:p>
+            <a:pPr lvl="1">
+              <a:buFont typeface="Arial" panose="020B0604020202020204" pitchFamily="34" charset="0"/>
+              <a:buChar char="•"/>
             </a:pPr>
             <a:r>
+              <a:rPr lang="fr-CH" sz="2000" dirty="0">
+                <a:effectLst/>
+              </a:rPr>
+              <a:t>DOM, événements, Canvas</a:t>
+            </a:r>
+          </a:p>
+          <a:p>
+            <a:pPr lvl="1">
+              <a:buFont typeface="Arial" panose="020B0604020202020204" pitchFamily="34" charset="0"/>
+              <a:buChar char="•"/>
+            </a:pPr>
+            <a:r>
+              <a:rPr lang="fr-CH" sz="2000" dirty="0">
+                <a:effectLst/>
+              </a:rPr>
+              <a:t>Web Audio API, </a:t>
+            </a:r>
+            <a:r>
+              <a:rPr lang="fr-CH" sz="2000" dirty="0" err="1">
+                <a:effectLst/>
+              </a:rPr>
+              <a:t>WebRTC</a:t>
+            </a:r>
+            <a:r>
+              <a:rPr lang="fr-CH" sz="2000" dirty="0">
+                <a:effectLst/>
+              </a:rPr>
+              <a:t>, </a:t>
+            </a:r>
+            <a:r>
+              <a:rPr lang="fr-CH" sz="2000" dirty="0" err="1">
+                <a:effectLst/>
+              </a:rPr>
+              <a:t>WebSocket</a:t>
+            </a:r>
+            <a:endParaRPr lang="fr-CH" sz="2000" dirty="0">
+              <a:effectLst/>
+            </a:endParaRPr>
+          </a:p>
+          <a:p>
+            <a:pPr lvl="1">
+              <a:buFont typeface="Arial" panose="020B0604020202020204" pitchFamily="34" charset="0"/>
+              <a:buChar char="•"/>
+            </a:pPr>
+            <a:r>
+              <a:rPr lang="fr-CH" sz="2000" dirty="0">
+                <a:effectLst/>
+              </a:rPr>
+              <a:t>Projet cockpit‑</a:t>
+            </a:r>
+            <a:r>
+              <a:rPr lang="fr-CH" sz="2000" dirty="0" err="1">
+                <a:effectLst/>
+              </a:rPr>
+              <a:t>driven</a:t>
+            </a:r>
+            <a:r>
+              <a:rPr lang="fr-CH" sz="2000" dirty="0">
+                <a:effectLst/>
+              </a:rPr>
+              <a:t> modulaire</a:t>
+            </a:r>
+          </a:p>
+          <a:p>
+            <a:pPr lvl="1">
+              <a:buFont typeface="Arial" panose="020B0604020202020204" pitchFamily="34" charset="0"/>
+              <a:buChar char="•"/>
+            </a:pPr>
+            <a:r>
+              <a:rPr lang="fr-CH" sz="2000" dirty="0">
+                <a:effectLst/>
+              </a:rPr>
+              <a:t>Interfaces dynamiques et interactives</a:t>
+            </a:r>
+          </a:p>
+          <a:p>
+            <a:endParaRPr lang="fr-CH" sz="2400" b="1" dirty="0">
+              <a:effectLst/>
+            </a:endParaRPr>
+          </a:p>
+          <a:p>
+            <a:r>
+              <a:rPr lang="fr-CH" sz="2400" b="1" dirty="0">
+                <a:effectLst/>
+              </a:rPr>
+              <a:t>🤝 Collaboration efficace</a:t>
+            </a:r>
+          </a:p>
+          <a:p>
+            <a:pPr lvl="1">
+              <a:buFont typeface="Arial" panose="020B0604020202020204" pitchFamily="34" charset="0"/>
+              <a:buChar char="•"/>
+            </a:pPr>
+            <a:r>
+              <a:rPr lang="fr-CH" sz="2000" dirty="0">
+                <a:effectLst/>
+              </a:rPr>
+              <a:t>Répartition claire des rôles</a:t>
+            </a:r>
+          </a:p>
+          <a:p>
+            <a:pPr lvl="1">
+              <a:buFont typeface="Arial" panose="020B0604020202020204" pitchFamily="34" charset="0"/>
+              <a:buChar char="•"/>
+            </a:pPr>
+            <a:r>
+              <a:rPr lang="fr-CH" sz="2000" dirty="0">
+                <a:effectLst/>
+              </a:rPr>
+              <a:t>Intégration UI, réseau, capteurs, backend</a:t>
+            </a:r>
+          </a:p>
+          <a:p>
+            <a:pPr lvl="1">
+              <a:buFont typeface="Arial" panose="020B0604020202020204" pitchFamily="34" charset="0"/>
+              <a:buChar char="•"/>
+            </a:pPr>
+            <a:r>
+              <a:rPr lang="fr-CH" sz="2000" dirty="0">
+                <a:effectLst/>
+              </a:rPr>
+              <a:t>Communication fluide et régulière</a:t>
+            </a:r>
+          </a:p>
+          <a:p>
+            <a:pPr lvl="1">
+              <a:buFont typeface="Arial" panose="020B0604020202020204" pitchFamily="34" charset="0"/>
+              <a:buChar char="•"/>
+            </a:pPr>
+            <a:r>
+              <a:rPr lang="fr-CH" sz="2000" dirty="0">
+                <a:effectLst/>
+              </a:rPr>
+              <a:t>Travail sur un projet complexe multi‑modules</a:t>
+            </a:r>
+          </a:p>
+        </p:txBody>
+      </p:sp>
+      <p:sp>
+        <p:nvSpPr>
+          <p:cNvPr id="6" name="ZoneTexte 5">
+            <a:extLst>
+              <a:ext uri="{FF2B5EF4-FFF2-40B4-BE49-F238E27FC236}">
+                <a16:creationId xmlns:a16="http://schemas.microsoft.com/office/drawing/2014/main" id="{E72D01AC-813B-4169-B130-B2F039DC55E9}"/>
+              </a:ext>
+            </a:extLst>
+          </p:cNvPr>
+          <p:cNvSpPr txBox="1"/>
+          <p:nvPr/>
+        </p:nvSpPr>
+        <p:spPr>
+          <a:xfrm>
+            <a:off x="5341470" y="1532532"/>
+            <a:ext cx="6613837" cy="4524315"/>
+          </a:xfrm>
+          <a:prstGeom prst="rect">
+            <a:avLst/>
+          </a:prstGeom>
+          <a:noFill/>
+        </p:spPr>
+        <p:txBody>
+          <a:bodyPr wrap="square" rtlCol="0">
+            <a:spAutoFit/>
+          </a:bodyPr>
+          <a:lstStyle/>
+          <a:p>
+            <a:r>
+              <a:rPr lang="fr-CH" sz="2400" b="1" dirty="0">
+                <a:effectLst/>
+              </a:rPr>
+              <a:t>🚀 Technologies explorées</a:t>
+            </a:r>
+          </a:p>
+          <a:p>
+            <a:pPr lvl="2">
+              <a:buFont typeface="Arial" panose="020B0604020202020204" pitchFamily="34" charset="0"/>
+              <a:buChar char="•"/>
+            </a:pPr>
+            <a:r>
+              <a:rPr lang="fr-CH" sz="2000" b="1" dirty="0" err="1">
+                <a:effectLst/>
+              </a:rPr>
+              <a:t>WebSocket</a:t>
+            </a:r>
+            <a:r>
+              <a:rPr lang="fr-CH" sz="2000" dirty="0">
+                <a:effectLst/>
+              </a:rPr>
+              <a:t> : bidirectionnel, robuste, capteurs en temps réel</a:t>
+            </a:r>
+          </a:p>
+          <a:p>
+            <a:pPr lvl="2">
+              <a:buFont typeface="Arial" panose="020B0604020202020204" pitchFamily="34" charset="0"/>
+              <a:buChar char="•"/>
+            </a:pPr>
+            <a:r>
+              <a:rPr lang="fr-CH" sz="2000" b="1" dirty="0" err="1">
+                <a:effectLst/>
+              </a:rPr>
+              <a:t>WebRTC</a:t>
+            </a:r>
+            <a:r>
+              <a:rPr lang="fr-CH" sz="2000" dirty="0">
+                <a:effectLst/>
+              </a:rPr>
+              <a:t> : streaming vidéo, ICE, négociation</a:t>
+            </a:r>
+          </a:p>
+          <a:p>
+            <a:pPr lvl="2">
+              <a:buFont typeface="Arial" panose="020B0604020202020204" pitchFamily="34" charset="0"/>
+              <a:buChar char="•"/>
+            </a:pPr>
+            <a:r>
+              <a:rPr lang="fr-CH" sz="2000" b="1" dirty="0">
+                <a:effectLst/>
+              </a:rPr>
+              <a:t>Node.js</a:t>
+            </a:r>
+            <a:r>
+              <a:rPr lang="fr-CH" sz="2000" dirty="0">
+                <a:effectLst/>
+              </a:rPr>
+              <a:t> : backend léger, </a:t>
+            </a:r>
+            <a:r>
+              <a:rPr lang="fr-CH" sz="2000" dirty="0" err="1">
+                <a:effectLst/>
+              </a:rPr>
+              <a:t>WebSocket</a:t>
+            </a:r>
+            <a:r>
+              <a:rPr lang="fr-CH" sz="2000" dirty="0">
+                <a:effectLst/>
+              </a:rPr>
+              <a:t> intégré</a:t>
+            </a:r>
+          </a:p>
+          <a:p>
+            <a:pPr lvl="2">
+              <a:buFont typeface="Arial" panose="020B0604020202020204" pitchFamily="34" charset="0"/>
+              <a:buChar char="•"/>
+            </a:pPr>
+            <a:r>
+              <a:rPr lang="fr-CH" sz="2000" b="1" dirty="0">
+                <a:effectLst/>
+              </a:rPr>
+              <a:t>Render.com</a:t>
+            </a:r>
+            <a:r>
+              <a:rPr lang="fr-CH" sz="2000" dirty="0">
+                <a:effectLst/>
+              </a:rPr>
+              <a:t> : déploiement cloud, </a:t>
+            </a:r>
+            <a:r>
+              <a:rPr lang="fr-CH" sz="2000" dirty="0" err="1">
+                <a:effectLst/>
+              </a:rPr>
+              <a:t>scaling</a:t>
+            </a:r>
+            <a:r>
+              <a:rPr lang="fr-CH" sz="2000" dirty="0">
+                <a:effectLst/>
+              </a:rPr>
+              <a:t> automatique</a:t>
+            </a:r>
+          </a:p>
+          <a:p>
+            <a:pPr lvl="2"/>
+            <a:endParaRPr lang="fr-CH" sz="2000" dirty="0"/>
+          </a:p>
+          <a:p>
+            <a:r>
+              <a:rPr lang="fr-CH" sz="2400" dirty="0"/>
+              <a:t>🛠️ </a:t>
+            </a:r>
+            <a:r>
               <a:rPr lang="fr-CH" sz="2400" b="1" dirty="0"/>
-              <a:t>Pratique concrète en JS</a:t>
-            </a:r>
-          </a:p>
-          <a:p>
-            <a:pPr marL="342900" indent="-342900">
-              <a:buFont typeface="Wingdings" panose="05000000000000000000" pitchFamily="2" charset="2"/>
-              <a:buChar char="q"/>
+              <a:t>Approche cockpit‑</a:t>
+            </a:r>
+            <a:r>
+              <a:rPr lang="fr-CH" sz="2400" b="1" dirty="0" err="1"/>
+              <a:t>driven</a:t>
+            </a:r>
+            <a:endParaRPr lang="fr-CH" sz="2400" b="1" dirty="0"/>
+          </a:p>
+          <a:p>
+            <a:pPr lvl="1" eaLnBrk="0" fontAlgn="base" hangingPunct="0">
+              <a:spcBef>
+                <a:spcPct val="0"/>
+              </a:spcBef>
+              <a:spcAft>
+                <a:spcPct val="0"/>
+              </a:spcAft>
+              <a:buFontTx/>
+              <a:buChar char="•"/>
             </a:pPr>
             <a:r>
-              <a:rPr lang="fr-CH" sz="2400" b="1" dirty="0"/>
-              <a:t>Travail d’équipe</a:t>
-            </a:r>
-          </a:p>
-          <a:p>
-            <a:pPr marL="342900" indent="-342900">
-              <a:buFont typeface="Wingdings" panose="05000000000000000000" pitchFamily="2" charset="2"/>
-              <a:buChar char="q"/>
+              <a:rPr kumimoji="0" lang="fr-FR" altLang="fr-FR" sz="2000" b="0" i="0" u="none" strike="noStrike" cap="none" normalizeH="0" baseline="0" dirty="0">
+                <a:ln>
+                  <a:noFill/>
+                </a:ln>
+                <a:solidFill>
+                  <a:schemeClr val="tx1"/>
+                </a:solidFill>
+                <a:effectLst/>
+              </a:rPr>
+              <a:t>Widgets totalement indépendant</a:t>
+            </a:r>
+          </a:p>
+          <a:p>
+            <a:pPr lvl="1" eaLnBrk="0" fontAlgn="base" hangingPunct="0">
+              <a:spcBef>
+                <a:spcPct val="0"/>
+              </a:spcBef>
+              <a:spcAft>
+                <a:spcPct val="0"/>
+              </a:spcAft>
+              <a:buFontTx/>
+              <a:buChar char="•"/>
             </a:pPr>
             <a:r>
-              <a:rPr lang="fr-CH" sz="2400" b="1" dirty="0"/>
-              <a:t>Découverte de technologies nouvelles pour nous</a:t>
-            </a:r>
-          </a:p>
-          <a:p>
-            <a:pPr marL="800100" lvl="1" indent="-342900">
-              <a:buFont typeface="Wingdings" panose="05000000000000000000" pitchFamily="2" charset="2"/>
-              <a:buChar char="q"/>
+              <a:rPr kumimoji="0" lang="fr-FR" altLang="fr-FR" sz="2000" b="0" i="0" u="none" strike="noStrike" cap="none" normalizeH="0" baseline="0" dirty="0">
+                <a:ln>
+                  <a:noFill/>
+                </a:ln>
+                <a:solidFill>
+                  <a:schemeClr val="tx1"/>
+                </a:solidFill>
+                <a:effectLst/>
+              </a:rPr>
+              <a:t>API interne simple (</a:t>
+            </a:r>
+            <a:r>
+              <a:rPr kumimoji="0" lang="fr-FR" altLang="fr-FR" sz="2000" b="0" i="0" u="none" strike="noStrike" cap="none" normalizeH="0" baseline="0" dirty="0" err="1">
+                <a:ln>
+                  <a:noFill/>
+                </a:ln>
+                <a:solidFill>
+                  <a:schemeClr val="tx1"/>
+                </a:solidFill>
+                <a:effectLst/>
+              </a:rPr>
+              <a:t>updateXxx</a:t>
+            </a:r>
+            <a:r>
+              <a:rPr kumimoji="0" lang="fr-FR" altLang="fr-FR" sz="2000" b="0" i="0" u="none" strike="noStrike" cap="none" normalizeH="0" baseline="0" dirty="0">
+                <a:ln>
+                  <a:noFill/>
+                </a:ln>
+                <a:solidFill>
+                  <a:schemeClr val="tx1"/>
+                </a:solidFill>
+                <a:effectLst/>
+              </a:rPr>
+              <a:t>)</a:t>
+            </a:r>
+          </a:p>
+          <a:p>
+            <a:pPr lvl="1" eaLnBrk="0" fontAlgn="base" hangingPunct="0">
+              <a:spcBef>
+                <a:spcPct val="0"/>
+              </a:spcBef>
+              <a:spcAft>
+                <a:spcPct val="0"/>
+              </a:spcAft>
+              <a:buFontTx/>
+              <a:buChar char="•"/>
             </a:pPr>
             <a:r>
-              <a:rPr lang="fr-CH" sz="2400" b="1" dirty="0" err="1"/>
-              <a:t>Websocket</a:t>
-            </a:r>
-            <a:endParaRPr lang="fr-CH" sz="2400" b="1" dirty="0"/>
-          </a:p>
-          <a:p>
-            <a:pPr marL="800100" lvl="1" indent="-342900">
-              <a:buFont typeface="Wingdings" panose="05000000000000000000" pitchFamily="2" charset="2"/>
-              <a:buChar char="q"/>
+              <a:rPr kumimoji="0" lang="fr-FR" altLang="fr-FR" sz="2000" b="0" i="0" u="none" strike="noStrike" cap="none" normalizeH="0" baseline="0" dirty="0">
+                <a:ln>
+                  <a:noFill/>
+                </a:ln>
+                <a:solidFill>
+                  <a:schemeClr val="tx1"/>
+                </a:solidFill>
+                <a:effectLst/>
+              </a:rPr>
+              <a:t>Code clair, documenté, maintenable</a:t>
+            </a:r>
+          </a:p>
+          <a:p>
+            <a:pPr lvl="1" eaLnBrk="0" fontAlgn="base" hangingPunct="0">
+              <a:spcBef>
+                <a:spcPct val="0"/>
+              </a:spcBef>
+              <a:spcAft>
+                <a:spcPct val="0"/>
+              </a:spcAft>
+              <a:buFontTx/>
+              <a:buChar char="•"/>
             </a:pPr>
             <a:r>
-              <a:rPr lang="fr-CH" sz="2400" b="1" dirty="0" err="1"/>
-              <a:t>WebRTC</a:t>
-            </a:r>
-            <a:endParaRPr lang="fr-CH" sz="2400" b="1" dirty="0"/>
-          </a:p>
-          <a:p>
-            <a:pPr marL="800100" lvl="1" indent="-342900">
-              <a:buFont typeface="Wingdings" panose="05000000000000000000" pitchFamily="2" charset="2"/>
-              <a:buChar char="q"/>
-            </a:pPr>
-            <a:r>
-              <a:rPr lang="fr-CH" sz="2400" b="1" dirty="0"/>
-              <a:t>Node.js</a:t>
-            </a:r>
-          </a:p>
-          <a:p>
-            <a:pPr marL="800100" lvl="1" indent="-342900">
-              <a:buFont typeface="Wingdings" panose="05000000000000000000" pitchFamily="2" charset="2"/>
-              <a:buChar char="q"/>
-            </a:pPr>
-            <a:r>
-              <a:rPr lang="fr-CH" sz="2400" b="1" dirty="0"/>
-              <a:t>Render.com</a:t>
-            </a:r>
-          </a:p>
-          <a:p>
-            <a:pPr marL="342900" indent="-342900">
-              <a:buFont typeface="Wingdings" panose="05000000000000000000" pitchFamily="2" charset="2"/>
-              <a:buChar char="q"/>
-            </a:pPr>
-            <a:r>
-              <a:rPr lang="fr-CH" sz="2400" b="1" dirty="0"/>
-              <a:t>…</a:t>
-            </a:r>
-          </a:p>
-          <a:p>
-            <a:pPr marL="800100" lvl="1" indent="-342900">
-              <a:buFont typeface="Wingdings" panose="05000000000000000000" pitchFamily="2" charset="2"/>
-              <a:buChar char="q"/>
-            </a:pPr>
-            <a:r>
-              <a:rPr lang="fr-CH" sz="2400" b="1" dirty="0"/>
-              <a:t>…</a:t>
-            </a:r>
-          </a:p>
-          <a:p>
-            <a:pPr marL="800100" lvl="1" indent="-342900">
-              <a:buFont typeface="Wingdings" panose="05000000000000000000" pitchFamily="2" charset="2"/>
-              <a:buChar char="q"/>
-            </a:pPr>
-            <a:endParaRPr lang="fr-CH" sz="2400" b="1" dirty="0"/>
+              <a:rPr kumimoji="0" lang="fr-FR" altLang="fr-FR" sz="2000" b="1" i="0" u="none" strike="noStrike" cap="none" normalizeH="0" baseline="0" dirty="0" err="1">
+                <a:ln>
+                  <a:noFill/>
+                </a:ln>
+                <a:solidFill>
+                  <a:schemeClr val="tx1"/>
+                </a:solidFill>
+                <a:effectLst/>
+              </a:rPr>
+              <a:t>Séparationdes</a:t>
+            </a:r>
+            <a:r>
+              <a:rPr kumimoji="0" lang="fr-FR" altLang="fr-FR" sz="2000" b="1" i="0" u="none" strike="noStrike" cap="none" normalizeH="0" baseline="0" dirty="0">
+                <a:ln>
+                  <a:noFill/>
+                </a:ln>
+                <a:solidFill>
+                  <a:schemeClr val="tx1"/>
+                </a:solidFill>
+                <a:effectLst/>
+              </a:rPr>
+              <a:t> responsabilités </a:t>
+            </a:r>
+            <a:r>
+              <a:rPr kumimoji="0" lang="fr-FR" altLang="fr-FR" sz="2000" i="0" u="none" strike="noStrike" cap="none" normalizeH="0" baseline="0" dirty="0">
+                <a:ln>
+                  <a:noFill/>
+                </a:ln>
+                <a:solidFill>
+                  <a:schemeClr val="tx1"/>
+                </a:solidFill>
+                <a:effectLst/>
+              </a:rPr>
+              <a:t>: </a:t>
+            </a:r>
+            <a:r>
+              <a:rPr kumimoji="0" lang="fr-FR" altLang="fr-FR" sz="2000" i="0" u="none" strike="noStrike" cap="none" normalizeH="0" baseline="0" dirty="0" err="1">
+                <a:ln>
+                  <a:noFill/>
+                </a:ln>
+                <a:solidFill>
+                  <a:schemeClr val="tx1"/>
+                </a:solidFill>
+                <a:effectLst/>
+              </a:rPr>
+              <a:t>acquisition,transport</a:t>
+            </a:r>
+            <a:r>
+              <a:rPr kumimoji="0" lang="fr-FR" altLang="fr-FR" sz="2000" i="0" u="none" strike="noStrike" cap="none" normalizeH="0" baseline="0" dirty="0">
+                <a:ln>
+                  <a:noFill/>
+                </a:ln>
+                <a:solidFill>
+                  <a:schemeClr val="tx1"/>
+                </a:solidFill>
+                <a:effectLst/>
+              </a:rPr>
+              <a:t>, traitement, visualisation</a:t>
+            </a:r>
           </a:p>
         </p:txBody>
       </p:sp>
@@ -4813,153 +6972,6 @@
           <a:chExt cx="0" cy="0"/>
         </a:xfrm>
       </p:grpSpPr>
-      <p:sp>
-        <p:nvSpPr>
-          <p:cNvPr id="3" name="ZoneTexte 2">
-            <a:extLst>
-              <a:ext uri="{FF2B5EF4-FFF2-40B4-BE49-F238E27FC236}">
-                <a16:creationId xmlns:a16="http://schemas.microsoft.com/office/drawing/2014/main" id="{918438DF-CFE4-0C70-9420-BB7A63517DE3}"/>
-              </a:ext>
-            </a:extLst>
-          </p:cNvPr>
-          <p:cNvSpPr txBox="1"/>
-          <p:nvPr/>
-        </p:nvSpPr>
-        <p:spPr>
-          <a:xfrm>
-            <a:off x="8032750" y="6204155"/>
-            <a:ext cx="4031430" cy="523220"/>
-          </a:xfrm>
-          <a:prstGeom prst="rect">
-            <a:avLst/>
-          </a:prstGeom>
-          <a:noFill/>
-        </p:spPr>
-        <p:txBody>
-          <a:bodyPr wrap="square" rtlCol="0">
-            <a:spAutoFit/>
-          </a:bodyPr>
-          <a:lstStyle/>
-          <a:p>
-            <a:pPr algn="r"/>
-            <a:r>
-              <a:rPr lang="fr-CH" sz="1400" dirty="0"/>
-              <a:t>CAS-DAW Projet format du web</a:t>
-            </a:r>
-            <a:br>
-              <a:rPr lang="fr-CH" sz="1400" dirty="0"/>
-            </a:br>
-            <a:r>
-              <a:rPr lang="fr-CH" sz="1400" dirty="0"/>
-              <a:t>Dolci Marco/06.11.2025</a:t>
-            </a:r>
-          </a:p>
-        </p:txBody>
-      </p:sp>
-      <p:sp>
-        <p:nvSpPr>
-          <p:cNvPr id="5" name="ZoneTexte 4">
-            <a:extLst>
-              <a:ext uri="{FF2B5EF4-FFF2-40B4-BE49-F238E27FC236}">
-                <a16:creationId xmlns:a16="http://schemas.microsoft.com/office/drawing/2014/main" id="{2CB5A18A-EC49-39DD-5997-CB93F495AEEA}"/>
-              </a:ext>
-            </a:extLst>
-          </p:cNvPr>
-          <p:cNvSpPr txBox="1"/>
-          <p:nvPr/>
-        </p:nvSpPr>
-        <p:spPr>
-          <a:xfrm>
-            <a:off x="453494" y="870500"/>
-            <a:ext cx="10062106" cy="461665"/>
-          </a:xfrm>
-          <a:prstGeom prst="rect">
-            <a:avLst/>
-          </a:prstGeom>
-          <a:noFill/>
-        </p:spPr>
-        <p:txBody>
-          <a:bodyPr wrap="square" rtlCol="0">
-            <a:spAutoFit/>
-          </a:bodyPr>
-          <a:lstStyle/>
-          <a:p>
-            <a:r>
-              <a:rPr lang="fr-CH" sz="2400" b="1" dirty="0"/>
-              <a:t>Perspectives d’évolution</a:t>
-            </a:r>
-          </a:p>
-        </p:txBody>
-      </p:sp>
-      <p:sp>
-        <p:nvSpPr>
-          <p:cNvPr id="4" name="ZoneTexte 3">
-            <a:extLst>
-              <a:ext uri="{FF2B5EF4-FFF2-40B4-BE49-F238E27FC236}">
-                <a16:creationId xmlns:a16="http://schemas.microsoft.com/office/drawing/2014/main" id="{9325492F-2021-6352-249B-1E2D77AEE164}"/>
-              </a:ext>
-            </a:extLst>
-          </p:cNvPr>
-          <p:cNvSpPr txBox="1"/>
-          <p:nvPr/>
-        </p:nvSpPr>
-        <p:spPr>
-          <a:xfrm>
-            <a:off x="765916" y="1535981"/>
-            <a:ext cx="10131563" cy="1569660"/>
-          </a:xfrm>
-          <a:prstGeom prst="rect">
-            <a:avLst/>
-          </a:prstGeom>
-          <a:noFill/>
-        </p:spPr>
-        <p:txBody>
-          <a:bodyPr wrap="square" rtlCol="0">
-            <a:spAutoFit/>
-          </a:bodyPr>
-          <a:lstStyle/>
-          <a:p>
-            <a:pPr marL="342900" indent="-342900">
-              <a:buFont typeface="Wingdings" panose="05000000000000000000" pitchFamily="2" charset="2"/>
-              <a:buChar char="q"/>
-            </a:pPr>
-            <a:r>
-              <a:rPr lang="fr-CH" sz="2400" b="1" dirty="0"/>
-              <a:t>Amélioration du flux de données</a:t>
-            </a:r>
-          </a:p>
-          <a:p>
-            <a:pPr marL="342900" indent="-342900">
-              <a:buFont typeface="Wingdings" panose="05000000000000000000" pitchFamily="2" charset="2"/>
-              <a:buChar char="q"/>
-            </a:pPr>
-            <a:r>
-              <a:rPr lang="fr-CH" sz="2400" b="1" dirty="0"/>
-              <a:t>Plus de widgets/capteurs</a:t>
-            </a:r>
-          </a:p>
-          <a:p>
-            <a:pPr marL="342900" indent="-342900">
-              <a:buFont typeface="Wingdings" panose="05000000000000000000" pitchFamily="2" charset="2"/>
-              <a:buChar char="q"/>
-            </a:pPr>
-            <a:r>
-              <a:rPr lang="fr-CH" sz="2400" b="1" dirty="0"/>
-              <a:t>Plus d’interactions avec les widgets</a:t>
-            </a:r>
-          </a:p>
-          <a:p>
-            <a:pPr marL="342900" indent="-342900">
-              <a:buFont typeface="Wingdings" panose="05000000000000000000" pitchFamily="2" charset="2"/>
-              <a:buChar char="q"/>
-            </a:pPr>
-            <a:r>
-              <a:rPr lang="fr-CH" sz="2400" b="1" dirty="0"/>
-              <a:t>…</a:t>
-            </a:r>
-          </a:p>
-        </p:txBody>
-      </p:sp>
       <p:pic>
         <p:nvPicPr>
           <p:cNvPr id="4098" name="Picture 2" descr="727 100+ Progression Stock Illustrations, graphiques vectoriels libre de  droits et Clip Art - iStock | Croissance, Evolution, Flèche">
@@ -4975,7 +6987,8 @@
           <p:nvPr/>
         </p:nvPicPr>
         <p:blipFill rotWithShape="1">
-          <a:blip r:embed="rId2">
+          <a:blip r:embed="rId3">
+            <a:alphaModFix/>
             <a:extLst>
               <a:ext uri="{28A0092B-C50C-407E-A947-70E740481C1C}">
                 <a14:useLocalDpi xmlns:a14="http://schemas.microsoft.com/office/drawing/2010/main" val="0"/>
@@ -4989,13 +7002,12 @@
         </p:blipFill>
         <p:spPr bwMode="auto">
           <a:xfrm>
-            <a:off x="7338406" y="3006494"/>
-            <a:ext cx="3559073" cy="3048001"/>
+            <a:off x="8481848" y="3139006"/>
+            <a:ext cx="3326115" cy="2848494"/>
           </a:xfrm>
           <a:prstGeom prst="rect">
             <a:avLst/>
           </a:prstGeom>
-          <a:noFill/>
           <a:extLst>
             <a:ext uri="{909E8E84-426E-40DD-AFC4-6F175D3DCCD1}">
               <a14:hiddenFill xmlns:a14="http://schemas.microsoft.com/office/drawing/2010/main">
@@ -5007,6 +7019,181 @@
           </a:extLst>
         </p:spPr>
       </p:pic>
+      <p:sp>
+        <p:nvSpPr>
+          <p:cNvPr id="3" name="ZoneTexte 2">
+            <a:extLst>
+              <a:ext uri="{FF2B5EF4-FFF2-40B4-BE49-F238E27FC236}">
+                <a16:creationId xmlns:a16="http://schemas.microsoft.com/office/drawing/2014/main" id="{918438DF-CFE4-0C70-9420-BB7A63517DE3}"/>
+              </a:ext>
+            </a:extLst>
+          </p:cNvPr>
+          <p:cNvSpPr txBox="1"/>
+          <p:nvPr/>
+        </p:nvSpPr>
+        <p:spPr>
+          <a:xfrm>
+            <a:off x="8032750" y="6204155"/>
+            <a:ext cx="4031430" cy="523220"/>
+          </a:xfrm>
+          <a:prstGeom prst="rect">
+            <a:avLst/>
+          </a:prstGeom>
+          <a:noFill/>
+        </p:spPr>
+        <p:txBody>
+          <a:bodyPr wrap="square" rtlCol="0">
+            <a:spAutoFit/>
+          </a:bodyPr>
+          <a:lstStyle/>
+          <a:p>
+            <a:pPr algn="r"/>
+            <a:r>
+              <a:rPr lang="fr-CH" sz="1400" dirty="0"/>
+              <a:t>CAS-DAW Projet format du web</a:t>
+            </a:r>
+            <a:br>
+              <a:rPr lang="fr-CH" sz="1400" dirty="0"/>
+            </a:br>
+            <a:r>
+              <a:rPr lang="fr-CH" sz="1400" dirty="0"/>
+              <a:t>Dolci Marco/06.11.2025</a:t>
+            </a:r>
+          </a:p>
+        </p:txBody>
+      </p:sp>
+      <p:sp>
+        <p:nvSpPr>
+          <p:cNvPr id="5" name="ZoneTexte 4">
+            <a:extLst>
+              <a:ext uri="{FF2B5EF4-FFF2-40B4-BE49-F238E27FC236}">
+                <a16:creationId xmlns:a16="http://schemas.microsoft.com/office/drawing/2014/main" id="{2CB5A18A-EC49-39DD-5997-CB93F495AEEA}"/>
+              </a:ext>
+            </a:extLst>
+          </p:cNvPr>
+          <p:cNvSpPr txBox="1"/>
+          <p:nvPr/>
+        </p:nvSpPr>
+        <p:spPr>
+          <a:xfrm>
+            <a:off x="453494" y="870500"/>
+            <a:ext cx="10062106" cy="461665"/>
+          </a:xfrm>
+          <a:prstGeom prst="rect">
+            <a:avLst/>
+          </a:prstGeom>
+          <a:noFill/>
+        </p:spPr>
+        <p:txBody>
+          <a:bodyPr wrap="square" rtlCol="0">
+            <a:spAutoFit/>
+          </a:bodyPr>
+          <a:lstStyle/>
+          <a:p>
+            <a:r>
+              <a:rPr lang="fr-CH" sz="2400" b="1" dirty="0"/>
+              <a:t>Perspectives d’évolution</a:t>
+            </a:r>
+          </a:p>
+        </p:txBody>
+      </p:sp>
+      <p:sp>
+        <p:nvSpPr>
+          <p:cNvPr id="4" name="ZoneTexte 3">
+            <a:extLst>
+              <a:ext uri="{FF2B5EF4-FFF2-40B4-BE49-F238E27FC236}">
+                <a16:creationId xmlns:a16="http://schemas.microsoft.com/office/drawing/2014/main" id="{9325492F-2021-6352-249B-1E2D77AEE164}"/>
+              </a:ext>
+            </a:extLst>
+          </p:cNvPr>
+          <p:cNvSpPr txBox="1"/>
+          <p:nvPr/>
+        </p:nvSpPr>
+        <p:spPr>
+          <a:xfrm>
+            <a:off x="384037" y="1594131"/>
+            <a:ext cx="10131563" cy="2308324"/>
+          </a:xfrm>
+          <a:prstGeom prst="rect">
+            <a:avLst/>
+          </a:prstGeom>
+          <a:noFill/>
+        </p:spPr>
+        <p:txBody>
+          <a:bodyPr wrap="square" rtlCol="0">
+            <a:spAutoFit/>
+          </a:bodyPr>
+          <a:lstStyle/>
+          <a:p>
+            <a:pPr marL="342900" indent="-342900">
+              <a:buFont typeface="Wingdings" panose="05000000000000000000" pitchFamily="2" charset="2"/>
+              <a:buChar char="q"/>
+            </a:pPr>
+            <a:r>
+              <a:rPr lang="fr-CH" sz="2400" b="1" dirty="0"/>
+              <a:t>Amélioration du flux de données</a:t>
+            </a:r>
+          </a:p>
+          <a:p>
+            <a:pPr marL="342900" indent="-342900">
+              <a:buFont typeface="Wingdings" panose="05000000000000000000" pitchFamily="2" charset="2"/>
+              <a:buChar char="q"/>
+            </a:pPr>
+            <a:r>
+              <a:rPr lang="fr-CH" sz="2400" b="1" dirty="0"/>
+              <a:t>Plus de widgets/capteurs</a:t>
+            </a:r>
+          </a:p>
+          <a:p>
+            <a:pPr marL="342900" indent="-342900">
+              <a:buFont typeface="Wingdings" panose="05000000000000000000" pitchFamily="2" charset="2"/>
+              <a:buChar char="q"/>
+            </a:pPr>
+            <a:r>
+              <a:rPr lang="fr-CH" sz="2400" b="1" dirty="0"/>
+              <a:t>Plus d’interactions avec les widgets</a:t>
+            </a:r>
+          </a:p>
+          <a:p>
+            <a:pPr marL="342900" indent="-342900">
+              <a:buFont typeface="Wingdings" panose="05000000000000000000" pitchFamily="2" charset="2"/>
+              <a:buChar char="q"/>
+            </a:pPr>
+            <a:r>
+              <a:rPr lang="fr-CH" sz="2400" b="1" dirty="0"/>
+              <a:t>Extension des fonctionnalités temps réel</a:t>
+            </a:r>
+          </a:p>
+          <a:p>
+            <a:pPr marL="342900" indent="-342900">
+              <a:buFont typeface="Wingdings" panose="05000000000000000000" pitchFamily="2" charset="2"/>
+              <a:buChar char="q"/>
+            </a:pPr>
+            <a:r>
+              <a:rPr lang="fr-CH" sz="2400" b="1" dirty="0"/>
+              <a:t>Mode hors‑ligne / reprise automatique après coupure réseau</a:t>
+            </a:r>
+          </a:p>
+          <a:p>
+            <a:pPr marL="342900" indent="-342900">
+              <a:buFont typeface="Wingdings" panose="05000000000000000000" pitchFamily="2" charset="2"/>
+              <a:buChar char="q"/>
+            </a:pPr>
+            <a:r>
+              <a:rPr lang="fr-CH" sz="2400" b="1" dirty="0"/>
+              <a:t>Historique et visualisation des données (replay, graphiques, </a:t>
+            </a:r>
+            <a:r>
+              <a:rPr lang="fr-CH" sz="2400" b="1" dirty="0" err="1"/>
+              <a:t>heatmaps</a:t>
+            </a:r>
+            <a:r>
+              <a:rPr lang="fr-CH" sz="2400" b="1" dirty="0"/>
+              <a:t>)</a:t>
+            </a:r>
+          </a:p>
+        </p:txBody>
+      </p:sp>
     </p:spTree>
     <p:extLst>
       <p:ext uri="{BB962C8B-B14F-4D97-AF65-F5344CB8AC3E}">
@@ -5101,7 +7288,7 @@
           <p:nvPr/>
         </p:nvPicPr>
         <p:blipFill rotWithShape="1">
-          <a:blip r:embed="rId2">
+          <a:blip r:embed="rId3">
             <a:extLst>
               <a:ext uri="{28A0092B-C50C-407E-A947-70E740481C1C}">
                 <a14:useLocalDpi xmlns:a14="http://schemas.microsoft.com/office/drawing/2010/main" val="0"/>
@@ -5505,7 +7692,7 @@
           <p:nvPr/>
         </p:nvPicPr>
         <p:blipFill>
-          <a:blip r:embed="rId2">
+          <a:blip r:embed="rId3">
             <a:extLst>
               <a:ext uri="{28A0092B-C50C-407E-A947-70E740481C1C}">
                 <a14:useLocalDpi xmlns:a14="http://schemas.microsoft.com/office/drawing/2010/main" val="0"/>
@@ -6340,7 +8527,7 @@
           <p:nvPr/>
         </p:nvPicPr>
         <p:blipFill>
-          <a:blip r:embed="rId3">
+          <a:blip r:embed="rId4">
             <a:extLst>
               <a:ext uri="{28A0092B-C50C-407E-A947-70E740481C1C}">
                 <a14:useLocalDpi xmlns:a14="http://schemas.microsoft.com/office/drawing/2010/main" val="0"/>
@@ -6455,7 +8642,7 @@
           <p:nvPr/>
         </p:nvPicPr>
         <p:blipFill>
-          <a:blip r:embed="rId4">
+          <a:blip r:embed="rId5">
             <a:extLst>
               <a:ext uri="{28A0092B-C50C-407E-A947-70E740481C1C}">
                 <a14:useLocalDpi xmlns:a14="http://schemas.microsoft.com/office/drawing/2010/main" val="0"/>
@@ -7696,7 +9883,7 @@
           <p:nvPr/>
         </p:nvPicPr>
         <p:blipFill>
-          <a:blip r:embed="rId5">
+          <a:blip r:embed="rId6">
             <a:extLst>
               <a:ext uri="{28A0092B-C50C-407E-A947-70E740481C1C}">
                 <a14:useLocalDpi xmlns:a14="http://schemas.microsoft.com/office/drawing/2010/main" val="0"/>
@@ -8645,7 +10832,7 @@
           <p:nvPr/>
         </p:nvPicPr>
         <p:blipFill>
-          <a:blip r:embed="rId2"/>
+          <a:blip r:embed="rId3"/>
           <a:srcRect t="40412"/>
           <a:stretch>
             <a:fillRect/>
@@ -8696,7 +10883,7 @@
             <p:nvPr/>
           </p:nvPicPr>
           <p:blipFill rotWithShape="1">
-            <a:blip r:embed="rId3">
+            <a:blip r:embed="rId4">
               <a:extLst>
                 <a:ext uri="{28A0092B-C50C-407E-A947-70E740481C1C}">
                   <a14:useLocalDpi xmlns:a14="http://schemas.microsoft.com/office/drawing/2010/main" val="0"/>
@@ -8898,121 +11085,6 @@
         <p:cNvPr id="1" name="">
           <a:extLst>
             <a:ext uri="{FF2B5EF4-FFF2-40B4-BE49-F238E27FC236}">
-              <a16:creationId xmlns:a16="http://schemas.microsoft.com/office/drawing/2014/main" id="{C3B8B9DB-EB48-E8DB-F9F2-EE9100630BEA}"/>
-            </a:ext>
-          </a:extLst>
-        </p:cNvPr>
-        <p:cNvGrpSpPr/>
-        <p:nvPr/>
-      </p:nvGrpSpPr>
-      <p:grpSpPr>
-        <a:xfrm>
-          <a:off x="0" y="0"/>
-          <a:ext cx="0" cy="0"/>
-          <a:chOff x="0" y="0"/>
-          <a:chExt cx="0" cy="0"/>
-        </a:xfrm>
-      </p:grpSpPr>
-      <p:pic>
-        <p:nvPicPr>
-          <p:cNvPr id="9" name="Image 8" descr="Une image contenant logo, Graphique, Police, symbole&#10;&#10;Le contenu généré par l’IA peut être incorrect.">
-            <a:extLst>
-              <a:ext uri="{FF2B5EF4-FFF2-40B4-BE49-F238E27FC236}">
-                <a16:creationId xmlns:a16="http://schemas.microsoft.com/office/drawing/2014/main" id="{FCA77BD3-F78A-98D8-EED7-7E83B3BA5C3F}"/>
-              </a:ext>
-            </a:extLst>
-          </p:cNvPr>
-          <p:cNvPicPr>
-            <a:picLocks noChangeAspect="1"/>
-          </p:cNvPicPr>
-          <p:nvPr/>
-        </p:nvPicPr>
-        <p:blipFill>
-          <a:blip r:embed="rId2">
-            <a:extLst>
-              <a:ext uri="{28A0092B-C50C-407E-A947-70E740481C1C}">
-                <a14:useLocalDpi xmlns:a14="http://schemas.microsoft.com/office/drawing/2010/main" val="0"/>
-              </a:ext>
-            </a:extLst>
-          </a:blip>
-          <a:stretch>
-            <a:fillRect/>
-          </a:stretch>
-        </p:blipFill>
-        <p:spPr>
-          <a:xfrm>
-            <a:off x="4266039" y="1528269"/>
-            <a:ext cx="3659921" cy="3388287"/>
-          </a:xfrm>
-          <a:prstGeom prst="rect">
-            <a:avLst/>
-          </a:prstGeom>
-        </p:spPr>
-      </p:pic>
-      <p:sp>
-        <p:nvSpPr>
-          <p:cNvPr id="2" name="ZoneTexte 1">
-            <a:extLst>
-              <a:ext uri="{FF2B5EF4-FFF2-40B4-BE49-F238E27FC236}">
-                <a16:creationId xmlns:a16="http://schemas.microsoft.com/office/drawing/2014/main" id="{9913D426-DD00-213C-55E5-310E58448AA4}"/>
-              </a:ext>
-            </a:extLst>
-          </p:cNvPr>
-          <p:cNvSpPr txBox="1"/>
-          <p:nvPr/>
-        </p:nvSpPr>
-        <p:spPr>
-          <a:xfrm>
-            <a:off x="8032750" y="6204155"/>
-            <a:ext cx="4031430" cy="523220"/>
-          </a:xfrm>
-          <a:prstGeom prst="rect">
-            <a:avLst/>
-          </a:prstGeom>
-          <a:noFill/>
-        </p:spPr>
-        <p:txBody>
-          <a:bodyPr wrap="square" rtlCol="0">
-            <a:spAutoFit/>
-          </a:bodyPr>
-          <a:lstStyle/>
-          <a:p>
-            <a:pPr algn="r"/>
-            <a:r>
-              <a:rPr lang="fr-CH" sz="1400" dirty="0"/>
-              <a:t>CAS-DAW Projet JavaScript</a:t>
-            </a:r>
-            <a:br>
-              <a:rPr lang="fr-CH" sz="1400" dirty="0"/>
-            </a:br>
-            <a:r>
-              <a:rPr lang="fr-CH" sz="1400" dirty="0"/>
-              <a:t>15.01.2026</a:t>
-            </a:r>
-          </a:p>
-        </p:txBody>
-      </p:sp>
-    </p:spTree>
-    <p:extLst>
-      <p:ext uri="{BB962C8B-B14F-4D97-AF65-F5344CB8AC3E}">
-        <p14:creationId xmlns:p14="http://schemas.microsoft.com/office/powerpoint/2010/main" val="1513593764"/>
-      </p:ext>
-    </p:extLst>
-  </p:cSld>
-  <p:clrMapOvr>
-    <a:masterClrMapping/>
-  </p:clrMapOvr>
-</p:sld>
-</file>
-
-<file path=ppt/slides/slide6.xml><?xml version="1.0" encoding="utf-8"?>
-<p:sld xmlns:a="http://schemas.openxmlformats.org/drawingml/2006/main" xmlns:r="http://schemas.openxmlformats.org/officeDocument/2006/relationships" xmlns:p="http://schemas.openxmlformats.org/presentationml/2006/main">
-  <p:cSld>
-    <p:spTree>
-      <p:nvGrpSpPr>
-        <p:cNvPr id="1" name="">
-          <a:extLst>
-            <a:ext uri="{FF2B5EF4-FFF2-40B4-BE49-F238E27FC236}">
               <a16:creationId xmlns:a16="http://schemas.microsoft.com/office/drawing/2014/main" id="{3B317B1C-02F0-4CBC-2A09-7D4CA8999856}"/>
             </a:ext>
           </a:extLst>
@@ -9121,7 +11193,7 @@
           <p:nvPr/>
         </p:nvPicPr>
         <p:blipFill>
-          <a:blip r:embed="rId2">
+          <a:blip r:embed="rId3">
             <a:extLst>
               <a:ext uri="{28A0092B-C50C-407E-A947-70E740481C1C}">
                 <a14:useLocalDpi xmlns:a14="http://schemas.microsoft.com/office/drawing/2010/main" val="0"/>
@@ -9160,7 +11232,7 @@
 </p:sld>
 </file>
 
-<file path=ppt/slides/slide7.xml><?xml version="1.0" encoding="utf-8"?>
+<file path=ppt/slides/slide6.xml><?xml version="1.0" encoding="utf-8"?>
 <p:sld xmlns:a="http://schemas.openxmlformats.org/drawingml/2006/main" xmlns:r="http://schemas.openxmlformats.org/officeDocument/2006/relationships" xmlns:p="http://schemas.openxmlformats.org/presentationml/2006/main">
   <p:cSld>
     <p:spTree>
@@ -9276,7 +11348,7 @@
           <p:nvPr/>
         </p:nvPicPr>
         <p:blipFill>
-          <a:blip r:embed="rId2">
+          <a:blip r:embed="rId3">
             <a:extLst>
               <a:ext uri="{28A0092B-C50C-407E-A947-70E740481C1C}">
                 <a14:useLocalDpi xmlns:a14="http://schemas.microsoft.com/office/drawing/2010/main" val="0"/>
@@ -9312,7 +11384,7 @@
           <p:nvPr/>
         </p:nvPicPr>
         <p:blipFill>
-          <a:blip r:embed="rId3">
+          <a:blip r:embed="rId4">
             <a:extLst>
               <a:ext uri="{28A0092B-C50C-407E-A947-70E740481C1C}">
                 <a14:useLocalDpi xmlns:a14="http://schemas.microsoft.com/office/drawing/2010/main" val="0"/>
@@ -9348,7 +11420,7 @@
           <p:nvPr/>
         </p:nvPicPr>
         <p:blipFill>
-          <a:blip r:embed="rId4">
+          <a:blip r:embed="rId5">
             <a:extLst>
               <a:ext uri="{28A0092B-C50C-407E-A947-70E740481C1C}">
                 <a14:useLocalDpi xmlns:a14="http://schemas.microsoft.com/office/drawing/2010/main" val="0"/>
@@ -9384,7 +11456,7 @@
           <p:nvPr/>
         </p:nvPicPr>
         <p:blipFill>
-          <a:blip r:embed="rId5">
+          <a:blip r:embed="rId6">
             <a:extLst>
               <a:ext uri="{28A0092B-C50C-407E-A947-70E740481C1C}">
                 <a14:useLocalDpi xmlns:a14="http://schemas.microsoft.com/office/drawing/2010/main" val="0"/>
@@ -9420,7 +11492,7 @@
           <p:nvPr/>
         </p:nvPicPr>
         <p:blipFill>
-          <a:blip r:embed="rId6">
+          <a:blip r:embed="rId7">
             <a:extLst>
               <a:ext uri="{28A0092B-C50C-407E-A947-70E740481C1C}">
                 <a14:useLocalDpi xmlns:a14="http://schemas.microsoft.com/office/drawing/2010/main" val="0"/>
@@ -9456,7 +11528,7 @@
           <p:nvPr/>
         </p:nvPicPr>
         <p:blipFill>
-          <a:blip r:embed="rId7">
+          <a:blip r:embed="rId8">
             <a:extLst>
               <a:ext uri="{28A0092B-C50C-407E-A947-70E740481C1C}">
                 <a14:useLocalDpi xmlns:a14="http://schemas.microsoft.com/office/drawing/2010/main" val="0"/>
@@ -9490,7 +11562,7 @@
 </p:sld>
 </file>
 
-<file path=ppt/slides/slide8.xml><?xml version="1.0" encoding="utf-8"?>
+<file path=ppt/slides/slide7.xml><?xml version="1.0" encoding="utf-8"?>
 <p:sld xmlns:a="http://schemas.openxmlformats.org/drawingml/2006/main" xmlns:r="http://schemas.openxmlformats.org/officeDocument/2006/relationships" xmlns:p="http://schemas.openxmlformats.org/presentationml/2006/main">
   <p:cSld>
     <p:spTree>
@@ -9694,7 +11766,7 @@
           <p:nvPr/>
         </p:nvPicPr>
         <p:blipFill rotWithShape="1">
-          <a:blip r:embed="rId2">
+          <a:blip r:embed="rId3">
             <a:extLst>
               <a:ext uri="{28A0092B-C50C-407E-A947-70E740481C1C}">
                 <a14:useLocalDpi xmlns:a14="http://schemas.microsoft.com/office/drawing/2010/main" val="0"/>
@@ -9773,6 +11845,121 @@
     <p:extLst>
       <p:ext uri="{BB962C8B-B14F-4D97-AF65-F5344CB8AC3E}">
         <p14:creationId xmlns:p14="http://schemas.microsoft.com/office/powerpoint/2010/main" val="3062156110"/>
+      </p:ext>
+    </p:extLst>
+  </p:cSld>
+  <p:clrMapOvr>
+    <a:masterClrMapping/>
+  </p:clrMapOvr>
+</p:sld>
+</file>
+
+<file path=ppt/slides/slide8.xml><?xml version="1.0" encoding="utf-8"?>
+<p:sld xmlns:a="http://schemas.openxmlformats.org/drawingml/2006/main" xmlns:r="http://schemas.openxmlformats.org/officeDocument/2006/relationships" xmlns:p="http://schemas.openxmlformats.org/presentationml/2006/main">
+  <p:cSld>
+    <p:spTree>
+      <p:nvGrpSpPr>
+        <p:cNvPr id="1" name="">
+          <a:extLst>
+            <a:ext uri="{FF2B5EF4-FFF2-40B4-BE49-F238E27FC236}">
+              <a16:creationId xmlns:a16="http://schemas.microsoft.com/office/drawing/2014/main" id="{C3B8B9DB-EB48-E8DB-F9F2-EE9100630BEA}"/>
+            </a:ext>
+          </a:extLst>
+        </p:cNvPr>
+        <p:cNvGrpSpPr/>
+        <p:nvPr/>
+      </p:nvGrpSpPr>
+      <p:grpSpPr>
+        <a:xfrm>
+          <a:off x="0" y="0"/>
+          <a:ext cx="0" cy="0"/>
+          <a:chOff x="0" y="0"/>
+          <a:chExt cx="0" cy="0"/>
+        </a:xfrm>
+      </p:grpSpPr>
+      <p:pic>
+        <p:nvPicPr>
+          <p:cNvPr id="9" name="Image 8" descr="Une image contenant logo, Graphique, Police, symbole&#10;&#10;Le contenu généré par l’IA peut être incorrect.">
+            <a:extLst>
+              <a:ext uri="{FF2B5EF4-FFF2-40B4-BE49-F238E27FC236}">
+                <a16:creationId xmlns:a16="http://schemas.microsoft.com/office/drawing/2014/main" id="{FCA77BD3-F78A-98D8-EED7-7E83B3BA5C3F}"/>
+              </a:ext>
+            </a:extLst>
+          </p:cNvPr>
+          <p:cNvPicPr>
+            <a:picLocks noChangeAspect="1"/>
+          </p:cNvPicPr>
+          <p:nvPr/>
+        </p:nvPicPr>
+        <p:blipFill>
+          <a:blip r:embed="rId3">
+            <a:extLst>
+              <a:ext uri="{28A0092B-C50C-407E-A947-70E740481C1C}">
+                <a14:useLocalDpi xmlns:a14="http://schemas.microsoft.com/office/drawing/2010/main" val="0"/>
+              </a:ext>
+            </a:extLst>
+          </a:blip>
+          <a:stretch>
+            <a:fillRect/>
+          </a:stretch>
+        </p:blipFill>
+        <p:spPr>
+          <a:xfrm>
+            <a:off x="4266039" y="1528269"/>
+            <a:ext cx="3659921" cy="3388287"/>
+          </a:xfrm>
+          <a:prstGeom prst="rect">
+            <a:avLst/>
+          </a:prstGeom>
+        </p:spPr>
+      </p:pic>
+      <p:sp>
+        <p:nvSpPr>
+          <p:cNvPr id="2" name="ZoneTexte 1">
+            <a:extLst>
+              <a:ext uri="{FF2B5EF4-FFF2-40B4-BE49-F238E27FC236}">
+                <a16:creationId xmlns:a16="http://schemas.microsoft.com/office/drawing/2014/main" id="{9913D426-DD00-213C-55E5-310E58448AA4}"/>
+              </a:ext>
+            </a:extLst>
+          </p:cNvPr>
+          <p:cNvSpPr txBox="1"/>
+          <p:nvPr/>
+        </p:nvSpPr>
+        <p:spPr>
+          <a:xfrm>
+            <a:off x="8032750" y="6204155"/>
+            <a:ext cx="4031430" cy="523220"/>
+          </a:xfrm>
+          <a:prstGeom prst="rect">
+            <a:avLst/>
+          </a:prstGeom>
+          <a:noFill/>
+        </p:spPr>
+        <p:txBody>
+          <a:bodyPr wrap="square" rtlCol="0">
+            <a:spAutoFit/>
+          </a:bodyPr>
+          <a:lstStyle/>
+          <a:p>
+            <a:pPr algn="r"/>
+            <a:r>
+              <a:rPr lang="fr-CH" sz="1400" dirty="0"/>
+              <a:t>CAS-DAW Projet JavaScript</a:t>
+            </a:r>
+            <a:br>
+              <a:rPr lang="fr-CH" sz="1400" dirty="0"/>
+            </a:br>
+            <a:r>
+              <a:rPr lang="fr-CH" sz="1400" dirty="0"/>
+              <a:t>15.01.2026</a:t>
+            </a:r>
+          </a:p>
+        </p:txBody>
+      </p:sp>
+    </p:spTree>
+    <p:extLst>
+      <p:ext uri="{BB962C8B-B14F-4D97-AF65-F5344CB8AC3E}">
+        <p14:creationId xmlns:p14="http://schemas.microsoft.com/office/powerpoint/2010/main" val="1513593764"/>
       </p:ext>
     </p:extLst>
   </p:cSld>
@@ -9877,6 +12064,10 @@
           <a:lstStyle/>
           <a:p>
             <a:r>
+              <a:rPr lang="fr-CH" sz="2400" dirty="0"/>
+              <a:t>🚧 </a:t>
+            </a:r>
+            <a:r>
               <a:rPr lang="fr-CH" sz="2400" b="1" dirty="0"/>
               <a:t>Difficultés rencontrées</a:t>
             </a:r>
@@ -9897,8 +12088,8 @@
         </p:nvSpPr>
         <p:spPr>
           <a:xfrm>
-            <a:off x="765916" y="1535981"/>
-            <a:ext cx="10131563" cy="830997"/>
+            <a:off x="334007" y="1619036"/>
+            <a:ext cx="11490439" cy="4462760"/>
           </a:xfrm>
           <a:prstGeom prst="rect">
             <a:avLst/>
@@ -9917,7 +12108,43 @@
             </a:pPr>
             <a:r>
               <a:rPr lang="fr-CH" sz="2400" b="1" dirty="0"/>
-              <a:t>…</a:t>
+              <a:t>Hétérogénéité et instabilité des capteurs du smartphone</a:t>
+            </a:r>
+          </a:p>
+          <a:p>
+            <a:r>
+              <a:rPr lang="fr-CH" sz="2000" dirty="0">
+                <a:effectLst/>
+              </a:rPr>
+              <a:t>Les smartphones ne sont pas des instruments scientifiques. </a:t>
+            </a:r>
+          </a:p>
+          <a:p>
+            <a:r>
+              <a:rPr lang="fr-CH" sz="2000" dirty="0">
+                <a:effectLst/>
+              </a:rPr>
+              <a:t>Tu dois composer avec : des IMU bruitées</a:t>
+            </a:r>
+            <a:r>
+              <a:rPr lang="fr-CH" sz="2000" dirty="0"/>
+              <a:t>, </a:t>
+            </a:r>
+            <a:r>
+              <a:rPr lang="fr-CH" sz="2000" dirty="0">
+                <a:effectLst/>
+              </a:rPr>
+              <a:t>angles d’Euler discontinus</a:t>
+            </a:r>
+            <a:r>
+              <a:rPr lang="fr-CH" sz="2000" dirty="0"/>
+              <a:t>, </a:t>
+            </a:r>
+            <a:r>
+              <a:rPr lang="fr-CH" sz="2000" dirty="0">
+                <a:effectLst/>
+              </a:rPr>
+              <a:t>valeurs dépendantes de l’orientation physique du téléphone, des variations entre modèles (Android vs iPhone, marques, générations)</a:t>
             </a:r>
           </a:p>
           <a:p>
@@ -9925,10 +12152,58 @@
               <a:buFont typeface="Wingdings" panose="05000000000000000000" pitchFamily="2" charset="2"/>
               <a:buChar char="q"/>
             </a:pPr>
+            <a:endParaRPr lang="fr-CH" sz="2400" b="1" dirty="0"/>
+          </a:p>
+          <a:p>
+            <a:pPr marL="342900" indent="-342900">
+              <a:buFont typeface="Wingdings" panose="05000000000000000000" pitchFamily="2" charset="2"/>
+              <a:buChar char="q"/>
+            </a:pPr>
             <a:r>
               <a:rPr lang="fr-CH" sz="2400" b="1" dirty="0"/>
-              <a:t>…</a:t>
-            </a:r>
+              <a:t>Transmission temps réel via </a:t>
+            </a:r>
+            <a:r>
+              <a:rPr lang="fr-CH" sz="2400" b="1" dirty="0" err="1"/>
+              <a:t>WebSocket</a:t>
+            </a:r>
+            <a:endParaRPr lang="fr-CH" sz="2400" b="1" dirty="0"/>
+          </a:p>
+          <a:p>
+            <a:r>
+              <a:rPr lang="fr-CH" sz="2000" dirty="0">
+                <a:effectLst/>
+              </a:rPr>
+              <a:t>Le temps réel n’est jamais “simple” : latence variable, pertes de paquets, reconnections intempestives, débit limité en 4G/5G,messages reçus dans un ordre différent de l’envoi</a:t>
+            </a:r>
+          </a:p>
+          <a:p>
+            <a:endParaRPr lang="fr-CH" sz="2400" b="1" dirty="0"/>
+          </a:p>
+          <a:p>
+            <a:pPr marL="342900" indent="-342900">
+              <a:buFont typeface="Wingdings" panose="05000000000000000000" pitchFamily="2" charset="2"/>
+              <a:buChar char="q"/>
+            </a:pPr>
+            <a:r>
+              <a:rPr lang="fr-CH" sz="2400" b="1" dirty="0"/>
+              <a:t>Visualisation en temps réel</a:t>
+            </a:r>
+          </a:p>
+          <a:p>
+            <a:r>
+              <a:rPr lang="fr-CH" sz="2000" dirty="0">
+                <a:effectLst/>
+              </a:rPr>
+              <a:t>Afficher en continu : une carte, une boussole, une voiture 2D/3D, des graphiques audio, des logs, des widgets multiples</a:t>
+            </a:r>
+          </a:p>
+          <a:p>
+            <a:pPr marL="342900" indent="-342900">
+              <a:buFont typeface="Wingdings" panose="05000000000000000000" pitchFamily="2" charset="2"/>
+              <a:buChar char="q"/>
+            </a:pPr>
+            <a:endParaRPr lang="fr-CH" sz="2400" b="1" dirty="0"/>
           </a:p>
         </p:txBody>
       </p:sp>
@@ -9947,7 +12222,7 @@
           <p:nvPr/>
         </p:nvPicPr>
         <p:blipFill rotWithShape="1">
-          <a:blip r:embed="rId2">
+          <a:blip r:embed="rId3">
             <a:extLst>
               <a:ext uri="{28A0092B-C50C-407E-A947-70E740481C1C}">
                 <a14:useLocalDpi xmlns:a14="http://schemas.microsoft.com/office/drawing/2010/main" val="0"/>
@@ -9961,8 +12236,8 @@
         </p:blipFill>
         <p:spPr bwMode="auto">
           <a:xfrm>
-            <a:off x="7590503" y="1183601"/>
-            <a:ext cx="3195484" cy="4138418"/>
+            <a:off x="10101383" y="167408"/>
+            <a:ext cx="1929253" cy="2498543"/>
           </a:xfrm>
           <a:prstGeom prst="chord">
             <a:avLst>

--- a/documents/Presentation_JS.pptx
+++ b/documents/Presentation_JS.pptx
@@ -226,7 +226,7 @@
           <a:p>
             <a:fld id="{828A8F36-A643-4FAA-8649-965D6B1446A9}" type="datetimeFigureOut">
               <a:rPr lang="fr-FR" smtClean="0"/>
-              <a:t>04/01/2026</a:t>
+              <a:t>08/01/2026</a:t>
             </a:fld>
             <a:endParaRPr lang="fr-FR"/>
           </a:p>
@@ -403,7 +403,7 @@
           <a:p>
             <a:fld id="{2456FC83-ED93-4984-B7AA-3DB9F84FF409}" type="datetimeFigureOut">
               <a:rPr lang="fr-FR" smtClean="0"/>
-              <a:t>04/01/2026</a:t>
+              <a:t>08/01/2026</a:t>
             </a:fld>
             <a:endParaRPr lang="fr-FR"/>
           </a:p>
@@ -721,7 +721,7 @@
               <a:rPr lang="fr-CH" b="1" dirty="0">
                 <a:effectLst/>
               </a:rPr>
-              <a:t>Introduction</a:t>
+              <a:t>Introduction (MD)</a:t>
             </a:r>
           </a:p>
           <a:p>
@@ -873,7 +873,7 @@
               <a:rPr lang="fr-CH" b="1" dirty="0">
                 <a:effectLst/>
               </a:rPr>
-              <a:t>10. Perspectives d’évolution</a:t>
+              <a:t>10. Perspectives d’évolution (AAA)</a:t>
             </a:r>
           </a:p>
           <a:p>
@@ -1110,7 +1110,7 @@
               <a:rPr lang="fr-CH" b="1" dirty="0">
                 <a:effectLst/>
               </a:rPr>
-              <a:t>2. Exemples de besoins couverts</a:t>
+              <a:t>2. Exemples de besoins couverts (MD)</a:t>
             </a:r>
           </a:p>
           <a:p>
@@ -1293,7 +1293,7 @@
               <a:rPr lang="fr-CH" b="1" dirty="0">
                 <a:effectLst/>
               </a:rPr>
-              <a:t>3. Concept du projet</a:t>
+              <a:t>3. Concept du projet (MD)</a:t>
             </a:r>
           </a:p>
           <a:p>
@@ -1468,7 +1468,7 @@
               <a:rPr lang="fr-CH" b="1" dirty="0">
                 <a:effectLst/>
               </a:rPr>
-              <a:t>4. Architecture générale</a:t>
+              <a:t>4. Architecture générale (CD)</a:t>
             </a:r>
           </a:p>
           <a:p>
@@ -1611,7 +1611,7 @@
               <a:rPr lang="fr-CH" b="1" dirty="0">
                 <a:effectLst/>
               </a:rPr>
-              <a:t>5. Organisation du projet</a:t>
+              <a:t>5. Organisation du projet (CD)</a:t>
             </a:r>
           </a:p>
           <a:p>
@@ -1778,7 +1778,7 @@
               <a:rPr lang="fr-CH" b="1" dirty="0">
                 <a:effectLst/>
               </a:rPr>
-              <a:t>6. Technologies utilisées</a:t>
+              <a:t>6. Technologies utilisées  (CD)</a:t>
             </a:r>
           </a:p>
           <a:p>
@@ -1956,11 +1956,28 @@
           <a:bodyPr/>
           <a:lstStyle/>
           <a:p>
+            <a:pPr marL="0" marR="0" lvl="0" indent="0" algn="l" defTabSz="914400" rtl="0" eaLnBrk="1" fontAlgn="auto" latinLnBrk="0" hangingPunct="1">
+              <a:lnSpc>
+                <a:spcPct val="100000"/>
+              </a:lnSpc>
+              <a:spcBef>
+                <a:spcPts val="0"/>
+              </a:spcBef>
+              <a:spcAft>
+                <a:spcPts val="0"/>
+              </a:spcAft>
+              <a:buClrTx/>
+              <a:buSzTx/>
+              <a:buFontTx/>
+              <a:buNone/>
+              <a:tabLst/>
+              <a:defRPr/>
+            </a:pPr>
             <a:r>
               <a:rPr lang="fr-CH" b="1" dirty="0">
                 <a:effectLst/>
               </a:rPr>
-              <a:t>7. Exemple de widget : </a:t>
+              <a:t>7. Exemple de widget : (CHACUN SES WIDGETS)</a:t>
             </a:r>
           </a:p>
           <a:p>
@@ -2210,7 +2227,7 @@
               <a:rPr lang="fr-CH" b="1" dirty="0">
                 <a:effectLst/>
               </a:rPr>
-              <a:t>8. Difficultés rencontrées</a:t>
+              <a:t>8. Difficultés rencontrées (AAA)</a:t>
             </a:r>
           </a:p>
           <a:p>
@@ -2416,7 +2433,7 @@
               <a:rPr lang="fr-CH" b="1" dirty="0">
                 <a:effectLst/>
               </a:rPr>
-              <a:t>9. Points positifs</a:t>
+              <a:t>9. Points positifs (AAA)</a:t>
             </a:r>
           </a:p>
           <a:p>
@@ -2694,7 +2711,7 @@
           <a:p>
             <a:fld id="{06137112-888A-40C4-BD31-96BD10D39A6F}" type="datetimeFigureOut">
               <a:rPr lang="fr-CH" smtClean="0"/>
-              <a:t>04.01.2026</a:t>
+              <a:t>08.01.2026</a:t>
             </a:fld>
             <a:endParaRPr lang="fr-CH"/>
           </a:p>
@@ -2894,7 +2911,7 @@
           <a:p>
             <a:fld id="{06137112-888A-40C4-BD31-96BD10D39A6F}" type="datetimeFigureOut">
               <a:rPr lang="fr-CH" smtClean="0"/>
-              <a:t>04.01.2026</a:t>
+              <a:t>08.01.2026</a:t>
             </a:fld>
             <a:endParaRPr lang="fr-CH"/>
           </a:p>
@@ -3104,7 +3121,7 @@
           <a:p>
             <a:fld id="{06137112-888A-40C4-BD31-96BD10D39A6F}" type="datetimeFigureOut">
               <a:rPr lang="fr-CH" smtClean="0"/>
-              <a:t>04.01.2026</a:t>
+              <a:t>08.01.2026</a:t>
             </a:fld>
             <a:endParaRPr lang="fr-CH"/>
           </a:p>
@@ -3304,7 +3321,7 @@
           <a:p>
             <a:fld id="{06137112-888A-40C4-BD31-96BD10D39A6F}" type="datetimeFigureOut">
               <a:rPr lang="fr-CH" smtClean="0"/>
-              <a:t>04.01.2026</a:t>
+              <a:t>08.01.2026</a:t>
             </a:fld>
             <a:endParaRPr lang="fr-CH"/>
           </a:p>
@@ -3580,7 +3597,7 @@
           <a:p>
             <a:fld id="{06137112-888A-40C4-BD31-96BD10D39A6F}" type="datetimeFigureOut">
               <a:rPr lang="fr-CH" smtClean="0"/>
-              <a:t>04.01.2026</a:t>
+              <a:t>08.01.2026</a:t>
             </a:fld>
             <a:endParaRPr lang="fr-CH"/>
           </a:p>
@@ -3848,7 +3865,7 @@
           <a:p>
             <a:fld id="{06137112-888A-40C4-BD31-96BD10D39A6F}" type="datetimeFigureOut">
               <a:rPr lang="fr-CH" smtClean="0"/>
-              <a:t>04.01.2026</a:t>
+              <a:t>08.01.2026</a:t>
             </a:fld>
             <a:endParaRPr lang="fr-CH"/>
           </a:p>
@@ -4263,7 +4280,7 @@
           <a:p>
             <a:fld id="{06137112-888A-40C4-BD31-96BD10D39A6F}" type="datetimeFigureOut">
               <a:rPr lang="fr-CH" smtClean="0"/>
-              <a:t>04.01.2026</a:t>
+              <a:t>08.01.2026</a:t>
             </a:fld>
             <a:endParaRPr lang="fr-CH"/>
           </a:p>
@@ -4405,7 +4422,7 @@
           <a:p>
             <a:fld id="{06137112-888A-40C4-BD31-96BD10D39A6F}" type="datetimeFigureOut">
               <a:rPr lang="fr-CH" smtClean="0"/>
-              <a:t>04.01.2026</a:t>
+              <a:t>08.01.2026</a:t>
             </a:fld>
             <a:endParaRPr lang="fr-CH"/>
           </a:p>
@@ -4518,7 +4535,7 @@
           <a:p>
             <a:fld id="{06137112-888A-40C4-BD31-96BD10D39A6F}" type="datetimeFigureOut">
               <a:rPr lang="fr-CH" smtClean="0"/>
-              <a:t>04.01.2026</a:t>
+              <a:t>08.01.2026</a:t>
             </a:fld>
             <a:endParaRPr lang="fr-CH"/>
           </a:p>
@@ -4831,7 +4848,7 @@
           <a:p>
             <a:fld id="{06137112-888A-40C4-BD31-96BD10D39A6F}" type="datetimeFigureOut">
               <a:rPr lang="fr-CH" smtClean="0"/>
-              <a:t>04.01.2026</a:t>
+              <a:t>08.01.2026</a:t>
             </a:fld>
             <a:endParaRPr lang="fr-CH"/>
           </a:p>
@@ -5120,7 +5137,7 @@
           <a:p>
             <a:fld id="{06137112-888A-40C4-BD31-96BD10D39A6F}" type="datetimeFigureOut">
               <a:rPr lang="fr-CH" smtClean="0"/>
-              <a:t>04.01.2026</a:t>
+              <a:t>08.01.2026</a:t>
             </a:fld>
             <a:endParaRPr lang="fr-CH"/>
           </a:p>
@@ -5372,7 +5389,7 @@
           <a:p>
             <a:fld id="{06137112-888A-40C4-BD31-96BD10D39A6F}" type="datetimeFigureOut">
               <a:rPr lang="fr-CH" smtClean="0"/>
-              <a:t>04.01.2026</a:t>
+              <a:t>08.01.2026</a:t>
             </a:fld>
             <a:endParaRPr lang="fr-CH"/>
           </a:p>
@@ -8449,7 +8466,7 @@
         </p:spPr>
         <p:txBody>
           <a:bodyPr vert="horz" lIns="91440" tIns="45720" rIns="91440" bIns="45720" rtlCol="0" anchor="b">
-            <a:normAutofit/>
+            <a:normAutofit fontScale="92500"/>
           </a:bodyPr>
           <a:lstStyle/>
           <a:p>

--- a/documents/Presentation_JS.pptx
+++ b/documents/Presentation_JS.pptx
@@ -226,7 +226,7 @@
           <a:p>
             <a:fld id="{828A8F36-A643-4FAA-8649-965D6B1446A9}" type="datetimeFigureOut">
               <a:rPr lang="fr-FR" smtClean="0"/>
-              <a:t>08/01/2026</a:t>
+              <a:t>09/01/2026</a:t>
             </a:fld>
             <a:endParaRPr lang="fr-FR"/>
           </a:p>
@@ -403,7 +403,7 @@
           <a:p>
             <a:fld id="{2456FC83-ED93-4984-B7AA-3DB9F84FF409}" type="datetimeFigureOut">
               <a:rPr lang="fr-FR" smtClean="0"/>
-              <a:t>08/01/2026</a:t>
+              <a:t>09/01/2026</a:t>
             </a:fld>
             <a:endParaRPr lang="fr-FR"/>
           </a:p>
@@ -2711,7 +2711,7 @@
           <a:p>
             <a:fld id="{06137112-888A-40C4-BD31-96BD10D39A6F}" type="datetimeFigureOut">
               <a:rPr lang="fr-CH" smtClean="0"/>
-              <a:t>08.01.2026</a:t>
+              <a:t>09.01.2026</a:t>
             </a:fld>
             <a:endParaRPr lang="fr-CH"/>
           </a:p>
@@ -2911,7 +2911,7 @@
           <a:p>
             <a:fld id="{06137112-888A-40C4-BD31-96BD10D39A6F}" type="datetimeFigureOut">
               <a:rPr lang="fr-CH" smtClean="0"/>
-              <a:t>08.01.2026</a:t>
+              <a:t>09.01.2026</a:t>
             </a:fld>
             <a:endParaRPr lang="fr-CH"/>
           </a:p>
@@ -3121,7 +3121,7 @@
           <a:p>
             <a:fld id="{06137112-888A-40C4-BD31-96BD10D39A6F}" type="datetimeFigureOut">
               <a:rPr lang="fr-CH" smtClean="0"/>
-              <a:t>08.01.2026</a:t>
+              <a:t>09.01.2026</a:t>
             </a:fld>
             <a:endParaRPr lang="fr-CH"/>
           </a:p>
@@ -3321,7 +3321,7 @@
           <a:p>
             <a:fld id="{06137112-888A-40C4-BD31-96BD10D39A6F}" type="datetimeFigureOut">
               <a:rPr lang="fr-CH" smtClean="0"/>
-              <a:t>08.01.2026</a:t>
+              <a:t>09.01.2026</a:t>
             </a:fld>
             <a:endParaRPr lang="fr-CH"/>
           </a:p>
@@ -3597,7 +3597,7 @@
           <a:p>
             <a:fld id="{06137112-888A-40C4-BD31-96BD10D39A6F}" type="datetimeFigureOut">
               <a:rPr lang="fr-CH" smtClean="0"/>
-              <a:t>08.01.2026</a:t>
+              <a:t>09.01.2026</a:t>
             </a:fld>
             <a:endParaRPr lang="fr-CH"/>
           </a:p>
@@ -3865,7 +3865,7 @@
           <a:p>
             <a:fld id="{06137112-888A-40C4-BD31-96BD10D39A6F}" type="datetimeFigureOut">
               <a:rPr lang="fr-CH" smtClean="0"/>
-              <a:t>08.01.2026</a:t>
+              <a:t>09.01.2026</a:t>
             </a:fld>
             <a:endParaRPr lang="fr-CH"/>
           </a:p>
@@ -4280,7 +4280,7 @@
           <a:p>
             <a:fld id="{06137112-888A-40C4-BD31-96BD10D39A6F}" type="datetimeFigureOut">
               <a:rPr lang="fr-CH" smtClean="0"/>
-              <a:t>08.01.2026</a:t>
+              <a:t>09.01.2026</a:t>
             </a:fld>
             <a:endParaRPr lang="fr-CH"/>
           </a:p>
@@ -4422,7 +4422,7 @@
           <a:p>
             <a:fld id="{06137112-888A-40C4-BD31-96BD10D39A6F}" type="datetimeFigureOut">
               <a:rPr lang="fr-CH" smtClean="0"/>
-              <a:t>08.01.2026</a:t>
+              <a:t>09.01.2026</a:t>
             </a:fld>
             <a:endParaRPr lang="fr-CH"/>
           </a:p>
@@ -4535,7 +4535,7 @@
           <a:p>
             <a:fld id="{06137112-888A-40C4-BD31-96BD10D39A6F}" type="datetimeFigureOut">
               <a:rPr lang="fr-CH" smtClean="0"/>
-              <a:t>08.01.2026</a:t>
+              <a:t>09.01.2026</a:t>
             </a:fld>
             <a:endParaRPr lang="fr-CH"/>
           </a:p>
@@ -4848,7 +4848,7 @@
           <a:p>
             <a:fld id="{06137112-888A-40C4-BD31-96BD10D39A6F}" type="datetimeFigureOut">
               <a:rPr lang="fr-CH" smtClean="0"/>
-              <a:t>08.01.2026</a:t>
+              <a:t>09.01.2026</a:t>
             </a:fld>
             <a:endParaRPr lang="fr-CH"/>
           </a:p>
@@ -5137,7 +5137,7 @@
           <a:p>
             <a:fld id="{06137112-888A-40C4-BD31-96BD10D39A6F}" type="datetimeFigureOut">
               <a:rPr lang="fr-CH" smtClean="0"/>
-              <a:t>08.01.2026</a:t>
+              <a:t>09.01.2026</a:t>
             </a:fld>
             <a:endParaRPr lang="fr-CH"/>
           </a:p>
@@ -5389,7 +5389,7 @@
           <a:p>
             <a:fld id="{06137112-888A-40C4-BD31-96BD10D39A6F}" type="datetimeFigureOut">
               <a:rPr lang="fr-CH" smtClean="0"/>
-              <a:t>08.01.2026</a:t>
+              <a:t>09.01.2026</a:t>
             </a:fld>
             <a:endParaRPr lang="fr-CH"/>
           </a:p>
@@ -7038,10 +7038,142 @@
       </p:pic>
       <p:sp>
         <p:nvSpPr>
-          <p:cNvPr id="3" name="ZoneTexte 2">
+          <p:cNvPr id="5" name="ZoneTexte 4">
             <a:extLst>
               <a:ext uri="{FF2B5EF4-FFF2-40B4-BE49-F238E27FC236}">
-                <a16:creationId xmlns:a16="http://schemas.microsoft.com/office/drawing/2014/main" id="{918438DF-CFE4-0C70-9420-BB7A63517DE3}"/>
+                <a16:creationId xmlns:a16="http://schemas.microsoft.com/office/drawing/2014/main" id="{2CB5A18A-EC49-39DD-5997-CB93F495AEEA}"/>
+              </a:ext>
+            </a:extLst>
+          </p:cNvPr>
+          <p:cNvSpPr txBox="1"/>
+          <p:nvPr/>
+        </p:nvSpPr>
+        <p:spPr>
+          <a:xfrm>
+            <a:off x="453494" y="870500"/>
+            <a:ext cx="10062106" cy="461665"/>
+          </a:xfrm>
+          <a:prstGeom prst="rect">
+            <a:avLst/>
+          </a:prstGeom>
+          <a:noFill/>
+        </p:spPr>
+        <p:txBody>
+          <a:bodyPr wrap="square" rtlCol="0">
+            <a:spAutoFit/>
+          </a:bodyPr>
+          <a:lstStyle/>
+          <a:p>
+            <a:r>
+              <a:rPr lang="fr-CH" sz="2400" b="1" dirty="0"/>
+              <a:t>Perspectives d’évolution</a:t>
+            </a:r>
+          </a:p>
+        </p:txBody>
+      </p:sp>
+      <p:sp>
+        <p:nvSpPr>
+          <p:cNvPr id="4" name="ZoneTexte 3">
+            <a:extLst>
+              <a:ext uri="{FF2B5EF4-FFF2-40B4-BE49-F238E27FC236}">
+                <a16:creationId xmlns:a16="http://schemas.microsoft.com/office/drawing/2014/main" id="{9325492F-2021-6352-249B-1E2D77AEE164}"/>
+              </a:ext>
+            </a:extLst>
+          </p:cNvPr>
+          <p:cNvSpPr txBox="1"/>
+          <p:nvPr/>
+        </p:nvSpPr>
+        <p:spPr>
+          <a:xfrm>
+            <a:off x="384037" y="1594131"/>
+            <a:ext cx="10131563" cy="2308324"/>
+          </a:xfrm>
+          <a:prstGeom prst="rect">
+            <a:avLst/>
+          </a:prstGeom>
+          <a:noFill/>
+        </p:spPr>
+        <p:txBody>
+          <a:bodyPr wrap="square" rtlCol="0">
+            <a:spAutoFit/>
+          </a:bodyPr>
+          <a:lstStyle/>
+          <a:p>
+            <a:pPr marL="342900" indent="-342900">
+              <a:buFont typeface="Wingdings" panose="05000000000000000000" pitchFamily="2" charset="2"/>
+              <a:buChar char="q"/>
+            </a:pPr>
+            <a:r>
+              <a:rPr lang="fr-CH" sz="2400" b="1" dirty="0"/>
+              <a:t>Amélioration du flux de données</a:t>
+            </a:r>
+          </a:p>
+          <a:p>
+            <a:pPr marL="342900" indent="-342900">
+              <a:buFont typeface="Wingdings" panose="05000000000000000000" pitchFamily="2" charset="2"/>
+              <a:buChar char="q"/>
+            </a:pPr>
+            <a:r>
+              <a:rPr lang="fr-CH" sz="2400" b="1" dirty="0"/>
+              <a:t>Plus de widgets/capteurs</a:t>
+            </a:r>
+          </a:p>
+          <a:p>
+            <a:pPr marL="342900" indent="-342900">
+              <a:buFont typeface="Wingdings" panose="05000000000000000000" pitchFamily="2" charset="2"/>
+              <a:buChar char="q"/>
+            </a:pPr>
+            <a:r>
+              <a:rPr lang="fr-CH" sz="2400" b="1" dirty="0"/>
+              <a:t>Plus d’interactions avec les widgets</a:t>
+            </a:r>
+          </a:p>
+          <a:p>
+            <a:pPr marL="342900" indent="-342900">
+              <a:buFont typeface="Wingdings" panose="05000000000000000000" pitchFamily="2" charset="2"/>
+              <a:buChar char="q"/>
+            </a:pPr>
+            <a:r>
+              <a:rPr lang="fr-CH" sz="2400" b="1" dirty="0"/>
+              <a:t>Extension des fonctionnalités temps réel</a:t>
+            </a:r>
+          </a:p>
+          <a:p>
+            <a:pPr marL="342900" indent="-342900">
+              <a:buFont typeface="Wingdings" panose="05000000000000000000" pitchFamily="2" charset="2"/>
+              <a:buChar char="q"/>
+            </a:pPr>
+            <a:r>
+              <a:rPr lang="fr-CH" sz="2400" b="1" dirty="0"/>
+              <a:t>Mode hors‑ligne / reprise automatique après coupure réseau</a:t>
+            </a:r>
+          </a:p>
+          <a:p>
+            <a:pPr marL="342900" indent="-342900">
+              <a:buFont typeface="Wingdings" panose="05000000000000000000" pitchFamily="2" charset="2"/>
+              <a:buChar char="q"/>
+            </a:pPr>
+            <a:r>
+              <a:rPr lang="fr-CH" sz="2400" b="1" dirty="0"/>
+              <a:t>Historique et visualisation des données (replay, graphiques, </a:t>
+            </a:r>
+            <a:r>
+              <a:rPr lang="fr-CH" sz="2400" b="1" dirty="0" err="1"/>
+              <a:t>heatmaps</a:t>
+            </a:r>
+            <a:r>
+              <a:rPr lang="fr-CH" sz="2400" b="1" dirty="0"/>
+              <a:t>)</a:t>
+            </a:r>
+          </a:p>
+        </p:txBody>
+      </p:sp>
+      <p:sp>
+        <p:nvSpPr>
+          <p:cNvPr id="2" name="ZoneTexte 1">
+            <a:extLst>
+              <a:ext uri="{FF2B5EF4-FFF2-40B4-BE49-F238E27FC236}">
+                <a16:creationId xmlns:a16="http://schemas.microsoft.com/office/drawing/2014/main" id="{B3B5DD11-124E-EA38-82D8-B70345546169}"/>
               </a:ext>
             </a:extLst>
           </p:cNvPr>
@@ -7067,146 +7199,14 @@
             <a:pPr algn="r"/>
             <a:r>
               <a:rPr lang="fr-CH" sz="1400" dirty="0"/>
-              <a:t>CAS-DAW Projet format du web</a:t>
+              <a:t>CAS-DAW Projet JavaScript</a:t>
             </a:r>
             <a:br>
               <a:rPr lang="fr-CH" sz="1400" dirty="0"/>
             </a:br>
             <a:r>
               <a:rPr lang="fr-CH" sz="1400" dirty="0"/>
-              <a:t>Dolci Marco/06.11.2025</a:t>
-            </a:r>
-          </a:p>
-        </p:txBody>
-      </p:sp>
-      <p:sp>
-        <p:nvSpPr>
-          <p:cNvPr id="5" name="ZoneTexte 4">
-            <a:extLst>
-              <a:ext uri="{FF2B5EF4-FFF2-40B4-BE49-F238E27FC236}">
-                <a16:creationId xmlns:a16="http://schemas.microsoft.com/office/drawing/2014/main" id="{2CB5A18A-EC49-39DD-5997-CB93F495AEEA}"/>
-              </a:ext>
-            </a:extLst>
-          </p:cNvPr>
-          <p:cNvSpPr txBox="1"/>
-          <p:nvPr/>
-        </p:nvSpPr>
-        <p:spPr>
-          <a:xfrm>
-            <a:off x="453494" y="870500"/>
-            <a:ext cx="10062106" cy="461665"/>
-          </a:xfrm>
-          <a:prstGeom prst="rect">
-            <a:avLst/>
-          </a:prstGeom>
-          <a:noFill/>
-        </p:spPr>
-        <p:txBody>
-          <a:bodyPr wrap="square" rtlCol="0">
-            <a:spAutoFit/>
-          </a:bodyPr>
-          <a:lstStyle/>
-          <a:p>
-            <a:r>
-              <a:rPr lang="fr-CH" sz="2400" b="1" dirty="0"/>
-              <a:t>Perspectives d’évolution</a:t>
-            </a:r>
-          </a:p>
-        </p:txBody>
-      </p:sp>
-      <p:sp>
-        <p:nvSpPr>
-          <p:cNvPr id="4" name="ZoneTexte 3">
-            <a:extLst>
-              <a:ext uri="{FF2B5EF4-FFF2-40B4-BE49-F238E27FC236}">
-                <a16:creationId xmlns:a16="http://schemas.microsoft.com/office/drawing/2014/main" id="{9325492F-2021-6352-249B-1E2D77AEE164}"/>
-              </a:ext>
-            </a:extLst>
-          </p:cNvPr>
-          <p:cNvSpPr txBox="1"/>
-          <p:nvPr/>
-        </p:nvSpPr>
-        <p:spPr>
-          <a:xfrm>
-            <a:off x="384037" y="1594131"/>
-            <a:ext cx="10131563" cy="2308324"/>
-          </a:xfrm>
-          <a:prstGeom prst="rect">
-            <a:avLst/>
-          </a:prstGeom>
-          <a:noFill/>
-        </p:spPr>
-        <p:txBody>
-          <a:bodyPr wrap="square" rtlCol="0">
-            <a:spAutoFit/>
-          </a:bodyPr>
-          <a:lstStyle/>
-          <a:p>
-            <a:pPr marL="342900" indent="-342900">
-              <a:buFont typeface="Wingdings" panose="05000000000000000000" pitchFamily="2" charset="2"/>
-              <a:buChar char="q"/>
-            </a:pPr>
-            <a:r>
-              <a:rPr lang="fr-CH" sz="2400" b="1" dirty="0"/>
-              <a:t>Amélioration du flux de données</a:t>
-            </a:r>
-          </a:p>
-          <a:p>
-            <a:pPr marL="342900" indent="-342900">
-              <a:buFont typeface="Wingdings" panose="05000000000000000000" pitchFamily="2" charset="2"/>
-              <a:buChar char="q"/>
-            </a:pPr>
-            <a:r>
-              <a:rPr lang="fr-CH" sz="2400" b="1" dirty="0"/>
-              <a:t>Plus de widgets/capteurs</a:t>
-            </a:r>
-          </a:p>
-          <a:p>
-            <a:pPr marL="342900" indent="-342900">
-              <a:buFont typeface="Wingdings" panose="05000000000000000000" pitchFamily="2" charset="2"/>
-              <a:buChar char="q"/>
-            </a:pPr>
-            <a:r>
-              <a:rPr lang="fr-CH" sz="2400" b="1" dirty="0"/>
-              <a:t>Plus d’interactions avec les widgets</a:t>
-            </a:r>
-          </a:p>
-          <a:p>
-            <a:pPr marL="342900" indent="-342900">
-              <a:buFont typeface="Wingdings" panose="05000000000000000000" pitchFamily="2" charset="2"/>
-              <a:buChar char="q"/>
-            </a:pPr>
-            <a:r>
-              <a:rPr lang="fr-CH" sz="2400" b="1" dirty="0"/>
-              <a:t>Extension des fonctionnalités temps réel</a:t>
-            </a:r>
-          </a:p>
-          <a:p>
-            <a:pPr marL="342900" indent="-342900">
-              <a:buFont typeface="Wingdings" panose="05000000000000000000" pitchFamily="2" charset="2"/>
-              <a:buChar char="q"/>
-            </a:pPr>
-            <a:r>
-              <a:rPr lang="fr-CH" sz="2400" b="1" dirty="0"/>
-              <a:t>Mode hors‑ligne / reprise automatique après coupure réseau</a:t>
-            </a:r>
-          </a:p>
-          <a:p>
-            <a:pPr marL="342900" indent="-342900">
-              <a:buFont typeface="Wingdings" panose="05000000000000000000" pitchFamily="2" charset="2"/>
-              <a:buChar char="q"/>
-            </a:pPr>
-            <a:r>
-              <a:rPr lang="fr-CH" sz="2400" b="1" dirty="0"/>
-              <a:t>Historique et visualisation des données (replay, graphiques, </a:t>
-            </a:r>
-            <a:r>
-              <a:rPr lang="fr-CH" sz="2400" b="1" dirty="0" err="1"/>
-              <a:t>heatmaps</a:t>
-            </a:r>
-            <a:r>
-              <a:rPr lang="fr-CH" sz="2400" b="1" dirty="0"/>
-              <a:t>)</a:t>
+              <a:t>15.01.2026</a:t>
             </a:r>
           </a:p>
         </p:txBody>
@@ -7247,49 +7247,6 @@
           <a:chExt cx="0" cy="0"/>
         </a:xfrm>
       </p:grpSpPr>
-      <p:sp>
-        <p:nvSpPr>
-          <p:cNvPr id="5" name="ZoneTexte 4">
-            <a:extLst>
-              <a:ext uri="{FF2B5EF4-FFF2-40B4-BE49-F238E27FC236}">
-                <a16:creationId xmlns:a16="http://schemas.microsoft.com/office/drawing/2014/main" id="{24E53EA2-92CB-9513-EDDA-F3177C09E4C9}"/>
-              </a:ext>
-            </a:extLst>
-          </p:cNvPr>
-          <p:cNvSpPr txBox="1"/>
-          <p:nvPr/>
-        </p:nvSpPr>
-        <p:spPr>
-          <a:xfrm>
-            <a:off x="8032750" y="6204155"/>
-            <a:ext cx="4031430" cy="523220"/>
-          </a:xfrm>
-          <a:prstGeom prst="rect">
-            <a:avLst/>
-          </a:prstGeom>
-          <a:noFill/>
-        </p:spPr>
-        <p:txBody>
-          <a:bodyPr wrap="square" rtlCol="0">
-            <a:spAutoFit/>
-          </a:bodyPr>
-          <a:lstStyle/>
-          <a:p>
-            <a:pPr algn="r"/>
-            <a:r>
-              <a:rPr lang="fr-CH" sz="1400" dirty="0"/>
-              <a:t>CAS-DAW Projet format du web</a:t>
-            </a:r>
-            <a:br>
-              <a:rPr lang="fr-CH" sz="1400" dirty="0"/>
-            </a:br>
-            <a:r>
-              <a:rPr lang="fr-CH" sz="1400" dirty="0"/>
-              <a:t>Dolci Marco/06.11.2025</a:t>
-            </a:r>
-          </a:p>
-        </p:txBody>
-      </p:sp>
       <p:pic>
         <p:nvPicPr>
           <p:cNvPr id="2" name="Picture 4" descr="Question Mark Response - Free image on Pixabay - Pixabay">
@@ -7378,6 +7335,49 @@
               <a:t>A disposition pour vos questions</a:t>
             </a:r>
             <a:endParaRPr lang="fr-CH" sz="4400" dirty="0"/>
+          </a:p>
+        </p:txBody>
+      </p:sp>
+      <p:sp>
+        <p:nvSpPr>
+          <p:cNvPr id="4" name="ZoneTexte 3">
+            <a:extLst>
+              <a:ext uri="{FF2B5EF4-FFF2-40B4-BE49-F238E27FC236}">
+                <a16:creationId xmlns:a16="http://schemas.microsoft.com/office/drawing/2014/main" id="{B9B35B95-6803-94D9-CE1A-DE5B55AE28B8}"/>
+              </a:ext>
+            </a:extLst>
+          </p:cNvPr>
+          <p:cNvSpPr txBox="1"/>
+          <p:nvPr/>
+        </p:nvSpPr>
+        <p:spPr>
+          <a:xfrm>
+            <a:off x="8032750" y="6204155"/>
+            <a:ext cx="4031430" cy="523220"/>
+          </a:xfrm>
+          <a:prstGeom prst="rect">
+            <a:avLst/>
+          </a:prstGeom>
+          <a:noFill/>
+        </p:spPr>
+        <p:txBody>
+          <a:bodyPr wrap="square" rtlCol="0">
+            <a:spAutoFit/>
+          </a:bodyPr>
+          <a:lstStyle/>
+          <a:p>
+            <a:pPr algn="r"/>
+            <a:r>
+              <a:rPr lang="fr-CH" sz="1400" dirty="0"/>
+              <a:t>CAS-DAW Projet JavaScript</a:t>
+            </a:r>
+            <a:br>
+              <a:rPr lang="fr-CH" sz="1400" dirty="0"/>
+            </a:br>
+            <a:r>
+              <a:rPr lang="fr-CH" sz="1400" dirty="0"/>
+              <a:t>15.01.2026</a:t>
+            </a:r>
           </a:p>
         </p:txBody>
       </p:sp>

--- a/documents/Presentation_JS.pptx
+++ b/documents/Presentation_JS.pptx
@@ -698,6 +698,13 @@
           </p:nvPr>
         </p:nvSpPr>
         <p:spPr/>
+        <p:txBody>
+          <a:bodyPr/>
+          <a:lstStyle/>
+          <a:p>
+            <a:endParaRPr lang="fr-CH"/>
+          </a:p>
+        </p:txBody>
       </p:sp>
       <p:sp>
         <p:nvSpPr>
@@ -766,7 +773,7 @@
               <a:rPr lang="fr-CH" dirty="0">
                 <a:effectLst/>
               </a:rPr>
-              <a:t>centraliser</a:t>
+              <a:t>- centraliser</a:t>
             </a:r>
           </a:p>
           <a:p>
@@ -775,7 +782,7 @@
               <a:rPr lang="fr-CH" dirty="0">
                 <a:effectLst/>
               </a:rPr>
-              <a:t> visualiser et exploiter les capteurs du téléphone à distance</a:t>
+              <a:t>- visualiser et exploiter les capteurs du téléphone à distance</a:t>
             </a:r>
           </a:p>
           <a:p>
@@ -784,7 +791,7 @@
               <a:rPr lang="fr-CH" dirty="0">
                 <a:effectLst/>
               </a:rPr>
-              <a:t>là où l’observation directe est impossible</a:t>
+              <a:t>- là où l’observation directe est impossible</a:t>
             </a:r>
           </a:p>
         </p:txBody>
@@ -853,6 +860,13 @@
           </p:nvPr>
         </p:nvSpPr>
         <p:spPr/>
+        <p:txBody>
+          <a:bodyPr/>
+          <a:lstStyle/>
+          <a:p>
+            <a:endParaRPr lang="fr-CH"/>
+          </a:p>
+        </p:txBody>
       </p:sp>
       <p:sp>
         <p:nvSpPr>
@@ -1006,6 +1020,13 @@
           </p:nvPr>
         </p:nvSpPr>
         <p:spPr/>
+        <p:txBody>
+          <a:bodyPr/>
+          <a:lstStyle/>
+          <a:p>
+            <a:endParaRPr lang="fr-CH"/>
+          </a:p>
+        </p:txBody>
       </p:sp>
       <p:sp>
         <p:nvSpPr>
@@ -1090,6 +1111,13 @@
           </p:nvPr>
         </p:nvSpPr>
         <p:spPr/>
+        <p:txBody>
+          <a:bodyPr/>
+          <a:lstStyle/>
+          <a:p>
+            <a:endParaRPr lang="fr-CH"/>
+          </a:p>
+        </p:txBody>
       </p:sp>
       <p:sp>
         <p:nvSpPr>
@@ -1123,74 +1151,55 @@
               <a:rPr lang="fr-CH" dirty="0">
                 <a:effectLst/>
               </a:rPr>
-              <a:t>Voici quelques cas concrets où notre solution est utile : </a:t>
-            </a:r>
-          </a:p>
-          <a:p>
-            <a:endParaRPr lang="fr-CH" dirty="0">
-              <a:effectLst/>
-            </a:endParaRPr>
-          </a:p>
-          <a:p>
-            <a:pPr lvl="1">
-              <a:buFont typeface="Arial" panose="020B0604020202020204" pitchFamily="34" charset="0"/>
-              <a:buChar char="•"/>
+              <a:t>Le POURQUOI du projet! 4 cas concrets</a:t>
+            </a:r>
+          </a:p>
+          <a:p>
+            <a:pPr marL="171450" indent="-171450">
+              <a:buFontTx/>
+              <a:buChar char="-"/>
             </a:pPr>
             <a:r>
               <a:rPr lang="fr-CH" dirty="0">
                 <a:effectLst/>
               </a:rPr>
-              <a:t> suivi d’un drone, d’un skieur</a:t>
-            </a:r>
-          </a:p>
-          <a:p>
-            <a:pPr marL="457200" marR="0" lvl="1" indent="0" algn="l" defTabSz="914400" rtl="0" eaLnBrk="1" fontAlgn="auto" latinLnBrk="0" hangingPunct="1">
-              <a:lnSpc>
-                <a:spcPct val="100000"/>
-              </a:lnSpc>
-              <a:spcBef>
-                <a:spcPts val="0"/>
-              </a:spcBef>
-              <a:spcAft>
-                <a:spcPts val="0"/>
-              </a:spcAft>
-              <a:buClrTx/>
-              <a:buSzTx/>
-              <a:buFont typeface="Arial" panose="020B0604020202020204" pitchFamily="34" charset="0"/>
-              <a:buChar char="•"/>
-              <a:tabLst/>
-              <a:defRPr/>
+              <a:t>Le pilote de moto que je ne vois que 10 secondes sur 3minutes</a:t>
+            </a:r>
+          </a:p>
+          <a:p>
+            <a:pPr marL="171450" indent="-171450">
+              <a:buFontTx/>
+              <a:buChar char="-"/>
             </a:pPr>
             <a:r>
               <a:rPr lang="fr-CH" dirty="0">
                 <a:effectLst/>
               </a:rPr>
-              <a:t> d’un parapentiste</a:t>
-            </a:r>
-          </a:p>
-          <a:p>
-            <a:pPr marL="457200" marR="0" lvl="1" indent="0" algn="l" defTabSz="914400" rtl="0" eaLnBrk="1" fontAlgn="auto" latinLnBrk="0" hangingPunct="1">
-              <a:lnSpc>
-                <a:spcPct val="100000"/>
-              </a:lnSpc>
-              <a:spcBef>
-                <a:spcPts val="0"/>
-              </a:spcBef>
-              <a:spcAft>
-                <a:spcPts val="0"/>
-              </a:spcAft>
-              <a:buClrTx/>
-              <a:buSzTx/>
-              <a:buFont typeface="Arial" panose="020B0604020202020204" pitchFamily="34" charset="0"/>
-              <a:buChar char="•"/>
-              <a:tabLst/>
-              <a:defRPr/>
+              <a:t>Le parapentiste remorqué que je ne retrouve plus une fois atterri</a:t>
+            </a:r>
+          </a:p>
+          <a:p>
+            <a:pPr marL="171450" indent="-171450">
+              <a:buFontTx/>
+              <a:buChar char="-"/>
             </a:pPr>
             <a:r>
               <a:rPr lang="fr-CH" dirty="0">
                 <a:effectLst/>
               </a:rPr>
-              <a:t> d’un bateau en mer</a:t>
+              <a:t>Le skipper parti en mer pendant plusieurs semaines sans nouvelle</a:t>
+            </a:r>
+          </a:p>
+          <a:p>
+            <a:pPr marL="171450" indent="-171450">
+              <a:buFontTx/>
+              <a:buChar char="-"/>
+            </a:pPr>
+            <a:r>
+              <a:rPr lang="fr-CH" dirty="0">
+                <a:effectLst/>
+              </a:rPr>
+              <a:t>Le skieur que je souhaite retrouver pour partager un verre à la buvette</a:t>
             </a:r>
           </a:p>
           <a:p>
@@ -1273,6 +1282,13 @@
           </p:nvPr>
         </p:nvSpPr>
         <p:spPr/>
+        <p:txBody>
+          <a:bodyPr/>
+          <a:lstStyle/>
+          <a:p>
+            <a:endParaRPr lang="fr-CH"/>
+          </a:p>
+        </p:txBody>
       </p:sp>
       <p:sp>
         <p:nvSpPr>
@@ -1338,19 +1354,7 @@
               <a:rPr lang="fr-CH" dirty="0">
                 <a:effectLst/>
               </a:rPr>
-              <a:t>		— sont envoyées via </a:t>
-            </a:r>
-            <a:r>
-              <a:rPr lang="fr-CH" dirty="0" err="1">
-                <a:effectLst/>
-              </a:rPr>
-              <a:t>WebSocket</a:t>
-            </a:r>
-            <a:r>
-              <a:rPr lang="fr-CH" dirty="0">
-                <a:effectLst/>
-              </a:rPr>
-              <a:t> à notre serveur Node.js hébergé sur Render.com.. </a:t>
+              <a:t>		— sont envoyées via WebSocket à notre serveur Node.js hébergé sur Render.com.. </a:t>
             </a:r>
           </a:p>
           <a:p>
@@ -1448,6 +1452,13 @@
           </p:nvPr>
         </p:nvSpPr>
         <p:spPr/>
+        <p:txBody>
+          <a:bodyPr/>
+          <a:lstStyle/>
+          <a:p>
+            <a:endParaRPr lang="fr-CH"/>
+          </a:p>
+        </p:txBody>
       </p:sp>
       <p:sp>
         <p:nvSpPr>
@@ -1494,19 +1505,7 @@
               <a:rPr lang="fr-CH" dirty="0">
                 <a:effectLst/>
               </a:rPr>
-              <a:t>Le smartphone envoie ses données capteurs via </a:t>
-            </a:r>
-            <a:r>
-              <a:rPr lang="fr-CH" dirty="0" err="1">
-                <a:effectLst/>
-              </a:rPr>
-              <a:t>WebSocket</a:t>
-            </a:r>
-            <a:r>
-              <a:rPr lang="fr-CH" dirty="0">
-                <a:effectLst/>
-              </a:rPr>
-              <a:t> à un serveur Node.js hébergé sur Render.com. </a:t>
+              <a:t>Le smartphone envoie ses données capteurs via WebSocket à un serveur Node.js hébergé sur Render.com. </a:t>
             </a:r>
           </a:p>
           <a:p>
@@ -1520,6 +1519,32 @@
                 <a:effectLst/>
               </a:rPr>
               <a:t>Ce serveur les transmet ensuite à notre interface cockpit, qui les affiche en temps réel sous forme de widgets visuels.</a:t>
+            </a:r>
+          </a:p>
+          <a:p>
+            <a:endParaRPr lang="fr-CH" dirty="0">
+              <a:effectLst/>
+            </a:endParaRPr>
+          </a:p>
+          <a:p>
+            <a:r>
+              <a:rPr lang="fr-CH" dirty="0">
+                <a:effectLst/>
+              </a:rPr>
+              <a:t>Certain widgets utilisent des API</a:t>
+            </a:r>
+          </a:p>
+          <a:p>
+            <a:endParaRPr lang="fr-CH" dirty="0">
+              <a:effectLst/>
+            </a:endParaRPr>
+          </a:p>
+          <a:p>
+            <a:r>
+              <a:rPr lang="fr-CH" dirty="0">
+                <a:effectLst/>
+              </a:rPr>
+              <a:t>Le flux vidéo passe par WebRTC (pas de latence)</a:t>
             </a:r>
           </a:p>
           <a:p>
@@ -1591,6 +1616,13 @@
           </p:nvPr>
         </p:nvSpPr>
         <p:spPr/>
+        <p:txBody>
+          <a:bodyPr/>
+          <a:lstStyle/>
+          <a:p>
+            <a:endParaRPr lang="fr-CH"/>
+          </a:p>
+        </p:txBody>
       </p:sp>
       <p:sp>
         <p:nvSpPr>
@@ -1653,17 +1685,8 @@
               <a:rPr lang="fr-CH" dirty="0">
                 <a:effectLst/>
               </a:rPr>
-              <a:t> server/ gère les connexions </a:t>
-            </a:r>
-            <a:r>
-              <a:rPr lang="fr-CH" dirty="0" err="1">
-                <a:effectLst/>
-              </a:rPr>
-              <a:t>WebSocket</a:t>
-            </a:r>
-            <a:endParaRPr lang="fr-CH" dirty="0">
-              <a:effectLst/>
-            </a:endParaRPr>
+              <a:t> server/ gère les connexions WebSocket</a:t>
+            </a:r>
           </a:p>
           <a:p>
             <a:pPr lvl="1">
@@ -1758,6 +1781,13 @@
           </p:nvPr>
         </p:nvSpPr>
         <p:spPr/>
+        <p:txBody>
+          <a:bodyPr/>
+          <a:lstStyle/>
+          <a:p>
+            <a:endParaRPr lang="fr-CH"/>
+          </a:p>
+        </p:txBody>
       </p:sp>
       <p:sp>
         <p:nvSpPr>
@@ -1808,19 +1838,7 @@
               <a:rPr lang="fr-CH" dirty="0">
                 <a:effectLst/>
               </a:rPr>
-              <a:t> </a:t>
-            </a:r>
-            <a:r>
-              <a:rPr lang="fr-CH" dirty="0" err="1">
-                <a:effectLst/>
-              </a:rPr>
-              <a:t>WebSocket</a:t>
-            </a:r>
-            <a:r>
-              <a:rPr lang="fr-CH" dirty="0">
-                <a:effectLst/>
-              </a:rPr>
-              <a:t> pour le flux temps réel</a:t>
+              <a:t> WebSocket pour le flux temps réel</a:t>
             </a:r>
           </a:p>
           <a:p>
@@ -1832,19 +1850,7 @@
               <a:rPr lang="fr-CH" dirty="0">
                 <a:effectLst/>
               </a:rPr>
-              <a:t> </a:t>
-            </a:r>
-            <a:r>
-              <a:rPr lang="fr-CH" dirty="0" err="1">
-                <a:effectLst/>
-              </a:rPr>
-              <a:t>WebRTC</a:t>
-            </a:r>
-            <a:r>
-              <a:rPr lang="fr-CH" dirty="0">
-                <a:effectLst/>
-              </a:rPr>
-              <a:t> pour le streaming vidéo</a:t>
+              <a:t> WebRTC pour le streaming vidéo</a:t>
             </a:r>
           </a:p>
           <a:p>
@@ -1940,6 +1946,13 @@
           </p:nvPr>
         </p:nvSpPr>
         <p:spPr/>
+        <p:txBody>
+          <a:bodyPr/>
+          <a:lstStyle/>
+          <a:p>
+            <a:endParaRPr lang="fr-CH"/>
+          </a:p>
+        </p:txBody>
       </p:sp>
       <p:sp>
         <p:nvSpPr>
@@ -2207,6 +2220,13 @@
           </p:nvPr>
         </p:nvSpPr>
         <p:spPr/>
+        <p:txBody>
+          <a:bodyPr/>
+          <a:lstStyle/>
+          <a:p>
+            <a:endParaRPr lang="fr-CH"/>
+          </a:p>
+        </p:txBody>
       </p:sp>
       <p:sp>
         <p:nvSpPr>
@@ -2292,13 +2312,7 @@
               <a:rPr lang="fr-CH" b="1" dirty="0">
                 <a:effectLst/>
               </a:rPr>
-              <a:t>transmission en temps réel via </a:t>
-            </a:r>
-            <a:r>
-              <a:rPr lang="fr-CH" b="1" dirty="0" err="1">
-                <a:effectLst/>
-              </a:rPr>
-              <a:t>WebSocket</a:t>
+              <a:t>transmission en temps réel via WebSocket</a:t>
             </a:r>
             <a:r>
               <a:rPr lang="fr-CH" dirty="0"/>
@@ -2413,6 +2427,13 @@
           </p:nvPr>
         </p:nvSpPr>
         <p:spPr/>
+        <p:txBody>
+          <a:bodyPr/>
+          <a:lstStyle/>
+          <a:p>
+            <a:endParaRPr lang="fr-CH"/>
+          </a:p>
+        </p:txBody>
       </p:sp>
       <p:sp>
         <p:nvSpPr>
@@ -2482,31 +2503,7 @@
               <a:rPr lang="fr-CH" dirty="0">
                 <a:effectLst/>
               </a:rPr>
-              <a:t> de découvrir </a:t>
-            </a:r>
-            <a:r>
-              <a:rPr lang="fr-CH" dirty="0" err="1">
-                <a:effectLst/>
-              </a:rPr>
-              <a:t>WebSocket</a:t>
-            </a:r>
-            <a:r>
-              <a:rPr lang="fr-CH" dirty="0">
-                <a:effectLst/>
-              </a:rPr>
-              <a:t>, </a:t>
-            </a:r>
-            <a:r>
-              <a:rPr lang="fr-CH" dirty="0" err="1">
-                <a:effectLst/>
-              </a:rPr>
-              <a:t>WebRTC</a:t>
-            </a:r>
-            <a:r>
-              <a:rPr lang="fr-CH" dirty="0">
-                <a:effectLst/>
-              </a:rPr>
-              <a:t>, Node.js, Render.com</a:t>
+              <a:t> de découvrir WebSocket, WebRTC, Node.js, Render.com</a:t>
             </a:r>
           </a:p>
           <a:p>
@@ -6444,13 +6441,8 @@
             </a:r>
             <a:r>
               <a:rPr lang="fr-CH" sz="2400" b="1" dirty="0"/>
-              <a:t>Points positifs du projet </a:t>
-            </a:r>
-            <a:r>
-              <a:rPr lang="fr-CH" sz="2400" b="1" dirty="0" err="1"/>
-              <a:t>SmartCockpit</a:t>
-            </a:r>
-            <a:endParaRPr lang="fr-CH" sz="2400" b="1" dirty="0"/>
+              <a:t>Points positifs du projet</a:t>
+            </a:r>
           </a:p>
         </p:txBody>
       </p:sp>
@@ -6468,8 +6460,8 @@
         </p:nvSpPr>
         <p:spPr>
           <a:xfrm>
-            <a:off x="236693" y="1866178"/>
-            <a:ext cx="5464553" cy="3662541"/>
+            <a:off x="236693" y="1720905"/>
+            <a:ext cx="5464553" cy="1692771"/>
           </a:xfrm>
           <a:prstGeom prst="rect">
             <a:avLst/>
@@ -6490,9 +6482,9 @@
             </a:r>
           </a:p>
           <a:p>
-            <a:pPr lvl="1">
-              <a:buFont typeface="Arial" panose="020B0604020202020204" pitchFamily="34" charset="0"/>
-              <a:buChar char="•"/>
+            <a:pPr marL="800100" lvl="1" indent="-342900">
+              <a:buFont typeface="Wingdings" panose="05000000000000000000" pitchFamily="2" charset="2"/>
+              <a:buChar char="§"/>
             </a:pPr>
             <a:r>
               <a:rPr lang="fr-CH" sz="2000" dirty="0">
@@ -6502,42 +6494,22 @@
             </a:r>
           </a:p>
           <a:p>
-            <a:pPr lvl="1">
-              <a:buFont typeface="Arial" panose="020B0604020202020204" pitchFamily="34" charset="0"/>
-              <a:buChar char="•"/>
+            <a:pPr marL="800100" lvl="1" indent="-342900">
+              <a:buFont typeface="Wingdings" panose="05000000000000000000" pitchFamily="2" charset="2"/>
+              <a:buChar char="§"/>
             </a:pPr>
             <a:r>
               <a:rPr lang="fr-CH" sz="2000" dirty="0">
                 <a:effectLst/>
               </a:rPr>
-              <a:t>Web Audio API, </a:t>
-            </a:r>
-            <a:r>
-              <a:rPr lang="fr-CH" sz="2000" dirty="0" err="1">
-                <a:effectLst/>
-              </a:rPr>
-              <a:t>WebRTC</a:t>
-            </a:r>
-            <a:r>
-              <a:rPr lang="fr-CH" sz="2000" dirty="0">
-                <a:effectLst/>
-              </a:rPr>
-              <a:t>, </a:t>
-            </a:r>
-            <a:r>
-              <a:rPr lang="fr-CH" sz="2000" dirty="0" err="1">
-                <a:effectLst/>
-              </a:rPr>
-              <a:t>WebSocket</a:t>
-            </a:r>
-            <a:endParaRPr lang="fr-CH" sz="2000" dirty="0">
-              <a:effectLst/>
-            </a:endParaRPr>
-          </a:p>
-          <a:p>
-            <a:pPr lvl="1">
-              <a:buFont typeface="Arial" panose="020B0604020202020204" pitchFamily="34" charset="0"/>
-              <a:buChar char="•"/>
+              <a:t>Web Audio API, WebRTC, WebSocket</a:t>
+            </a:r>
+            <a:endParaRPr lang="fr-CH" sz="2000" dirty="0"/>
+          </a:p>
+          <a:p>
+            <a:pPr marL="800100" lvl="1" indent="-342900">
+              <a:buFont typeface="Wingdings" panose="05000000000000000000" pitchFamily="2" charset="2"/>
+              <a:buChar char="§"/>
             </a:pPr>
             <a:r>
               <a:rPr lang="fr-CH" sz="2000" dirty="0">
@@ -6559,9 +6531,9 @@
             </a:r>
           </a:p>
           <a:p>
-            <a:pPr lvl="1">
-              <a:buFont typeface="Arial" panose="020B0604020202020204" pitchFamily="34" charset="0"/>
-              <a:buChar char="•"/>
+            <a:pPr marL="800100" lvl="1" indent="-342900">
+              <a:buFont typeface="Wingdings" panose="05000000000000000000" pitchFamily="2" charset="2"/>
+              <a:buChar char="§"/>
             </a:pPr>
             <a:r>
               <a:rPr lang="fr-CH" sz="2000" dirty="0">
@@ -6570,67 +6542,6 @@
               <a:t>Interfaces dynamiques et interactives</a:t>
             </a:r>
           </a:p>
-          <a:p>
-            <a:endParaRPr lang="fr-CH" sz="2400" b="1" dirty="0">
-              <a:effectLst/>
-            </a:endParaRPr>
-          </a:p>
-          <a:p>
-            <a:r>
-              <a:rPr lang="fr-CH" sz="2400" b="1" dirty="0">
-                <a:effectLst/>
-              </a:rPr>
-              <a:t>🤝 Collaboration efficace</a:t>
-            </a:r>
-          </a:p>
-          <a:p>
-            <a:pPr lvl="1">
-              <a:buFont typeface="Arial" panose="020B0604020202020204" pitchFamily="34" charset="0"/>
-              <a:buChar char="•"/>
-            </a:pPr>
-            <a:r>
-              <a:rPr lang="fr-CH" sz="2000" dirty="0">
-                <a:effectLst/>
-              </a:rPr>
-              <a:t>Répartition claire des rôles</a:t>
-            </a:r>
-          </a:p>
-          <a:p>
-            <a:pPr lvl="1">
-              <a:buFont typeface="Arial" panose="020B0604020202020204" pitchFamily="34" charset="0"/>
-              <a:buChar char="•"/>
-            </a:pPr>
-            <a:r>
-              <a:rPr lang="fr-CH" sz="2000" dirty="0">
-                <a:effectLst/>
-              </a:rPr>
-              <a:t>Intégration UI, réseau, capteurs, backend</a:t>
-            </a:r>
-          </a:p>
-          <a:p>
-            <a:pPr lvl="1">
-              <a:buFont typeface="Arial" panose="020B0604020202020204" pitchFamily="34" charset="0"/>
-              <a:buChar char="•"/>
-            </a:pPr>
-            <a:r>
-              <a:rPr lang="fr-CH" sz="2000" dirty="0">
-                <a:effectLst/>
-              </a:rPr>
-              <a:t>Communication fluide et régulière</a:t>
-            </a:r>
-          </a:p>
-          <a:p>
-            <a:pPr lvl="1">
-              <a:buFont typeface="Arial" panose="020B0604020202020204" pitchFamily="34" charset="0"/>
-              <a:buChar char="•"/>
-            </a:pPr>
-            <a:r>
-              <a:rPr lang="fr-CH" sz="2000" dirty="0">
-                <a:effectLst/>
-              </a:rPr>
-              <a:t>Travail sur un projet complexe multi‑modules</a:t>
-            </a:r>
-          </a:p>
         </p:txBody>
       </p:sp>
       <p:sp>
@@ -6647,8 +6558,8 @@
         </p:nvSpPr>
         <p:spPr>
           <a:xfrm>
-            <a:off x="5341470" y="1532532"/>
-            <a:ext cx="6613837" cy="4524315"/>
+            <a:off x="5578163" y="1720905"/>
+            <a:ext cx="6613837" cy="2000548"/>
           </a:xfrm>
           <a:prstGeom prst="rect">
             <a:avLst/>
@@ -6669,87 +6580,52 @@
             </a:r>
           </a:p>
           <a:p>
-            <a:pPr lvl="2">
-              <a:buFont typeface="Arial" panose="020B0604020202020204" pitchFamily="34" charset="0"/>
-              <a:buChar char="•"/>
+            <a:pPr marL="342900" indent="-342900">
+              <a:buFont typeface="Wingdings" panose="05000000000000000000" pitchFamily="2" charset="2"/>
+              <a:buChar char="§"/>
             </a:pPr>
-            <a:r>
-              <a:rPr lang="fr-CH" sz="2000" b="1" dirty="0" err="1">
-                <a:effectLst/>
-              </a:rPr>
-              <a:t>WebSocket</a:t>
-            </a:r>
             <a:r>
               <a:rPr lang="fr-CH" sz="2000" dirty="0">
                 <a:effectLst/>
               </a:rPr>
-              <a:t> : bidirectionnel, robuste, capteurs en temps réel</a:t>
-            </a:r>
-          </a:p>
-          <a:p>
-            <a:pPr lvl="2">
-              <a:buFont typeface="Arial" panose="020B0604020202020204" pitchFamily="34" charset="0"/>
-              <a:buChar char="•"/>
+              <a:t>WebSocket : bidirectionnel, robuste, capteurs en temps réel</a:t>
+            </a:r>
+          </a:p>
+          <a:p>
+            <a:pPr marL="342900" indent="-342900">
+              <a:buFont typeface="Wingdings" panose="05000000000000000000" pitchFamily="2" charset="2"/>
+              <a:buChar char="§"/>
             </a:pPr>
-            <a:r>
-              <a:rPr lang="fr-CH" sz="2000" b="1" dirty="0" err="1">
-                <a:effectLst/>
-              </a:rPr>
-              <a:t>WebRTC</a:t>
-            </a:r>
             <a:r>
               <a:rPr lang="fr-CH" sz="2000" dirty="0">
                 <a:effectLst/>
               </a:rPr>
-              <a:t> : streaming vidéo, ICE, négociation</a:t>
-            </a:r>
-          </a:p>
-          <a:p>
-            <a:pPr lvl="2">
-              <a:buFont typeface="Arial" panose="020B0604020202020204" pitchFamily="34" charset="0"/>
-              <a:buChar char="•"/>
+              <a:t>WebRTC : streaming vidéo, ICE, négociation</a:t>
+            </a:r>
+          </a:p>
+          <a:p>
+            <a:pPr marL="342900" indent="-342900">
+              <a:buFont typeface="Wingdings" panose="05000000000000000000" pitchFamily="2" charset="2"/>
+              <a:buChar char="§"/>
             </a:pPr>
-            <a:r>
-              <a:rPr lang="fr-CH" sz="2000" b="1" dirty="0">
-                <a:effectLst/>
-              </a:rPr>
-              <a:t>Node.js</a:t>
-            </a:r>
             <a:r>
               <a:rPr lang="fr-CH" sz="2000" dirty="0">
                 <a:effectLst/>
               </a:rPr>
-              <a:t> : backend léger, </a:t>
-            </a:r>
-            <a:r>
-              <a:rPr lang="fr-CH" sz="2000" dirty="0" err="1">
-                <a:effectLst/>
-              </a:rPr>
-              <a:t>WebSocket</a:t>
-            </a:r>
+              <a:t>Node.js : backend léger, WebSocket intégré</a:t>
+            </a:r>
+            <a:endParaRPr lang="fr-CH" sz="2000" dirty="0"/>
+          </a:p>
+          <a:p>
+            <a:pPr marL="342900" indent="-342900">
+              <a:buFont typeface="Wingdings" panose="05000000000000000000" pitchFamily="2" charset="2"/>
+              <a:buChar char="§"/>
+            </a:pPr>
             <a:r>
               <a:rPr lang="fr-CH" sz="2000" dirty="0">
                 <a:effectLst/>
               </a:rPr>
-              <a:t> intégré</a:t>
-            </a:r>
-          </a:p>
-          <a:p>
-            <a:pPr lvl="2">
-              <a:buFont typeface="Arial" panose="020B0604020202020204" pitchFamily="34" charset="0"/>
-              <a:buChar char="•"/>
-            </a:pPr>
-            <a:r>
-              <a:rPr lang="fr-CH" sz="2000" b="1" dirty="0">
-                <a:effectLst/>
-              </a:rPr>
-              <a:t>Render.com</a:t>
-            </a:r>
-            <a:r>
-              <a:rPr lang="fr-CH" sz="2000" dirty="0">
-                <a:effectLst/>
-              </a:rPr>
-              <a:t> : déploiement cloud, </a:t>
+              <a:t>Render.com : déploiement cloud, </a:t>
             </a:r>
             <a:r>
               <a:rPr lang="fr-CH" sz="2000" dirty="0" err="1">
@@ -6764,10 +6640,120 @@
               <a:t> automatique</a:t>
             </a:r>
           </a:p>
-          <a:p>
-            <a:pPr lvl="2"/>
-            <a:endParaRPr lang="fr-CH" sz="2000" dirty="0"/>
-          </a:p>
+        </p:txBody>
+      </p:sp>
+      <p:sp>
+        <p:nvSpPr>
+          <p:cNvPr id="2" name="ZoneTexte 1">
+            <a:extLst>
+              <a:ext uri="{FF2B5EF4-FFF2-40B4-BE49-F238E27FC236}">
+                <a16:creationId xmlns:a16="http://schemas.microsoft.com/office/drawing/2014/main" id="{CA0AE532-5C7D-5CED-8C71-230A5F1F999E}"/>
+              </a:ext>
+            </a:extLst>
+          </p:cNvPr>
+          <p:cNvSpPr txBox="1"/>
+          <p:nvPr/>
+        </p:nvSpPr>
+        <p:spPr>
+          <a:xfrm>
+            <a:off x="236693" y="4051029"/>
+            <a:ext cx="5464553" cy="2000548"/>
+          </a:xfrm>
+          <a:prstGeom prst="rect">
+            <a:avLst/>
+          </a:prstGeom>
+          <a:noFill/>
+        </p:spPr>
+        <p:txBody>
+          <a:bodyPr wrap="square" rtlCol="0">
+            <a:spAutoFit/>
+          </a:bodyPr>
+          <a:lstStyle/>
+          <a:p>
+            <a:r>
+              <a:rPr lang="fr-CH" sz="2400" b="1" dirty="0">
+                <a:effectLst/>
+              </a:rPr>
+              <a:t>🤝 Collaboration efficace</a:t>
+            </a:r>
+          </a:p>
+          <a:p>
+            <a:pPr lvl="1">
+              <a:buFont typeface="Arial" panose="020B0604020202020204" pitchFamily="34" charset="0"/>
+              <a:buChar char="•"/>
+            </a:pPr>
+            <a:r>
+              <a:rPr lang="fr-CH" sz="2000" dirty="0">
+                <a:effectLst/>
+              </a:rPr>
+              <a:t> Répartition claire des rôles</a:t>
+            </a:r>
+          </a:p>
+          <a:p>
+            <a:pPr lvl="1">
+              <a:buFont typeface="Arial" panose="020B0604020202020204" pitchFamily="34" charset="0"/>
+              <a:buChar char="•"/>
+            </a:pPr>
+            <a:r>
+              <a:rPr lang="fr-CH" sz="2000" dirty="0">
+                <a:effectLst/>
+              </a:rPr>
+              <a:t> Intégration UI, réseau, capteurs, backend</a:t>
+            </a:r>
+          </a:p>
+          <a:p>
+            <a:pPr lvl="1">
+              <a:buFont typeface="Arial" panose="020B0604020202020204" pitchFamily="34" charset="0"/>
+              <a:buChar char="•"/>
+            </a:pPr>
+            <a:r>
+              <a:rPr lang="fr-CH" sz="2000" dirty="0">
+                <a:effectLst/>
+              </a:rPr>
+              <a:t> Communication fluide et régulière</a:t>
+            </a:r>
+          </a:p>
+          <a:p>
+            <a:pPr lvl="1">
+              <a:buFont typeface="Arial" panose="020B0604020202020204" pitchFamily="34" charset="0"/>
+              <a:buChar char="•"/>
+            </a:pPr>
+            <a:r>
+              <a:rPr lang="fr-CH" sz="2000" dirty="0">
+                <a:effectLst/>
+              </a:rPr>
+              <a:t> Travail sur un projet complexe multi‑modules</a:t>
+            </a:r>
+          </a:p>
+        </p:txBody>
+      </p:sp>
+      <p:sp>
+        <p:nvSpPr>
+          <p:cNvPr id="7" name="ZoneTexte 6">
+            <a:extLst>
+              <a:ext uri="{FF2B5EF4-FFF2-40B4-BE49-F238E27FC236}">
+                <a16:creationId xmlns:a16="http://schemas.microsoft.com/office/drawing/2014/main" id="{83FCDB92-F696-3333-2967-A330FBF3E6F0}"/>
+              </a:ext>
+            </a:extLst>
+          </p:cNvPr>
+          <p:cNvSpPr txBox="1"/>
+          <p:nvPr/>
+        </p:nvSpPr>
+        <p:spPr>
+          <a:xfrm>
+            <a:off x="5578164" y="4051029"/>
+            <a:ext cx="6613837" cy="2000548"/>
+          </a:xfrm>
+          <a:prstGeom prst="rect">
+            <a:avLst/>
+          </a:prstGeom>
+          <a:noFill/>
+        </p:spPr>
+        <p:txBody>
+          <a:bodyPr wrap="square" rtlCol="0">
+            <a:spAutoFit/>
+          </a:bodyPr>
+          <a:lstStyle/>
           <a:p>
             <a:r>
               <a:rPr lang="fr-CH" sz="2400" dirty="0"/>
@@ -6784,14 +6770,8 @@
             <a:endParaRPr lang="fr-CH" sz="2400" b="1" dirty="0"/>
           </a:p>
           <a:p>
-            <a:pPr lvl="1" eaLnBrk="0" fontAlgn="base" hangingPunct="0">
-              <a:spcBef>
-                <a:spcPct val="0"/>
-              </a:spcBef>
-              <a:spcAft>
-                <a:spcPct val="0"/>
-              </a:spcAft>
-              <a:buFontTx/>
+            <a:pPr marL="342900" indent="-342900">
+              <a:buFont typeface="Arial" panose="020B0604020202020204" pitchFamily="34" charset="0"/>
               <a:buChar char="•"/>
             </a:pPr>
             <a:r>
@@ -6804,18 +6784,13 @@
                 </a:solidFill>
                 <a:effectLst/>
               </a:rPr>
-              <a:t>Widgets totalement indépendant</a:t>
-            </a:r>
-          </a:p>
-          <a:p>
-            <a:pPr lvl="1" eaLnBrk="0" fontAlgn="base" hangingPunct="0">
-              <a:spcBef>
-                <a:spcPct val="0"/>
-              </a:spcBef>
-              <a:spcAft>
-                <a:spcPct val="0"/>
-              </a:spcAft>
-              <a:buFontTx/>
+              <a:t>Widgets indépendants</a:t>
+            </a:r>
+            <a:endParaRPr lang="fr-FR" altLang="fr-FR" sz="2000" dirty="0"/>
+          </a:p>
+          <a:p>
+            <a:pPr marL="342900" indent="-342900">
+              <a:buFont typeface="Arial" panose="020B0604020202020204" pitchFamily="34" charset="0"/>
               <a:buChar char="•"/>
             </a:pPr>
             <a:r>
@@ -6828,42 +6803,12 @@
                 </a:solidFill>
                 <a:effectLst/>
               </a:rPr>
-              <a:t>API interne simple (</a:t>
-            </a:r>
-            <a:r>
-              <a:rPr kumimoji="0" lang="fr-FR" altLang="fr-FR" sz="2000" b="0" i="0" u="none" strike="noStrike" cap="none" normalizeH="0" baseline="0" dirty="0" err="1">
-                <a:ln>
-                  <a:noFill/>
-                </a:ln>
-                <a:solidFill>
-                  <a:schemeClr val="tx1"/>
-                </a:solidFill>
-                <a:effectLst/>
-              </a:rPr>
-              <a:t>updateXxx</a:t>
-            </a:r>
-            <a:r>
-              <a:rPr kumimoji="0" lang="fr-FR" altLang="fr-FR" sz="2000" b="0" i="0" u="none" strike="noStrike" cap="none" normalizeH="0" baseline="0" dirty="0">
-                <a:ln>
-                  <a:noFill/>
-                </a:ln>
-                <a:solidFill>
-                  <a:schemeClr val="tx1"/>
-                </a:solidFill>
-                <a:effectLst/>
-              </a:rPr>
-              <a:t>)</a:t>
-            </a:r>
-          </a:p>
-          <a:p>
-            <a:pPr lvl="1" eaLnBrk="0" fontAlgn="base" hangingPunct="0">
-              <a:spcBef>
-                <a:spcPct val="0"/>
-              </a:spcBef>
-              <a:spcAft>
-                <a:spcPct val="0"/>
-              </a:spcAft>
-              <a:buFontTx/>
+              <a:t>API interne simple </a:t>
+            </a:r>
+          </a:p>
+          <a:p>
+            <a:pPr marL="342900" indent="-342900">
+              <a:buFont typeface="Arial" panose="020B0604020202020204" pitchFamily="34" charset="0"/>
               <a:buChar char="•"/>
             </a:pPr>
             <a:r>
@@ -6880,40 +6825,10 @@
             </a:r>
           </a:p>
           <a:p>
-            <a:pPr lvl="1" eaLnBrk="0" fontAlgn="base" hangingPunct="0">
-              <a:spcBef>
-                <a:spcPct val="0"/>
-              </a:spcBef>
-              <a:spcAft>
-                <a:spcPct val="0"/>
-              </a:spcAft>
-              <a:buFontTx/>
+            <a:pPr marL="342900" indent="-342900">
+              <a:buFont typeface="Arial" panose="020B0604020202020204" pitchFamily="34" charset="0"/>
               <a:buChar char="•"/>
             </a:pPr>
-            <a:r>
-              <a:rPr kumimoji="0" lang="fr-FR" altLang="fr-FR" sz="2000" b="1" i="0" u="none" strike="noStrike" cap="none" normalizeH="0" baseline="0" dirty="0" err="1">
-                <a:ln>
-                  <a:noFill/>
-                </a:ln>
-                <a:solidFill>
-                  <a:schemeClr val="tx1"/>
-                </a:solidFill>
-                <a:effectLst/>
-              </a:rPr>
-              <a:t>Séparationdes</a:t>
-            </a:r>
-            <a:r>
-              <a:rPr kumimoji="0" lang="fr-FR" altLang="fr-FR" sz="2000" b="1" i="0" u="none" strike="noStrike" cap="none" normalizeH="0" baseline="0" dirty="0">
-                <a:ln>
-                  <a:noFill/>
-                </a:ln>
-                <a:solidFill>
-                  <a:schemeClr val="tx1"/>
-                </a:solidFill>
-                <a:effectLst/>
-              </a:rPr>
-              <a:t> responsabilités </a:t>
-            </a:r>
             <a:r>
               <a:rPr kumimoji="0" lang="fr-FR" altLang="fr-FR" sz="2000" i="0" u="none" strike="noStrike" cap="none" normalizeH="0" baseline="0" dirty="0">
                 <a:ln>
@@ -6924,31 +6839,7 @@
                 </a:solidFill>
                 <a:effectLst/>
               </a:rPr>
-              <a:t>: </a:t>
-            </a:r>
-            <a:r>
-              <a:rPr kumimoji="0" lang="fr-FR" altLang="fr-FR" sz="2000" i="0" u="none" strike="noStrike" cap="none" normalizeH="0" baseline="0" dirty="0" err="1">
-                <a:ln>
-                  <a:noFill/>
-                </a:ln>
-                <a:solidFill>
-                  <a:schemeClr val="tx1"/>
-                </a:solidFill>
-                <a:effectLst/>
-              </a:rPr>
-              <a:t>acquisition,transport</a:t>
-            </a:r>
-            <a:r>
-              <a:rPr kumimoji="0" lang="fr-FR" altLang="fr-FR" sz="2000" i="0" u="none" strike="noStrike" cap="none" normalizeH="0" baseline="0" dirty="0">
-                <a:ln>
-                  <a:noFill/>
-                </a:ln>
-                <a:solidFill>
-                  <a:schemeClr val="tx1"/>
-                </a:solidFill>
-                <a:effectLst/>
-              </a:rPr>
-              <a:t>, traitement, visualisation</a:t>
+              <a:t>Séparation des responsabilités : acquisition, transport, traitement, visualisation</a:t>
             </a:r>
           </a:p>
         </p:txBody>
@@ -7086,7 +6977,7 @@
         <p:spPr>
           <a:xfrm>
             <a:off x="384037" y="1594131"/>
-            <a:ext cx="10131563" cy="2308324"/>
+            <a:ext cx="10541055" cy="2308324"/>
           </a:xfrm>
           <a:prstGeom prst="rect">
             <a:avLst/>
@@ -7104,8 +6995,16 @@
               <a:buChar char="q"/>
             </a:pPr>
             <a:r>
-              <a:rPr lang="fr-CH" sz="2400" b="1" dirty="0"/>
-              <a:t>Amélioration du flux de données</a:t>
+              <a:rPr lang="fr-CH" sz="2400" dirty="0"/>
+              <a:t>Amélioration du flux de données (</a:t>
+            </a:r>
+            <a:r>
+              <a:rPr lang="fr-CH" sz="2400" dirty="0" err="1"/>
+              <a:t>multi-threading</a:t>
+            </a:r>
+            <a:r>
+              <a:rPr lang="fr-CH" sz="2400" dirty="0"/>
+              <a:t> ?)</a:t>
             </a:r>
           </a:p>
           <a:p>
@@ -7114,8 +7013,8 @@
               <a:buChar char="q"/>
             </a:pPr>
             <a:r>
-              <a:rPr lang="fr-CH" sz="2400" b="1" dirty="0"/>
-              <a:t>Plus de widgets/capteurs</a:t>
+              <a:rPr lang="fr-CH" sz="2400" dirty="0"/>
+              <a:t>Plus de widgets/capteurs (ex. accéléromètre)</a:t>
             </a:r>
           </a:p>
           <a:p>
@@ -7124,7 +7023,7 @@
               <a:buChar char="q"/>
             </a:pPr>
             <a:r>
-              <a:rPr lang="fr-CH" sz="2400" b="1" dirty="0"/>
+              <a:rPr lang="fr-CH" sz="2400" dirty="0"/>
               <a:t>Plus d’interactions avec les widgets</a:t>
             </a:r>
           </a:p>
@@ -7134,8 +7033,8 @@
               <a:buChar char="q"/>
             </a:pPr>
             <a:r>
-              <a:rPr lang="fr-CH" sz="2400" b="1" dirty="0"/>
-              <a:t>Extension des fonctionnalités temps réel</a:t>
+              <a:rPr lang="fr-CH" sz="2400" dirty="0"/>
+              <a:t>Multi-utilisateur simultané</a:t>
             </a:r>
           </a:p>
           <a:p>
@@ -7144,7 +7043,7 @@
               <a:buChar char="q"/>
             </a:pPr>
             <a:r>
-              <a:rPr lang="fr-CH" sz="2400" b="1" dirty="0"/>
+              <a:rPr lang="fr-CH" sz="2400" dirty="0"/>
               <a:t>Mode hors‑ligne / reprise automatique après coupure réseau</a:t>
             </a:r>
           </a:p>
@@ -7154,15 +7053,15 @@
               <a:buChar char="q"/>
             </a:pPr>
             <a:r>
-              <a:rPr lang="fr-CH" sz="2400" b="1" dirty="0"/>
-              <a:t>Historique et visualisation des données (replay, graphiques, </a:t>
-            </a:r>
-            <a:r>
-              <a:rPr lang="fr-CH" sz="2400" b="1" dirty="0" err="1"/>
+              <a:rPr lang="fr-CH" sz="2400" dirty="0"/>
+              <a:t>Historique des données (replay, graphiques, </a:t>
+            </a:r>
+            <a:r>
+              <a:rPr lang="fr-CH" sz="2400" dirty="0" err="1"/>
               <a:t>heatmaps</a:t>
             </a:r>
             <a:r>
-              <a:rPr lang="fr-CH" sz="2400" b="1" dirty="0"/>
+              <a:rPr lang="fr-CH" sz="2400" dirty="0"/>
               <a:t>)</a:t>
             </a:r>
           </a:p>
@@ -7324,17 +7223,17 @@
           <a:p>
             <a:pPr algn="ctr"/>
             <a:r>
-              <a:rPr lang="fr-FR" sz="4400" dirty="0"/>
+              <a:rPr lang="fr-FR" sz="4400" b="1" dirty="0"/>
               <a:t>Merci pour votre écoute !</a:t>
             </a:r>
             <a:br>
-              <a:rPr lang="fr-FR" sz="4400" dirty="0"/>
+              <a:rPr lang="fr-FR" sz="4400" b="1" dirty="0"/>
             </a:br>
             <a:r>
-              <a:rPr lang="fr-FR" sz="4400" dirty="0"/>
+              <a:rPr lang="fr-FR" sz="4400" b="1" dirty="0"/>
               <a:t>A disposition pour vos questions</a:t>
             </a:r>
-            <a:endParaRPr lang="fr-CH" sz="4400" dirty="0"/>
+            <a:endParaRPr lang="fr-CH" sz="4400" b="1" dirty="0"/>
           </a:p>
         </p:txBody>
       </p:sp>
@@ -11670,7 +11569,7 @@
               <a:buChar char="q"/>
             </a:pPr>
             <a:r>
-              <a:rPr lang="fr-CH" sz="2400" b="1" dirty="0"/>
+              <a:rPr lang="fr-CH" sz="2400" dirty="0"/>
               <a:t>JavaScript</a:t>
             </a:r>
           </a:p>
@@ -11680,7 +11579,7 @@
               <a:buChar char="q"/>
             </a:pPr>
             <a:r>
-              <a:rPr lang="fr-CH" sz="2400" b="1" dirty="0"/>
+              <a:rPr lang="fr-CH" sz="2400" dirty="0"/>
               <a:t>HTML5</a:t>
             </a:r>
           </a:p>
@@ -11690,7 +11589,7 @@
               <a:buChar char="q"/>
             </a:pPr>
             <a:r>
-              <a:rPr lang="fr-CH" sz="2400" b="1" dirty="0"/>
+              <a:rPr lang="fr-CH" sz="2400" dirty="0"/>
               <a:t>CSS3</a:t>
             </a:r>
           </a:p>
@@ -11700,10 +11599,9 @@
               <a:buChar char="q"/>
             </a:pPr>
             <a:r>
-              <a:rPr lang="fr-CH" sz="2400" b="1" dirty="0" err="1"/>
+              <a:rPr lang="fr-CH" sz="2400" dirty="0"/>
               <a:t>Websocket</a:t>
             </a:r>
-            <a:endParaRPr lang="fr-CH" sz="2400" b="1" dirty="0"/>
           </a:p>
           <a:p>
             <a:pPr marL="342900" indent="-342900">
@@ -11711,10 +11609,9 @@
               <a:buChar char="q"/>
             </a:pPr>
             <a:r>
-              <a:rPr lang="fr-CH" sz="2400" b="1" dirty="0" err="1"/>
+              <a:rPr lang="fr-CH" sz="2400" dirty="0"/>
               <a:t>WebRTC</a:t>
             </a:r>
-            <a:endParaRPr lang="fr-CH" sz="2400" b="1" dirty="0"/>
           </a:p>
           <a:p>
             <a:pPr marL="342900" indent="-342900">
@@ -11722,7 +11619,7 @@
               <a:buChar char="q"/>
             </a:pPr>
             <a:r>
-              <a:rPr lang="fr-CH" sz="2400" b="1" dirty="0"/>
+              <a:rPr lang="fr-CH" sz="2400" dirty="0"/>
               <a:t>Node JS</a:t>
             </a:r>
           </a:p>
@@ -11732,7 +11629,7 @@
               <a:buChar char="q"/>
             </a:pPr>
             <a:r>
-              <a:rPr lang="fr-CH" sz="2400" b="1" dirty="0"/>
+              <a:rPr lang="fr-CH" sz="2400" dirty="0"/>
               <a:t>Render.com</a:t>
             </a:r>
           </a:p>
@@ -11742,7 +11639,7 @@
               <a:buChar char="q"/>
             </a:pPr>
             <a:r>
-              <a:rPr lang="fr-CH" sz="2400" b="1" dirty="0"/>
+              <a:rPr lang="fr-CH" sz="2400" dirty="0"/>
               <a:t>GIT/GITHUB</a:t>
             </a:r>
           </a:p>
@@ -11752,7 +11649,7 @@
               <a:buChar char="q"/>
             </a:pPr>
             <a:r>
-              <a:rPr lang="fr-CH" sz="2400" b="1" dirty="0"/>
+              <a:rPr lang="fr-CH" sz="2400" dirty="0"/>
               <a:t>GITHUB pages</a:t>
             </a:r>
           </a:p>
@@ -11762,7 +11659,7 @@
               <a:buChar char="q"/>
             </a:pPr>
             <a:r>
-              <a:rPr lang="fr-CH" sz="2400" b="1" dirty="0"/>
+              <a:rPr lang="fr-CH" sz="2400" dirty="0"/>
               <a:t>Smartphone Android</a:t>
             </a:r>
           </a:p>
@@ -12105,8 +12002,8 @@
         </p:nvSpPr>
         <p:spPr>
           <a:xfrm>
-            <a:off x="334007" y="1619036"/>
-            <a:ext cx="11490439" cy="4462760"/>
+            <a:off x="350780" y="1936889"/>
+            <a:ext cx="11490439" cy="3662541"/>
           </a:xfrm>
           <a:prstGeom prst="rect">
             <a:avLst/>
@@ -12129,6 +12026,10 @@
             </a:r>
           </a:p>
           <a:p>
+            <a:pPr marL="342900" indent="-342900">
+              <a:buFont typeface="Wingdings" panose="05000000000000000000" pitchFamily="2" charset="2"/>
+              <a:buChar char="§"/>
+            </a:pPr>
             <a:r>
               <a:rPr lang="fr-CH" sz="2000" dirty="0">
                 <a:effectLst/>
@@ -12137,11 +12038,25 @@
             </a:r>
           </a:p>
           <a:p>
+            <a:pPr marL="342900" indent="-342900">
+              <a:buFont typeface="Wingdings" panose="05000000000000000000" pitchFamily="2" charset="2"/>
+              <a:buChar char="§"/>
+            </a:pPr>
             <a:r>
               <a:rPr lang="fr-CH" sz="2000" dirty="0">
                 <a:effectLst/>
               </a:rPr>
-              <a:t>Tu dois composer avec : des IMU bruitées</a:t>
+              <a:t>IMU (</a:t>
+            </a:r>
+            <a:r>
+              <a:rPr lang="fr-CH" sz="2000" dirty="0"/>
+              <a:t>unité de mesure inertielle)</a:t>
+            </a:r>
+            <a:r>
+              <a:rPr lang="fr-CH" sz="2000" dirty="0">
+                <a:effectLst/>
+              </a:rPr>
+              <a:t> bruitées</a:t>
             </a:r>
             <a:r>
               <a:rPr lang="fr-CH" sz="2000" dirty="0"/>
@@ -12161,7 +12076,19 @@
               <a:rPr lang="fr-CH" sz="2000" dirty="0">
                 <a:effectLst/>
               </a:rPr>
-              <a:t>valeurs dépendantes de l’orientation physique du téléphone, des variations entre modèles (Android vs iPhone, marques, générations)</a:t>
+              <a:t>valeurs dépendantes de l’orientation physique du téléphone.</a:t>
+            </a:r>
+          </a:p>
+          <a:p>
+            <a:pPr marL="342900" indent="-342900">
+              <a:buFont typeface="Wingdings" panose="05000000000000000000" pitchFamily="2" charset="2"/>
+              <a:buChar char="§"/>
+            </a:pPr>
+            <a:r>
+              <a:rPr lang="fr-CH" sz="2000" dirty="0">
+                <a:effectLst/>
+              </a:rPr>
+              <a:t>Variations possibles modèles (Android vs iPhone, marques, générations)</a:t>
             </a:r>
           </a:p>
           <a:p>
@@ -12178,49 +12105,40 @@
             </a:pPr>
             <a:r>
               <a:rPr lang="fr-CH" sz="2400" b="1" dirty="0"/>
-              <a:t>Transmission temps réel via </a:t>
-            </a:r>
-            <a:r>
-              <a:rPr lang="fr-CH" sz="2400" b="1" dirty="0" err="1"/>
-              <a:t>WebSocket</a:t>
-            </a:r>
-            <a:endParaRPr lang="fr-CH" sz="2400" b="1" dirty="0"/>
-          </a:p>
-          <a:p>
+              <a:t>Temps réel</a:t>
+            </a:r>
+          </a:p>
+          <a:p>
+            <a:pPr marL="342900" indent="-342900">
+              <a:buFont typeface="Wingdings" panose="05000000000000000000" pitchFamily="2" charset="2"/>
+              <a:buChar char="§"/>
+            </a:pPr>
             <a:r>
               <a:rPr lang="fr-CH" sz="2000" dirty="0">
                 <a:effectLst/>
               </a:rPr>
-              <a:t>Le temps réel n’est jamais “simple” : latence variable, pertes de paquets, reconnections intempestives, débit limité en 4G/5G,messages reçus dans un ordre différent de l’envoi</a:t>
-            </a:r>
-          </a:p>
-          <a:p>
-            <a:endParaRPr lang="fr-CH" sz="2400" b="1" dirty="0"/>
+              <a:t>Le temps réel n’est jamais “simple” : latence variable, pertes de paquets, reconnections intempestives</a:t>
+            </a:r>
           </a:p>
           <a:p>
             <a:pPr marL="342900" indent="-342900">
               <a:buFont typeface="Wingdings" panose="05000000000000000000" pitchFamily="2" charset="2"/>
-              <a:buChar char="q"/>
+              <a:buChar char="§"/>
             </a:pPr>
             <a:r>
-              <a:rPr lang="fr-CH" sz="2400" b="1" dirty="0"/>
-              <a:t>Visualisation en temps réel</a:t>
-            </a:r>
-          </a:p>
-          <a:p>
-            <a:r>
-              <a:rPr lang="fr-CH" sz="2000" dirty="0">
-                <a:effectLst/>
-              </a:rPr>
-              <a:t>Afficher en continu : une carte, une boussole, une voiture 2D/3D, des graphiques audio, des logs, des widgets multiples</a:t>
+              <a:rPr lang="fr-FR" sz="2000" dirty="0"/>
+              <a:t>Débit limité (4G/5G), messages pouvant arriver dans un ordre différent de l’envoi.</a:t>
             </a:r>
           </a:p>
           <a:p>
             <a:pPr marL="342900" indent="-342900">
               <a:buFont typeface="Wingdings" panose="05000000000000000000" pitchFamily="2" charset="2"/>
-              <a:buChar char="q"/>
+              <a:buChar char="§"/>
             </a:pPr>
-            <a:endParaRPr lang="fr-CH" sz="2400" b="1" dirty="0"/>
+            <a:r>
+              <a:rPr lang="fr-FR" sz="2000" dirty="0"/>
+              <a:t>Visualisation en continue de tous les widgets.</a:t>
+            </a:r>
           </a:p>
         </p:txBody>
       </p:sp>

--- a/documents/Presentation_JS.pptx
+++ b/documents/Presentation_JS.pptx
@@ -1505,7 +1505,27 @@
               <a:rPr lang="fr-CH" dirty="0">
                 <a:effectLst/>
               </a:rPr>
-              <a:t>Le smartphone envoie ses données capteurs via WebSocket à un serveur Node.js hébergé sur Render.com. </a:t>
+              <a:t>Le smartphone envoie ses données capteurs via </a:t>
+            </a:r>
+            <a:r>
+              <a:rPr lang="fr-CH" dirty="0" err="1">
+                <a:effectLst/>
+              </a:rPr>
+              <a:t>WebSocket</a:t>
+            </a:r>
+            <a:r>
+              <a:rPr lang="fr-CH" dirty="0">
+                <a:effectLst/>
+              </a:rPr>
+              <a:t> </a:t>
+            </a:r>
+          </a:p>
+          <a:p>
+            <a:r>
+              <a:rPr lang="fr-CH" dirty="0">
+                <a:effectLst/>
+              </a:rPr>
+              <a:t>à un serveur Node.js hébergé sur Render.com. </a:t>
             </a:r>
           </a:p>
           <a:p>
@@ -1518,7 +1538,15 @@
               <a:rPr lang="fr-CH" dirty="0">
                 <a:effectLst/>
               </a:rPr>
-              <a:t>Ce serveur les transmet ensuite à notre interface cockpit, qui les affiche en temps réel sous forme de widgets visuels.</a:t>
+              <a:t>Ce serveur les transmet ensuite à notre interface cockpit, </a:t>
+            </a:r>
+          </a:p>
+          <a:p>
+            <a:r>
+              <a:rPr lang="fr-CH" dirty="0">
+                <a:effectLst/>
+              </a:rPr>
+              <a:t>qui les affiche en temps réel sous forme de widgets visuels.</a:t>
             </a:r>
           </a:p>
           <a:p>
@@ -1544,7 +1572,19 @@
               <a:rPr lang="fr-CH" dirty="0">
                 <a:effectLst/>
               </a:rPr>
-              <a:t>Le flux vidéo passe par WebRTC (pas de latence)</a:t>
+              <a:t>Le flux vidéo passe par </a:t>
+            </a:r>
+            <a:r>
+              <a:rPr lang="fr-CH" dirty="0" err="1">
+                <a:effectLst/>
+              </a:rPr>
+              <a:t>WebRTC</a:t>
+            </a:r>
+            <a:r>
+              <a:rPr lang="fr-CH" dirty="0">
+                <a:effectLst/>
+              </a:rPr>
+              <a:t> (peu de latence)</a:t>
             </a:r>
           </a:p>
           <a:p>
@@ -1681,12 +1721,9 @@
               <a:buFont typeface="Arial" panose="020B0604020202020204" pitchFamily="34" charset="0"/>
               <a:buChar char="•"/>
             </a:pPr>
-            <a:r>
-              <a:rPr lang="fr-CH" dirty="0">
-                <a:effectLst/>
-              </a:rPr>
-              <a:t> server/ gère les connexions WebSocket</a:t>
-            </a:r>
+            <a:endParaRPr lang="fr-CH" dirty="0">
+              <a:effectLst/>
+            </a:endParaRPr>
           </a:p>
           <a:p>
             <a:pPr lvl="1">
@@ -1697,22 +1734,59 @@
               <a:rPr lang="fr-CH" dirty="0">
                 <a:effectLst/>
               </a:rPr>
-              <a:t> smartphone/ contient le code embarqué côté mobile</a:t>
-            </a:r>
+              <a:t> server/ gère les connexions </a:t>
+            </a:r>
+            <a:r>
+              <a:rPr lang="fr-CH" dirty="0" err="1">
+                <a:effectLst/>
+              </a:rPr>
+              <a:t>WebSocket</a:t>
+            </a:r>
+            <a:endParaRPr lang="fr-CH" dirty="0">
+              <a:effectLst/>
+            </a:endParaRPr>
           </a:p>
           <a:p>
             <a:pPr lvl="1">
               <a:buFont typeface="Arial" panose="020B0604020202020204" pitchFamily="34" charset="0"/>
               <a:buChar char="•"/>
             </a:pPr>
+            <a:endParaRPr lang="fr-CH" dirty="0">
+              <a:effectLst/>
+            </a:endParaRPr>
+          </a:p>
+          <a:p>
+            <a:pPr lvl="1">
+              <a:buFont typeface="Arial" panose="020B0604020202020204" pitchFamily="34" charset="0"/>
+              <a:buChar char="•"/>
+            </a:pPr>
             <a:r>
               <a:rPr lang="fr-CH" dirty="0">
                 <a:effectLst/>
               </a:rPr>
-              <a:t> documents/ regroupe les livrables Chaque widget est indépendant et chargé dynamiquement.</a:t>
-            </a:r>
-          </a:p>
-          <a:p>
+              <a:t> smartphone/ contient le code embarqué côté mobile</a:t>
+            </a:r>
+          </a:p>
+          <a:p>
+            <a:pPr lvl="1">
+              <a:buFont typeface="Arial" panose="020B0604020202020204" pitchFamily="34" charset="0"/>
+              <a:buChar char="•"/>
+            </a:pPr>
+            <a:endParaRPr lang="fr-CH" dirty="0">
+              <a:effectLst/>
+            </a:endParaRPr>
+          </a:p>
+          <a:p>
+            <a:pPr lvl="1">
+              <a:buFont typeface="Arial" panose="020B0604020202020204" pitchFamily="34" charset="0"/>
+              <a:buChar char="•"/>
+            </a:pPr>
+            <a:r>
+              <a:rPr lang="fr-CH" dirty="0">
+                <a:effectLst/>
+              </a:rPr>
+              <a:t> documents/ contient la documentation du projet</a:t>
+            </a:r>
             <a:endParaRPr lang="fr-CH" dirty="0"/>
           </a:p>
         </p:txBody>
@@ -1817,11 +1891,142 @@
             </a:endParaRPr>
           </a:p>
           <a:p>
+            <a:pPr marL="0" marR="0" lvl="0" indent="0" algn="l" defTabSz="914400" rtl="0" eaLnBrk="1" fontAlgn="auto" latinLnBrk="0" hangingPunct="1">
+              <a:lnSpc>
+                <a:spcPct val="100000"/>
+              </a:lnSpc>
+              <a:spcBef>
+                <a:spcPts val="0"/>
+              </a:spcBef>
+              <a:spcAft>
+                <a:spcPts val="0"/>
+              </a:spcAft>
+              <a:buClrTx/>
+              <a:buSzTx/>
+              <a:buFontTx/>
+              <a:buNone/>
+              <a:tabLst/>
+              <a:defRPr/>
+            </a:pPr>
             <a:r>
               <a:rPr lang="fr-CH" dirty="0">
                 <a:effectLst/>
               </a:rPr>
-              <a:t>On a découvert et utilisé plusieurs technologies modernes :</a:t>
+              <a:t>Ce schéma illustre le flux global des données. </a:t>
+            </a:r>
+          </a:p>
+          <a:p>
+            <a:pPr marL="0" marR="0" lvl="0" indent="0" algn="l" defTabSz="914400" rtl="0" eaLnBrk="1" fontAlgn="auto" latinLnBrk="0" hangingPunct="1">
+              <a:lnSpc>
+                <a:spcPct val="100000"/>
+              </a:lnSpc>
+              <a:spcBef>
+                <a:spcPts val="0"/>
+              </a:spcBef>
+              <a:spcAft>
+                <a:spcPts val="0"/>
+              </a:spcAft>
+              <a:buClrTx/>
+              <a:buSzTx/>
+              <a:buFontTx/>
+              <a:buNone/>
+              <a:tabLst/>
+              <a:defRPr/>
+            </a:pPr>
+            <a:r>
+              <a:rPr lang="fr-CH" dirty="0">
+                <a:effectLst/>
+              </a:rPr>
+              <a:t>Les composants techniques (</a:t>
+            </a:r>
+            <a:r>
+              <a:rPr lang="fr-CH" dirty="0" err="1">
+                <a:effectLst/>
+              </a:rPr>
+              <a:t>WebSocket</a:t>
+            </a:r>
+            <a:r>
+              <a:rPr lang="fr-CH" dirty="0">
+                <a:effectLst/>
+              </a:rPr>
+              <a:t>, </a:t>
+            </a:r>
+            <a:r>
+              <a:rPr lang="fr-CH" dirty="0" err="1">
+                <a:effectLst/>
+              </a:rPr>
+              <a:t>WebRTC</a:t>
+            </a:r>
+            <a:r>
+              <a:rPr lang="fr-CH" dirty="0">
+                <a:effectLst/>
+              </a:rPr>
+              <a:t>, Node.js, </a:t>
+            </a:r>
+          </a:p>
+          <a:p>
+            <a:pPr marL="0" marR="0" lvl="0" indent="0" algn="l" defTabSz="914400" rtl="0" eaLnBrk="1" fontAlgn="auto" latinLnBrk="0" hangingPunct="1">
+              <a:lnSpc>
+                <a:spcPct val="100000"/>
+              </a:lnSpc>
+              <a:spcBef>
+                <a:spcPts val="0"/>
+              </a:spcBef>
+              <a:spcAft>
+                <a:spcPts val="0"/>
+              </a:spcAft>
+              <a:buClrTx/>
+              <a:buSzTx/>
+              <a:buFontTx/>
+              <a:buNone/>
+              <a:tabLst/>
+              <a:defRPr/>
+            </a:pPr>
+            <a:r>
+              <a:rPr lang="fr-CH" dirty="0">
+                <a:effectLst/>
+              </a:rPr>
+              <a:t>Render.com) seront expliqués en détail dans la section </a:t>
+            </a:r>
+          </a:p>
+          <a:p>
+            <a:pPr marL="0" marR="0" lvl="0" indent="0" algn="l" defTabSz="914400" rtl="0" eaLnBrk="1" fontAlgn="auto" latinLnBrk="0" hangingPunct="1">
+              <a:lnSpc>
+                <a:spcPct val="100000"/>
+              </a:lnSpc>
+              <a:spcBef>
+                <a:spcPts val="0"/>
+              </a:spcBef>
+              <a:spcAft>
+                <a:spcPts val="0"/>
+              </a:spcAft>
+              <a:buClrTx/>
+              <a:buSzTx/>
+              <a:buFontTx/>
+              <a:buNone/>
+              <a:tabLst/>
+              <a:defRPr/>
+            </a:pPr>
+            <a:r>
+              <a:rPr lang="fr-CH" sz="1200" b="1" dirty="0"/>
+              <a:t>Points positifs du projet</a:t>
+            </a:r>
+            <a:r>
+              <a:rPr lang="fr-CH" dirty="0">
+                <a:effectLst/>
+              </a:rPr>
+              <a:t>.</a:t>
+            </a:r>
+          </a:p>
+          <a:p>
+            <a:endParaRPr lang="fr-CH" b="1" dirty="0">
+              <a:effectLst/>
+            </a:endParaRPr>
+          </a:p>
+          <a:p>
+            <a:r>
+              <a:rPr lang="fr-CH" dirty="0"/>
+              <a:t>Le projet utilise également :</a:t>
             </a:r>
           </a:p>
           <a:p>
@@ -1835,10 +2040,28 @@
               <a:buChar char="•"/>
             </a:pPr>
             <a:r>
+              <a:rPr lang="fr-CH" b="1" dirty="0">
+                <a:effectLst/>
+              </a:rPr>
+              <a:t> JavaScript</a:t>
+            </a:r>
+            <a:r>
               <a:rPr lang="fr-CH" dirty="0">
                 <a:effectLst/>
               </a:rPr>
-              <a:t> WebSocket pour le flux temps réel</a:t>
+              <a:t> : langage principal pour le traitement des données </a:t>
+            </a:r>
+          </a:p>
+          <a:p>
+            <a:pPr lvl="1">
+              <a:buFont typeface="Arial" panose="020B0604020202020204" pitchFamily="34" charset="0"/>
+              <a:buNone/>
+            </a:pPr>
+            <a:r>
+              <a:rPr lang="fr-CH" dirty="0">
+                <a:effectLst/>
+              </a:rPr>
+              <a:t>   et l’interaction en temps réel</a:t>
             </a:r>
           </a:p>
           <a:p>
@@ -1846,12 +2069,9 @@
               <a:buFont typeface="Arial" panose="020B0604020202020204" pitchFamily="34" charset="0"/>
               <a:buChar char="•"/>
             </a:pPr>
-            <a:r>
-              <a:rPr lang="fr-CH" dirty="0">
-                <a:effectLst/>
-              </a:rPr>
-              <a:t> WebRTC pour le streaming vidéo</a:t>
-            </a:r>
+            <a:endParaRPr lang="fr-CH" dirty="0">
+              <a:effectLst/>
+            </a:endParaRPr>
           </a:p>
           <a:p>
             <a:pPr lvl="1">
@@ -1859,10 +2079,16 @@
               <a:buChar char="•"/>
             </a:pPr>
             <a:r>
+              <a:rPr lang="fr-CH" b="1" dirty="0">
+                <a:effectLst/>
+              </a:rPr>
+              <a:t> HTML5 / CSS3</a:t>
+            </a:r>
+            <a:r>
               <a:rPr lang="fr-CH" dirty="0">
                 <a:effectLst/>
               </a:rPr>
-              <a:t> Node.js pour le backend</a:t>
+              <a:t> : structure et mise en forme de l’interface web</a:t>
             </a:r>
           </a:p>
           <a:p>
@@ -1870,15 +2096,114 @@
               <a:buFont typeface="Arial" panose="020B0604020202020204" pitchFamily="34" charset="0"/>
               <a:buChar char="•"/>
             </a:pPr>
+            <a:endParaRPr lang="fr-CH" dirty="0">
+              <a:effectLst/>
+            </a:endParaRPr>
+          </a:p>
+          <a:p>
+            <a:pPr lvl="1">
+              <a:buFont typeface="Arial" panose="020B0604020202020204" pitchFamily="34" charset="0"/>
+              <a:buChar char="•"/>
+            </a:pPr>
+            <a:r>
+              <a:rPr lang="fr-CH" b="1" dirty="0">
+                <a:effectLst/>
+              </a:rPr>
+              <a:t> Git / GitHub</a:t>
+            </a:r>
             <a:r>
               <a:rPr lang="fr-CH" dirty="0">
                 <a:effectLst/>
               </a:rPr>
-              <a:t> Render.com pour le déploiement cloud Et bien sûr, JavaScript pour toute la logique cockpit.</a:t>
-            </a:r>
-          </a:p>
-          <a:p>
-            <a:endParaRPr lang="fr-CH" dirty="0"/>
+              <a:t> : gestion du code, </a:t>
+            </a:r>
+            <a:r>
+              <a:rPr lang="fr-CH" dirty="0" err="1">
+                <a:effectLst/>
+              </a:rPr>
+              <a:t>versionnement</a:t>
+            </a:r>
+            <a:r>
+              <a:rPr lang="fr-CH" dirty="0">
+                <a:effectLst/>
+              </a:rPr>
+              <a:t> et collaboration</a:t>
+            </a:r>
+          </a:p>
+          <a:p>
+            <a:pPr lvl="1">
+              <a:buFont typeface="Arial" panose="020B0604020202020204" pitchFamily="34" charset="0"/>
+              <a:buChar char="•"/>
+            </a:pPr>
+            <a:endParaRPr lang="fr-CH" dirty="0">
+              <a:effectLst/>
+            </a:endParaRPr>
+          </a:p>
+          <a:p>
+            <a:pPr lvl="1">
+              <a:buFont typeface="Arial" panose="020B0604020202020204" pitchFamily="34" charset="0"/>
+              <a:buChar char="•"/>
+            </a:pPr>
+            <a:r>
+              <a:rPr lang="fr-CH" b="1" dirty="0">
+                <a:effectLst/>
+              </a:rPr>
+              <a:t> GitHub Pages</a:t>
+            </a:r>
+            <a:r>
+              <a:rPr lang="fr-CH" dirty="0">
+                <a:effectLst/>
+              </a:rPr>
+              <a:t> : hébergement gratuit du cockpit en ligne</a:t>
+            </a:r>
+          </a:p>
+          <a:p>
+            <a:pPr lvl="1">
+              <a:buFont typeface="Arial" panose="020B0604020202020204" pitchFamily="34" charset="0"/>
+              <a:buChar char="•"/>
+            </a:pPr>
+            <a:endParaRPr lang="fr-CH" dirty="0">
+              <a:effectLst/>
+            </a:endParaRPr>
+          </a:p>
+          <a:p>
+            <a:pPr lvl="1">
+              <a:buFont typeface="Arial" panose="020B0604020202020204" pitchFamily="34" charset="0"/>
+              <a:buChar char="•"/>
+            </a:pPr>
+            <a:r>
+              <a:rPr lang="fr-CH" b="1" dirty="0">
+                <a:effectLst/>
+              </a:rPr>
+              <a:t> Smartphone Android</a:t>
+            </a:r>
+            <a:r>
+              <a:rPr lang="fr-CH" dirty="0">
+                <a:effectLst/>
+              </a:rPr>
+              <a:t> : source des capteurs (GPS, gyroscope, etc.) </a:t>
+            </a:r>
+          </a:p>
+          <a:p>
+            <a:pPr lvl="1">
+              <a:buFont typeface="Arial" panose="020B0604020202020204" pitchFamily="34" charset="0"/>
+              <a:buNone/>
+            </a:pPr>
+            <a:r>
+              <a:rPr lang="fr-CH" dirty="0">
+                <a:effectLst/>
+              </a:rPr>
+              <a:t>   accessibles via navigateur</a:t>
+            </a:r>
+          </a:p>
+          <a:p>
+            <a:pPr lvl="1">
+              <a:buFont typeface="Arial" panose="020B0604020202020204" pitchFamily="34" charset="0"/>
+              <a:buChar char="•"/>
+            </a:pPr>
+            <a:endParaRPr lang="fr-CH" dirty="0">
+              <a:effectLst/>
+            </a:endParaRPr>
           </a:p>
         </p:txBody>
       </p:sp>
@@ -1994,83 +2319,39 @@
             </a:r>
           </a:p>
           <a:p>
+            <a:pPr marL="0" marR="0" lvl="0" indent="0" algn="l" defTabSz="914400" rtl="0" eaLnBrk="1" fontAlgn="auto" latinLnBrk="0" hangingPunct="1">
+              <a:lnSpc>
+                <a:spcPct val="100000"/>
+              </a:lnSpc>
+              <a:spcBef>
+                <a:spcPts val="0"/>
+              </a:spcBef>
+              <a:spcAft>
+                <a:spcPts val="0"/>
+              </a:spcAft>
+              <a:buClrTx/>
+              <a:buSzTx/>
+              <a:buFontTx/>
+              <a:buNone/>
+              <a:tabLst/>
+              <a:defRPr/>
+            </a:pPr>
+            <a:endParaRPr lang="fr-CH" b="1" dirty="0">
+              <a:effectLst/>
+            </a:endParaRPr>
+          </a:p>
+          <a:p>
             <a:r>
               <a:rPr lang="fr-CH" b="0" dirty="0">
                 <a:effectLst/>
               </a:rPr>
-              <a:t> </a:t>
-            </a:r>
-          </a:p>
-          <a:p>
-            <a:pPr lvl="1"/>
+              <a:t>    </a:t>
+            </a:r>
             <a:r>
               <a:rPr lang="fr-CH" dirty="0">
                 <a:effectLst/>
               </a:rPr>
-              <a:t>Voici le widget boussole. </a:t>
-            </a:r>
-          </a:p>
-          <a:p>
-            <a:pPr lvl="2"/>
-            <a:r>
-              <a:rPr lang="fr-CH" dirty="0">
-                <a:effectLst/>
-              </a:rPr>
-              <a:t>Il utilise les angles d’Euler (alpha, beta, gamma) pour calculer le </a:t>
-            </a:r>
-            <a:r>
-              <a:rPr lang="fr-CH" dirty="0" err="1">
-                <a:effectLst/>
-              </a:rPr>
-              <a:t>heading</a:t>
-            </a:r>
-            <a:r>
-              <a:rPr lang="fr-CH" dirty="0">
-                <a:effectLst/>
-              </a:rPr>
-              <a:t>. </a:t>
-            </a:r>
-          </a:p>
-          <a:p>
-            <a:pPr lvl="2"/>
-            <a:r>
-              <a:rPr lang="fr-CH" dirty="0">
-                <a:effectLst/>
-              </a:rPr>
-              <a:t>On applique un filtre LPF et une interpolation </a:t>
-            </a:r>
-            <a:r>
-              <a:rPr lang="fr-CH" dirty="0" err="1">
-                <a:effectLst/>
-              </a:rPr>
-              <a:t>shortest‑path</a:t>
-            </a:r>
-            <a:r>
-              <a:rPr lang="fr-CH" dirty="0">
-                <a:effectLst/>
-              </a:rPr>
-              <a:t> pour éviter les sauts brusques à ±180°. </a:t>
-            </a:r>
-          </a:p>
-          <a:p>
-            <a:pPr lvl="2"/>
-            <a:r>
-              <a:rPr lang="fr-CH" dirty="0">
-                <a:effectLst/>
-              </a:rPr>
-              <a:t>Le rendu est fluide et cockpit‑</a:t>
-            </a:r>
-            <a:r>
-              <a:rPr lang="fr-CH" dirty="0" err="1">
-                <a:effectLst/>
-              </a:rPr>
-              <a:t>driven</a:t>
-            </a:r>
-            <a:r>
-              <a:rPr lang="fr-CH" dirty="0">
-                <a:effectLst/>
-              </a:rPr>
-              <a:t>.</a:t>
+              <a:t>Voici le widget boussole:</a:t>
             </a:r>
           </a:p>
           <a:p>
@@ -2083,7 +2364,7 @@
               <a:rPr lang="fr-CH" dirty="0">
                 <a:effectLst/>
               </a:rPr>
-              <a:t>	Le widget carte utilise Leaflet.</a:t>
+              <a:t>        Il utilise les angles d’Euler (alpha, beta, gamma) </a:t>
             </a:r>
           </a:p>
           <a:p>
@@ -2091,23 +2372,19 @@
               <a:rPr lang="fr-CH" dirty="0">
                 <a:effectLst/>
               </a:rPr>
-              <a:t>	 	À chaque position GPS reçue, on met à jour le marqueur et on trace le chemin parcouru. </a:t>
-            </a:r>
-          </a:p>
-          <a:p>
+              <a:t>        pour calculer le </a:t>
+            </a:r>
+            <a:r>
+              <a:rPr lang="fr-CH" dirty="0" err="1">
+                <a:effectLst/>
+              </a:rPr>
+              <a:t>heading</a:t>
+            </a:r>
             <a:r>
               <a:rPr lang="fr-CH" dirty="0">
                 <a:effectLst/>
               </a:rPr>
-              <a:t>		On peut aussi recentrer la carte ou réinitialiser le tracé. </a:t>
-            </a:r>
-          </a:p>
-          <a:p>
-            <a:r>
-              <a:rPr lang="fr-CH" dirty="0">
-                <a:effectLst/>
-              </a:rPr>
-              <a:t>		C’est utile pour suivre un déplacement en montagne ou en mer.</a:t>
+              <a:t>.  </a:t>
             </a:r>
           </a:p>
           <a:p>
@@ -2120,7 +2397,7 @@
               <a:rPr lang="fr-CH" dirty="0">
                 <a:effectLst/>
               </a:rPr>
-              <a:t>	Le widget horloge reçoit l’heure locale du smartphone et l’affiche en temps réel. </a:t>
+              <a:t>        On applique un filtre LPF et une interpolation </a:t>
             </a:r>
           </a:p>
           <a:p>
@@ -2128,27 +2405,141 @@
               <a:rPr lang="fr-CH" dirty="0">
                 <a:effectLst/>
               </a:rPr>
-              <a:t>		On utilise un </a:t>
+              <a:t>        </a:t>
             </a:r>
             <a:r>
               <a:rPr lang="fr-CH" dirty="0" err="1">
                 <a:effectLst/>
               </a:rPr>
-              <a:t>canvas</a:t>
+              <a:t>shortest‑path</a:t>
             </a:r>
             <a:r>
               <a:rPr lang="fr-CH" dirty="0">
                 <a:effectLst/>
               </a:rPr>
-              <a:t> avec des aiguilles dessinées à partir des angles. </a:t>
-            </a:r>
+              <a:t> pour éviter les sauts brusques à ±180°. </a:t>
+            </a:r>
+          </a:p>
+          <a:p>
+            <a:endParaRPr lang="fr-CH" dirty="0">
+              <a:effectLst/>
+            </a:endParaRPr>
+          </a:p>
+          <a:p>
+            <a:endParaRPr lang="fr-CH" dirty="0">
+              <a:effectLst/>
+            </a:endParaRPr>
           </a:p>
           <a:p>
             <a:r>
               <a:rPr lang="fr-CH" dirty="0">
                 <a:effectLst/>
               </a:rPr>
-              <a:t>		C’est un bon exemple d’interface cockpit simple mais efficace.</a:t>
+              <a:t>    Le widget carte utilise Leaflet:</a:t>
+            </a:r>
+          </a:p>
+          <a:p>
+            <a:endParaRPr lang="fr-CH" dirty="0">
+              <a:effectLst/>
+            </a:endParaRPr>
+          </a:p>
+          <a:p>
+            <a:r>
+              <a:rPr lang="fr-CH" dirty="0">
+                <a:effectLst/>
+              </a:rPr>
+              <a:t>        À chaque position GPS reçue, on met à jour le marqueur </a:t>
+            </a:r>
+          </a:p>
+          <a:p>
+            <a:r>
+              <a:rPr lang="fr-CH" dirty="0">
+                <a:effectLst/>
+              </a:rPr>
+              <a:t>        et on trace le chemin parcouru. </a:t>
+            </a:r>
+          </a:p>
+          <a:p>
+            <a:endParaRPr lang="fr-CH" dirty="0">
+              <a:effectLst/>
+            </a:endParaRPr>
+          </a:p>
+          <a:p>
+            <a:r>
+              <a:rPr lang="fr-CH" dirty="0">
+                <a:effectLst/>
+              </a:rPr>
+              <a:t>       On peut aussi recentrer la carte ou réinitialiser le tracé. </a:t>
+            </a:r>
+          </a:p>
+          <a:p>
+            <a:r>
+              <a:rPr lang="fr-CH" dirty="0">
+                <a:effectLst/>
+              </a:rPr>
+              <a:t>       C’est utile pour suivre un déplacement en montagne ou en mer.</a:t>
+            </a:r>
+          </a:p>
+          <a:p>
+            <a:endParaRPr lang="fr-CH" dirty="0">
+              <a:effectLst/>
+            </a:endParaRPr>
+          </a:p>
+          <a:p>
+            <a:endParaRPr lang="fr-CH" dirty="0">
+              <a:effectLst/>
+            </a:endParaRPr>
+          </a:p>
+          <a:p>
+            <a:r>
+              <a:rPr lang="fr-CH" dirty="0">
+                <a:effectLst/>
+              </a:rPr>
+              <a:t>    Le widget horloge:</a:t>
+            </a:r>
+          </a:p>
+          <a:p>
+            <a:r>
+              <a:rPr lang="fr-CH" dirty="0">
+                <a:effectLst/>
+              </a:rPr>
+              <a:t>        </a:t>
+            </a:r>
+          </a:p>
+          <a:p>
+            <a:r>
+              <a:rPr lang="fr-CH" dirty="0">
+                <a:effectLst/>
+              </a:rPr>
+              <a:t>        Reçoit l’heure locale du smartphone et l’affiche en temps réel. </a:t>
+            </a:r>
+          </a:p>
+          <a:p>
+            <a:r>
+              <a:rPr lang="fr-CH" dirty="0">
+                <a:effectLst/>
+              </a:rPr>
+              <a:t>        On utilise un </a:t>
+            </a:r>
+            <a:r>
+              <a:rPr lang="fr-CH" dirty="0" err="1">
+                <a:effectLst/>
+              </a:rPr>
+              <a:t>canvas</a:t>
+            </a:r>
+            <a:r>
+              <a:rPr lang="fr-CH" dirty="0">
+                <a:effectLst/>
+              </a:rPr>
+              <a:t> avec des aiguilles dessinées à partir des angles. </a:t>
+            </a:r>
+          </a:p>
+          <a:p>
+            <a:r>
+              <a:rPr lang="fr-CH" dirty="0">
+                <a:effectLst/>
+              </a:rPr>
+              <a:t>        C’est un bon exemple d’interface cockpit simple mais efficace.</a:t>
             </a:r>
           </a:p>
           <a:p>
@@ -8365,7 +8756,7 @@
         </p:spPr>
         <p:txBody>
           <a:bodyPr vert="horz" lIns="91440" tIns="45720" rIns="91440" bIns="45720" rtlCol="0" anchor="b">
-            <a:normAutofit fontScale="92500"/>
+            <a:normAutofit/>
           </a:bodyPr>
           <a:lstStyle/>
           <a:p>
@@ -11277,7 +11668,7 @@
         </p:blipFill>
         <p:spPr>
           <a:xfrm>
-            <a:off x="324829" y="1810344"/>
+            <a:off x="237911" y="1701968"/>
             <a:ext cx="2122536" cy="3454064"/>
           </a:xfrm>
           <a:prstGeom prst="rect">
@@ -11313,20 +11704,549 @@
         </p:blipFill>
         <p:spPr>
           <a:xfrm>
-            <a:off x="2650009" y="303511"/>
-            <a:ext cx="2861361" cy="6250974"/>
+            <a:off x="5670167" y="219919"/>
+            <a:ext cx="2859014" cy="6245846"/>
           </a:xfrm>
           <a:prstGeom prst="rect">
             <a:avLst/>
           </a:prstGeom>
+          <a:ln w="38100" cap="flat">
+            <a:solidFill>
+              <a:schemeClr val="tx1"/>
+            </a:solidFill>
+            <a:prstDash val="sysDot"/>
+            <a:round/>
+            <a:extLst>
+              <a:ext uri="{C807C97D-BFC1-408E-A445-0C87EB9F89A2}">
+                <ask:lineSketchStyleProps xmlns:ask="http://schemas.microsoft.com/office/drawing/2018/sketchyshapes" sd="1219033472">
+                  <a:custGeom>
+                    <a:avLst/>
+                    <a:gdLst>
+                      <a:gd name="connsiteX0" fmla="*/ 0 w 2859014"/>
+                      <a:gd name="connsiteY0" fmla="*/ 0 h 6245846"/>
+                      <a:gd name="connsiteX1" fmla="*/ 600393 w 2859014"/>
+                      <a:gd name="connsiteY1" fmla="*/ 0 h 6245846"/>
+                      <a:gd name="connsiteX2" fmla="*/ 1229376 w 2859014"/>
+                      <a:gd name="connsiteY2" fmla="*/ 0 h 6245846"/>
+                      <a:gd name="connsiteX3" fmla="*/ 1743999 w 2859014"/>
+                      <a:gd name="connsiteY3" fmla="*/ 0 h 6245846"/>
+                      <a:gd name="connsiteX4" fmla="*/ 2344391 w 2859014"/>
+                      <a:gd name="connsiteY4" fmla="*/ 0 h 6245846"/>
+                      <a:gd name="connsiteX5" fmla="*/ 2859014 w 2859014"/>
+                      <a:gd name="connsiteY5" fmla="*/ 0 h 6245846"/>
+                      <a:gd name="connsiteX6" fmla="*/ 2859014 w 2859014"/>
+                      <a:gd name="connsiteY6" fmla="*/ 567804 h 6245846"/>
+                      <a:gd name="connsiteX7" fmla="*/ 2859014 w 2859014"/>
+                      <a:gd name="connsiteY7" fmla="*/ 1135608 h 6245846"/>
+                      <a:gd name="connsiteX8" fmla="*/ 2859014 w 2859014"/>
+                      <a:gd name="connsiteY8" fmla="*/ 1578496 h 6245846"/>
+                      <a:gd name="connsiteX9" fmla="*/ 2859014 w 2859014"/>
+                      <a:gd name="connsiteY9" fmla="*/ 2271217 h 6245846"/>
+                      <a:gd name="connsiteX10" fmla="*/ 2859014 w 2859014"/>
+                      <a:gd name="connsiteY10" fmla="*/ 2839021 h 6245846"/>
+                      <a:gd name="connsiteX11" fmla="*/ 2859014 w 2859014"/>
+                      <a:gd name="connsiteY11" fmla="*/ 3531742 h 6245846"/>
+                      <a:gd name="connsiteX12" fmla="*/ 2859014 w 2859014"/>
+                      <a:gd name="connsiteY12" fmla="*/ 4162005 h 6245846"/>
+                      <a:gd name="connsiteX13" fmla="*/ 2859014 w 2859014"/>
+                      <a:gd name="connsiteY13" fmla="*/ 4667350 h 6245846"/>
+                      <a:gd name="connsiteX14" fmla="*/ 2859014 w 2859014"/>
+                      <a:gd name="connsiteY14" fmla="*/ 5297613 h 6245846"/>
+                      <a:gd name="connsiteX15" fmla="*/ 2859014 w 2859014"/>
+                      <a:gd name="connsiteY15" fmla="*/ 5740500 h 6245846"/>
+                      <a:gd name="connsiteX16" fmla="*/ 2859014 w 2859014"/>
+                      <a:gd name="connsiteY16" fmla="*/ 6245846 h 6245846"/>
+                      <a:gd name="connsiteX17" fmla="*/ 2372982 w 2859014"/>
+                      <a:gd name="connsiteY17" fmla="*/ 6245846 h 6245846"/>
+                      <a:gd name="connsiteX18" fmla="*/ 1743999 w 2859014"/>
+                      <a:gd name="connsiteY18" fmla="*/ 6245846 h 6245846"/>
+                      <a:gd name="connsiteX19" fmla="*/ 1143606 w 2859014"/>
+                      <a:gd name="connsiteY19" fmla="*/ 6245846 h 6245846"/>
+                      <a:gd name="connsiteX20" fmla="*/ 543213 w 2859014"/>
+                      <a:gd name="connsiteY20" fmla="*/ 6245846 h 6245846"/>
+                      <a:gd name="connsiteX21" fmla="*/ 0 w 2859014"/>
+                      <a:gd name="connsiteY21" fmla="*/ 6245846 h 6245846"/>
+                      <a:gd name="connsiteX22" fmla="*/ 0 w 2859014"/>
+                      <a:gd name="connsiteY22" fmla="*/ 5802959 h 6245846"/>
+                      <a:gd name="connsiteX23" fmla="*/ 0 w 2859014"/>
+                      <a:gd name="connsiteY23" fmla="*/ 5235155 h 6245846"/>
+                      <a:gd name="connsiteX24" fmla="*/ 0 w 2859014"/>
+                      <a:gd name="connsiteY24" fmla="*/ 4667350 h 6245846"/>
+                      <a:gd name="connsiteX25" fmla="*/ 0 w 2859014"/>
+                      <a:gd name="connsiteY25" fmla="*/ 4286922 h 6245846"/>
+                      <a:gd name="connsiteX26" fmla="*/ 0 w 2859014"/>
+                      <a:gd name="connsiteY26" fmla="*/ 3656659 h 6245846"/>
+                      <a:gd name="connsiteX27" fmla="*/ 0 w 2859014"/>
+                      <a:gd name="connsiteY27" fmla="*/ 3276230 h 6245846"/>
+                      <a:gd name="connsiteX28" fmla="*/ 0 w 2859014"/>
+                      <a:gd name="connsiteY28" fmla="*/ 2708426 h 6245846"/>
+                      <a:gd name="connsiteX29" fmla="*/ 0 w 2859014"/>
+                      <a:gd name="connsiteY29" fmla="*/ 2015705 h 6245846"/>
+                      <a:gd name="connsiteX30" fmla="*/ 0 w 2859014"/>
+                      <a:gd name="connsiteY30" fmla="*/ 1322984 h 6245846"/>
+                      <a:gd name="connsiteX31" fmla="*/ 0 w 2859014"/>
+                      <a:gd name="connsiteY31" fmla="*/ 692721 h 6245846"/>
+                      <a:gd name="connsiteX32" fmla="*/ 0 w 2859014"/>
+                      <a:gd name="connsiteY32" fmla="*/ 0 h 6245846"/>
+                    </a:gdLst>
+                    <a:ahLst/>
+                    <a:cxnLst>
+                      <a:cxn ang="0">
+                        <a:pos x="connsiteX0" y="connsiteY0"/>
+                      </a:cxn>
+                      <a:cxn ang="0">
+                        <a:pos x="connsiteX1" y="connsiteY1"/>
+                      </a:cxn>
+                      <a:cxn ang="0">
+                        <a:pos x="connsiteX2" y="connsiteY2"/>
+                      </a:cxn>
+                      <a:cxn ang="0">
+                        <a:pos x="connsiteX3" y="connsiteY3"/>
+                      </a:cxn>
+                      <a:cxn ang="0">
+                        <a:pos x="connsiteX4" y="connsiteY4"/>
+                      </a:cxn>
+                      <a:cxn ang="0">
+                        <a:pos x="connsiteX5" y="connsiteY5"/>
+                      </a:cxn>
+                      <a:cxn ang="0">
+                        <a:pos x="connsiteX6" y="connsiteY6"/>
+                      </a:cxn>
+                      <a:cxn ang="0">
+                        <a:pos x="connsiteX7" y="connsiteY7"/>
+                      </a:cxn>
+                      <a:cxn ang="0">
+                        <a:pos x="connsiteX8" y="connsiteY8"/>
+                      </a:cxn>
+                      <a:cxn ang="0">
+                        <a:pos x="connsiteX9" y="connsiteY9"/>
+                      </a:cxn>
+                      <a:cxn ang="0">
+                        <a:pos x="connsiteX10" y="connsiteY10"/>
+                      </a:cxn>
+                      <a:cxn ang="0">
+                        <a:pos x="connsiteX11" y="connsiteY11"/>
+                      </a:cxn>
+                      <a:cxn ang="0">
+                        <a:pos x="connsiteX12" y="connsiteY12"/>
+                      </a:cxn>
+                      <a:cxn ang="0">
+                        <a:pos x="connsiteX13" y="connsiteY13"/>
+                      </a:cxn>
+                      <a:cxn ang="0">
+                        <a:pos x="connsiteX14" y="connsiteY14"/>
+                      </a:cxn>
+                      <a:cxn ang="0">
+                        <a:pos x="connsiteX15" y="connsiteY15"/>
+                      </a:cxn>
+                      <a:cxn ang="0">
+                        <a:pos x="connsiteX16" y="connsiteY16"/>
+                      </a:cxn>
+                      <a:cxn ang="0">
+                        <a:pos x="connsiteX17" y="connsiteY17"/>
+                      </a:cxn>
+                      <a:cxn ang="0">
+                        <a:pos x="connsiteX18" y="connsiteY18"/>
+                      </a:cxn>
+                      <a:cxn ang="0">
+                        <a:pos x="connsiteX19" y="connsiteY19"/>
+                      </a:cxn>
+                      <a:cxn ang="0">
+                        <a:pos x="connsiteX20" y="connsiteY20"/>
+                      </a:cxn>
+                      <a:cxn ang="0">
+                        <a:pos x="connsiteX21" y="connsiteY21"/>
+                      </a:cxn>
+                      <a:cxn ang="0">
+                        <a:pos x="connsiteX22" y="connsiteY22"/>
+                      </a:cxn>
+                      <a:cxn ang="0">
+                        <a:pos x="connsiteX23" y="connsiteY23"/>
+                      </a:cxn>
+                      <a:cxn ang="0">
+                        <a:pos x="connsiteX24" y="connsiteY24"/>
+                      </a:cxn>
+                      <a:cxn ang="0">
+                        <a:pos x="connsiteX25" y="connsiteY25"/>
+                      </a:cxn>
+                      <a:cxn ang="0">
+                        <a:pos x="connsiteX26" y="connsiteY26"/>
+                      </a:cxn>
+                      <a:cxn ang="0">
+                        <a:pos x="connsiteX27" y="connsiteY27"/>
+                      </a:cxn>
+                      <a:cxn ang="0">
+                        <a:pos x="connsiteX28" y="connsiteY28"/>
+                      </a:cxn>
+                      <a:cxn ang="0">
+                        <a:pos x="connsiteX29" y="connsiteY29"/>
+                      </a:cxn>
+                      <a:cxn ang="0">
+                        <a:pos x="connsiteX30" y="connsiteY30"/>
+                      </a:cxn>
+                      <a:cxn ang="0">
+                        <a:pos x="connsiteX31" y="connsiteY31"/>
+                      </a:cxn>
+                      <a:cxn ang="0">
+                        <a:pos x="connsiteX32" y="connsiteY32"/>
+                      </a:cxn>
+                    </a:cxnLst>
+                    <a:rect l="l" t="t" r="r" b="b"/>
+                    <a:pathLst>
+                      <a:path w="2859014" h="6245846" fill="none" extrusionOk="0">
+                        <a:moveTo>
+                          <a:pt x="0" y="0"/>
+                        </a:moveTo>
+                        <a:cubicBezTo>
+                          <a:pt x="195464" y="-5179"/>
+                          <a:pt x="330210" y="68801"/>
+                          <a:pt x="600393" y="0"/>
+                        </a:cubicBezTo>
+                        <a:cubicBezTo>
+                          <a:pt x="870576" y="-68801"/>
+                          <a:pt x="1071126" y="39031"/>
+                          <a:pt x="1229376" y="0"/>
+                        </a:cubicBezTo>
+                        <a:cubicBezTo>
+                          <a:pt x="1387626" y="-39031"/>
+                          <a:pt x="1498341" y="13406"/>
+                          <a:pt x="1743999" y="0"/>
+                        </a:cubicBezTo>
+                        <a:cubicBezTo>
+                          <a:pt x="1989657" y="-13406"/>
+                          <a:pt x="2206595" y="18368"/>
+                          <a:pt x="2344391" y="0"/>
+                        </a:cubicBezTo>
+                        <a:cubicBezTo>
+                          <a:pt x="2482187" y="-18368"/>
+                          <a:pt x="2669934" y="25982"/>
+                          <a:pt x="2859014" y="0"/>
+                        </a:cubicBezTo>
+                        <a:cubicBezTo>
+                          <a:pt x="2914274" y="125524"/>
+                          <a:pt x="2828301" y="304798"/>
+                          <a:pt x="2859014" y="567804"/>
+                        </a:cubicBezTo>
+                        <a:cubicBezTo>
+                          <a:pt x="2889727" y="830810"/>
+                          <a:pt x="2816177" y="963026"/>
+                          <a:pt x="2859014" y="1135608"/>
+                        </a:cubicBezTo>
+                        <a:cubicBezTo>
+                          <a:pt x="2901851" y="1308190"/>
+                          <a:pt x="2834473" y="1416384"/>
+                          <a:pt x="2859014" y="1578496"/>
+                        </a:cubicBezTo>
+                        <a:cubicBezTo>
+                          <a:pt x="2883555" y="1740608"/>
+                          <a:pt x="2818505" y="2030242"/>
+                          <a:pt x="2859014" y="2271217"/>
+                        </a:cubicBezTo>
+                        <a:cubicBezTo>
+                          <a:pt x="2899523" y="2512192"/>
+                          <a:pt x="2829599" y="2694132"/>
+                          <a:pt x="2859014" y="2839021"/>
+                        </a:cubicBezTo>
+                        <a:cubicBezTo>
+                          <a:pt x="2888429" y="2983910"/>
+                          <a:pt x="2815693" y="3384485"/>
+                          <a:pt x="2859014" y="3531742"/>
+                        </a:cubicBezTo>
+                        <a:cubicBezTo>
+                          <a:pt x="2902335" y="3678999"/>
+                          <a:pt x="2838474" y="3913554"/>
+                          <a:pt x="2859014" y="4162005"/>
+                        </a:cubicBezTo>
+                        <a:cubicBezTo>
+                          <a:pt x="2879554" y="4410456"/>
+                          <a:pt x="2804011" y="4508055"/>
+                          <a:pt x="2859014" y="4667350"/>
+                        </a:cubicBezTo>
+                        <a:cubicBezTo>
+                          <a:pt x="2914017" y="4826645"/>
+                          <a:pt x="2794415" y="5010814"/>
+                          <a:pt x="2859014" y="5297613"/>
+                        </a:cubicBezTo>
+                        <a:cubicBezTo>
+                          <a:pt x="2923613" y="5584412"/>
+                          <a:pt x="2847934" y="5595390"/>
+                          <a:pt x="2859014" y="5740500"/>
+                        </a:cubicBezTo>
+                        <a:cubicBezTo>
+                          <a:pt x="2870094" y="5885610"/>
+                          <a:pt x="2857224" y="6006817"/>
+                          <a:pt x="2859014" y="6245846"/>
+                        </a:cubicBezTo>
+                        <a:cubicBezTo>
+                          <a:pt x="2697176" y="6253543"/>
+                          <a:pt x="2486369" y="6230001"/>
+                          <a:pt x="2372982" y="6245846"/>
+                        </a:cubicBezTo>
+                        <a:cubicBezTo>
+                          <a:pt x="2259595" y="6261691"/>
+                          <a:pt x="2040178" y="6242720"/>
+                          <a:pt x="1743999" y="6245846"/>
+                        </a:cubicBezTo>
+                        <a:cubicBezTo>
+                          <a:pt x="1447820" y="6248972"/>
+                          <a:pt x="1394859" y="6175923"/>
+                          <a:pt x="1143606" y="6245846"/>
+                        </a:cubicBezTo>
+                        <a:cubicBezTo>
+                          <a:pt x="892353" y="6315769"/>
+                          <a:pt x="790000" y="6205537"/>
+                          <a:pt x="543213" y="6245846"/>
+                        </a:cubicBezTo>
+                        <a:cubicBezTo>
+                          <a:pt x="296426" y="6286155"/>
+                          <a:pt x="251301" y="6208525"/>
+                          <a:pt x="0" y="6245846"/>
+                        </a:cubicBezTo>
+                        <a:cubicBezTo>
+                          <a:pt x="-6869" y="6028839"/>
+                          <a:pt x="4976" y="5958266"/>
+                          <a:pt x="0" y="5802959"/>
+                        </a:cubicBezTo>
+                        <a:cubicBezTo>
+                          <a:pt x="-4976" y="5647652"/>
+                          <a:pt x="33847" y="5450355"/>
+                          <a:pt x="0" y="5235155"/>
+                        </a:cubicBezTo>
+                        <a:cubicBezTo>
+                          <a:pt x="-33847" y="5019955"/>
+                          <a:pt x="60147" y="4812535"/>
+                          <a:pt x="0" y="4667350"/>
+                        </a:cubicBezTo>
+                        <a:cubicBezTo>
+                          <a:pt x="-60147" y="4522165"/>
+                          <a:pt x="22996" y="4424726"/>
+                          <a:pt x="0" y="4286922"/>
+                        </a:cubicBezTo>
+                        <a:cubicBezTo>
+                          <a:pt x="-22996" y="4149118"/>
+                          <a:pt x="35413" y="3806871"/>
+                          <a:pt x="0" y="3656659"/>
+                        </a:cubicBezTo>
+                        <a:cubicBezTo>
+                          <a:pt x="-35413" y="3506447"/>
+                          <a:pt x="8214" y="3442223"/>
+                          <a:pt x="0" y="3276230"/>
+                        </a:cubicBezTo>
+                        <a:cubicBezTo>
+                          <a:pt x="-8214" y="3110237"/>
+                          <a:pt x="3046" y="2907822"/>
+                          <a:pt x="0" y="2708426"/>
+                        </a:cubicBezTo>
+                        <a:cubicBezTo>
+                          <a:pt x="-3046" y="2509030"/>
+                          <a:pt x="26152" y="2259588"/>
+                          <a:pt x="0" y="2015705"/>
+                        </a:cubicBezTo>
+                        <a:cubicBezTo>
+                          <a:pt x="-26152" y="1771822"/>
+                          <a:pt x="58943" y="1581500"/>
+                          <a:pt x="0" y="1322984"/>
+                        </a:cubicBezTo>
+                        <a:cubicBezTo>
+                          <a:pt x="-58943" y="1064468"/>
+                          <a:pt x="56767" y="862815"/>
+                          <a:pt x="0" y="692721"/>
+                        </a:cubicBezTo>
+                        <a:cubicBezTo>
+                          <a:pt x="-56767" y="522627"/>
+                          <a:pt x="8399" y="299064"/>
+                          <a:pt x="0" y="0"/>
+                        </a:cubicBezTo>
+                        <a:close/>
+                      </a:path>
+                      <a:path w="2859014" h="6245846" stroke="0" extrusionOk="0">
+                        <a:moveTo>
+                          <a:pt x="0" y="0"/>
+                        </a:moveTo>
+                        <a:cubicBezTo>
+                          <a:pt x="198013" y="-60798"/>
+                          <a:pt x="376162" y="1876"/>
+                          <a:pt x="543213" y="0"/>
+                        </a:cubicBezTo>
+                        <a:cubicBezTo>
+                          <a:pt x="710264" y="-1876"/>
+                          <a:pt x="815481" y="21397"/>
+                          <a:pt x="1029245" y="0"/>
+                        </a:cubicBezTo>
+                        <a:cubicBezTo>
+                          <a:pt x="1243009" y="-21397"/>
+                          <a:pt x="1357996" y="37258"/>
+                          <a:pt x="1658228" y="0"/>
+                        </a:cubicBezTo>
+                        <a:cubicBezTo>
+                          <a:pt x="1958460" y="-37258"/>
+                          <a:pt x="2055031" y="64567"/>
+                          <a:pt x="2201441" y="0"/>
+                        </a:cubicBezTo>
+                        <a:cubicBezTo>
+                          <a:pt x="2347851" y="-64567"/>
+                          <a:pt x="2625944" y="66288"/>
+                          <a:pt x="2859014" y="0"/>
+                        </a:cubicBezTo>
+                        <a:cubicBezTo>
+                          <a:pt x="2936731" y="241226"/>
+                          <a:pt x="2829462" y="528525"/>
+                          <a:pt x="2859014" y="692721"/>
+                        </a:cubicBezTo>
+                        <a:cubicBezTo>
+                          <a:pt x="2888566" y="856917"/>
+                          <a:pt x="2824740" y="1065554"/>
+                          <a:pt x="2859014" y="1260525"/>
+                        </a:cubicBezTo>
+                        <a:cubicBezTo>
+                          <a:pt x="2893288" y="1455496"/>
+                          <a:pt x="2824488" y="1654281"/>
+                          <a:pt x="2859014" y="1828329"/>
+                        </a:cubicBezTo>
+                        <a:cubicBezTo>
+                          <a:pt x="2893540" y="2002377"/>
+                          <a:pt x="2848216" y="2061983"/>
+                          <a:pt x="2859014" y="2271217"/>
+                        </a:cubicBezTo>
+                        <a:cubicBezTo>
+                          <a:pt x="2869812" y="2480451"/>
+                          <a:pt x="2846070" y="2503366"/>
+                          <a:pt x="2859014" y="2714104"/>
+                        </a:cubicBezTo>
+                        <a:cubicBezTo>
+                          <a:pt x="2871958" y="2924842"/>
+                          <a:pt x="2818524" y="3101488"/>
+                          <a:pt x="2859014" y="3281908"/>
+                        </a:cubicBezTo>
+                        <a:cubicBezTo>
+                          <a:pt x="2899504" y="3462328"/>
+                          <a:pt x="2853635" y="3707209"/>
+                          <a:pt x="2859014" y="3912171"/>
+                        </a:cubicBezTo>
+                        <a:cubicBezTo>
+                          <a:pt x="2864393" y="4117133"/>
+                          <a:pt x="2841498" y="4202222"/>
+                          <a:pt x="2859014" y="4292600"/>
+                        </a:cubicBezTo>
+                        <a:cubicBezTo>
+                          <a:pt x="2876530" y="4382978"/>
+                          <a:pt x="2819360" y="4736852"/>
+                          <a:pt x="2859014" y="4860404"/>
+                        </a:cubicBezTo>
+                        <a:cubicBezTo>
+                          <a:pt x="2898668" y="4983956"/>
+                          <a:pt x="2833481" y="5253920"/>
+                          <a:pt x="2859014" y="5428208"/>
+                        </a:cubicBezTo>
+                        <a:cubicBezTo>
+                          <a:pt x="2884547" y="5602496"/>
+                          <a:pt x="2786263" y="6079278"/>
+                          <a:pt x="2859014" y="6245846"/>
+                        </a:cubicBezTo>
+                        <a:cubicBezTo>
+                          <a:pt x="2575226" y="6299916"/>
+                          <a:pt x="2409206" y="6210665"/>
+                          <a:pt x="2258621" y="6245846"/>
+                        </a:cubicBezTo>
+                        <a:cubicBezTo>
+                          <a:pt x="2108036" y="6281027"/>
+                          <a:pt x="1876485" y="6216564"/>
+                          <a:pt x="1686818" y="6245846"/>
+                        </a:cubicBezTo>
+                        <a:cubicBezTo>
+                          <a:pt x="1497151" y="6275128"/>
+                          <a:pt x="1332629" y="6196433"/>
+                          <a:pt x="1200786" y="6245846"/>
+                        </a:cubicBezTo>
+                        <a:cubicBezTo>
+                          <a:pt x="1068943" y="6295259"/>
+                          <a:pt x="927545" y="6198619"/>
+                          <a:pt x="686163" y="6245846"/>
+                        </a:cubicBezTo>
+                        <a:cubicBezTo>
+                          <a:pt x="444781" y="6293073"/>
+                          <a:pt x="341959" y="6218323"/>
+                          <a:pt x="0" y="6245846"/>
+                        </a:cubicBezTo>
+                        <a:cubicBezTo>
+                          <a:pt x="-32214" y="5966334"/>
+                          <a:pt x="53065" y="5887230"/>
+                          <a:pt x="0" y="5678042"/>
+                        </a:cubicBezTo>
+                        <a:cubicBezTo>
+                          <a:pt x="-53065" y="5468854"/>
+                          <a:pt x="19957" y="5311108"/>
+                          <a:pt x="0" y="5110238"/>
+                        </a:cubicBezTo>
+                        <a:cubicBezTo>
+                          <a:pt x="-19957" y="4909368"/>
+                          <a:pt x="6263" y="4706404"/>
+                          <a:pt x="0" y="4604892"/>
+                        </a:cubicBezTo>
+                        <a:cubicBezTo>
+                          <a:pt x="-6263" y="4503380"/>
+                          <a:pt x="37699" y="4406714"/>
+                          <a:pt x="0" y="4224463"/>
+                        </a:cubicBezTo>
+                        <a:cubicBezTo>
+                          <a:pt x="-37699" y="4042212"/>
+                          <a:pt x="7952" y="3929217"/>
+                          <a:pt x="0" y="3844034"/>
+                        </a:cubicBezTo>
+                        <a:cubicBezTo>
+                          <a:pt x="-7952" y="3758851"/>
+                          <a:pt x="26951" y="3516129"/>
+                          <a:pt x="0" y="3213772"/>
+                        </a:cubicBezTo>
+                        <a:cubicBezTo>
+                          <a:pt x="-26951" y="2911415"/>
+                          <a:pt x="34606" y="2940686"/>
+                          <a:pt x="0" y="2770884"/>
+                        </a:cubicBezTo>
+                        <a:cubicBezTo>
+                          <a:pt x="-34606" y="2601082"/>
+                          <a:pt x="23153" y="2386847"/>
+                          <a:pt x="0" y="2078163"/>
+                        </a:cubicBezTo>
+                        <a:cubicBezTo>
+                          <a:pt x="-23153" y="1769479"/>
+                          <a:pt x="40076" y="1783480"/>
+                          <a:pt x="0" y="1572818"/>
+                        </a:cubicBezTo>
+                        <a:cubicBezTo>
+                          <a:pt x="-40076" y="1362157"/>
+                          <a:pt x="12280" y="1289881"/>
+                          <a:pt x="0" y="1192389"/>
+                        </a:cubicBezTo>
+                        <a:cubicBezTo>
+                          <a:pt x="-12280" y="1094897"/>
+                          <a:pt x="53422" y="829183"/>
+                          <a:pt x="0" y="562126"/>
+                        </a:cubicBezTo>
+                        <a:cubicBezTo>
+                          <a:pt x="-53422" y="295069"/>
+                          <a:pt x="57587" y="247342"/>
+                          <a:pt x="0" y="0"/>
+                        </a:cubicBezTo>
+                        <a:close/>
+                      </a:path>
+                    </a:pathLst>
+                  </a:custGeom>
+                  <ask:type>
+                    <ask:lineSketchNone/>
+                  </ask:type>
+                </ask:lineSketchStyleProps>
+              </a:ext>
+            </a:extLst>
+          </a:ln>
         </p:spPr>
       </p:pic>
       <p:pic>
         <p:nvPicPr>
-          <p:cNvPr id="15" name="Image 14">
+          <p:cNvPr id="22" name="Image 21">
             <a:extLst>
               <a:ext uri="{FF2B5EF4-FFF2-40B4-BE49-F238E27FC236}">
-                <a16:creationId xmlns:a16="http://schemas.microsoft.com/office/drawing/2014/main" id="{A2A39655-10C6-42C1-BC72-7639B2A6776A}"/>
+                <a16:creationId xmlns:a16="http://schemas.microsoft.com/office/drawing/2014/main" id="{B78DA315-E7D3-4BA8-8B40-F5FF14939628}"/>
               </a:ext>
             </a:extLst>
           </p:cNvPr>
@@ -11349,20 +12269,26 @@
         </p:blipFill>
         <p:spPr>
           <a:xfrm>
-            <a:off x="5587264" y="1238629"/>
-            <a:ext cx="2924583" cy="1505160"/>
+            <a:off x="2599528" y="220470"/>
+            <a:ext cx="2915057" cy="1247949"/>
           </a:xfrm>
           <a:prstGeom prst="rect">
             <a:avLst/>
           </a:prstGeom>
+          <a:ln w="38100" cap="flat">
+            <a:solidFill>
+              <a:srgbClr val="00A537"/>
+            </a:solidFill>
+            <a:prstDash val="sysDot"/>
+          </a:ln>
         </p:spPr>
       </p:pic>
       <p:pic>
         <p:nvPicPr>
-          <p:cNvPr id="17" name="Image 16">
+          <p:cNvPr id="28" name="Image 27">
             <a:extLst>
               <a:ext uri="{FF2B5EF4-FFF2-40B4-BE49-F238E27FC236}">
-                <a16:creationId xmlns:a16="http://schemas.microsoft.com/office/drawing/2014/main" id="{E82EB796-BACB-4C02-BE8D-2904617F7989}"/>
+                <a16:creationId xmlns:a16="http://schemas.microsoft.com/office/drawing/2014/main" id="{88FB63AE-ED32-436B-BAA0-0E7C06706C35}"/>
               </a:ext>
             </a:extLst>
           </p:cNvPr>
@@ -11385,20 +12311,27 @@
         </p:blipFill>
         <p:spPr>
           <a:xfrm>
-            <a:off x="5889539" y="2947122"/>
-            <a:ext cx="2324424" cy="1219370"/>
+            <a:off x="8750812" y="226366"/>
+            <a:ext cx="3128591" cy="5755653"/>
           </a:xfrm>
           <a:prstGeom prst="rect">
             <a:avLst/>
           </a:prstGeom>
+          <a:ln w="38100" cap="flat">
+            <a:solidFill>
+              <a:srgbClr val="10B3F0"/>
+            </a:solidFill>
+            <a:prstDash val="sysDot"/>
+            <a:round/>
+          </a:ln>
         </p:spPr>
       </p:pic>
       <p:pic>
         <p:nvPicPr>
-          <p:cNvPr id="22" name="Image 21">
+          <p:cNvPr id="10" name="Image 9">
             <a:extLst>
               <a:ext uri="{FF2B5EF4-FFF2-40B4-BE49-F238E27FC236}">
-                <a16:creationId xmlns:a16="http://schemas.microsoft.com/office/drawing/2014/main" id="{B78DA315-E7D3-4BA8-8B40-F5FF14939628}"/>
+                <a16:creationId xmlns:a16="http://schemas.microsoft.com/office/drawing/2014/main" id="{65E2E6FC-0CD0-4860-AC80-9E213096922C}"/>
               </a:ext>
             </a:extLst>
           </p:cNvPr>
@@ -11415,26 +12348,31 @@
               </a:ext>
             </a:extLst>
           </a:blip>
+          <a:srcRect/>
           <a:stretch>
             <a:fillRect/>
           </a:stretch>
         </p:blipFill>
-        <p:spPr>
+        <p:spPr bwMode="auto">
           <a:xfrm>
-            <a:off x="5596790" y="4748126"/>
-            <a:ext cx="2915057" cy="1247949"/>
+            <a:off x="2582078" y="2200128"/>
+            <a:ext cx="2921897" cy="2071891"/>
           </a:xfrm>
           <a:prstGeom prst="rect">
             <a:avLst/>
           </a:prstGeom>
+          <a:noFill/>
+          <a:ln>
+            <a:noFill/>
+          </a:ln>
         </p:spPr>
       </p:pic>
       <p:pic>
         <p:nvPicPr>
-          <p:cNvPr id="28" name="Image 27">
+          <p:cNvPr id="3" name="Image 2">
             <a:extLst>
               <a:ext uri="{FF2B5EF4-FFF2-40B4-BE49-F238E27FC236}">
-                <a16:creationId xmlns:a16="http://schemas.microsoft.com/office/drawing/2014/main" id="{88FB63AE-ED32-436B-BAA0-0E7C06706C35}"/>
+                <a16:creationId xmlns:a16="http://schemas.microsoft.com/office/drawing/2014/main" id="{FA44BD4D-CBFB-4FFA-848F-30FC5E994999}"/>
               </a:ext>
             </a:extLst>
           </p:cNvPr>
@@ -11457,8 +12395,8 @@
         </p:blipFill>
         <p:spPr>
           <a:xfrm>
-            <a:off x="8592133" y="343456"/>
-            <a:ext cx="3128591" cy="5755653"/>
+            <a:off x="2599528" y="4851214"/>
+            <a:ext cx="2514951" cy="1486107"/>
           </a:xfrm>
           <a:prstGeom prst="rect">
             <a:avLst/>

--- a/documents/Presentation_JS.pptx
+++ b/documents/Presentation_JS.pptx
@@ -226,7 +226,7 @@
           <a:p>
             <a:fld id="{828A8F36-A643-4FAA-8649-965D6B1446A9}" type="datetimeFigureOut">
               <a:rPr lang="fr-FR" smtClean="0"/>
-              <a:t>09/01/2026</a:t>
+              <a:t>11/01/2026</a:t>
             </a:fld>
             <a:endParaRPr lang="fr-FR"/>
           </a:p>
@@ -403,7 +403,7 @@
           <a:p>
             <a:fld id="{2456FC83-ED93-4984-B7AA-3DB9F84FF409}" type="datetimeFigureOut">
               <a:rPr lang="fr-FR" smtClean="0"/>
-              <a:t>09/01/2026</a:t>
+              <a:t>11/01/2026</a:t>
             </a:fld>
             <a:endParaRPr lang="fr-FR"/>
           </a:p>
@@ -3099,7 +3099,7 @@
           <a:p>
             <a:fld id="{06137112-888A-40C4-BD31-96BD10D39A6F}" type="datetimeFigureOut">
               <a:rPr lang="fr-CH" smtClean="0"/>
-              <a:t>09.01.2026</a:t>
+              <a:t>11.01.2026</a:t>
             </a:fld>
             <a:endParaRPr lang="fr-CH"/>
           </a:p>
@@ -3299,7 +3299,7 @@
           <a:p>
             <a:fld id="{06137112-888A-40C4-BD31-96BD10D39A6F}" type="datetimeFigureOut">
               <a:rPr lang="fr-CH" smtClean="0"/>
-              <a:t>09.01.2026</a:t>
+              <a:t>11.01.2026</a:t>
             </a:fld>
             <a:endParaRPr lang="fr-CH"/>
           </a:p>
@@ -3509,7 +3509,7 @@
           <a:p>
             <a:fld id="{06137112-888A-40C4-BD31-96BD10D39A6F}" type="datetimeFigureOut">
               <a:rPr lang="fr-CH" smtClean="0"/>
-              <a:t>09.01.2026</a:t>
+              <a:t>11.01.2026</a:t>
             </a:fld>
             <a:endParaRPr lang="fr-CH"/>
           </a:p>
@@ -3709,7 +3709,7 @@
           <a:p>
             <a:fld id="{06137112-888A-40C4-BD31-96BD10D39A6F}" type="datetimeFigureOut">
               <a:rPr lang="fr-CH" smtClean="0"/>
-              <a:t>09.01.2026</a:t>
+              <a:t>11.01.2026</a:t>
             </a:fld>
             <a:endParaRPr lang="fr-CH"/>
           </a:p>
@@ -3985,7 +3985,7 @@
           <a:p>
             <a:fld id="{06137112-888A-40C4-BD31-96BD10D39A6F}" type="datetimeFigureOut">
               <a:rPr lang="fr-CH" smtClean="0"/>
-              <a:t>09.01.2026</a:t>
+              <a:t>11.01.2026</a:t>
             </a:fld>
             <a:endParaRPr lang="fr-CH"/>
           </a:p>
@@ -4253,7 +4253,7 @@
           <a:p>
             <a:fld id="{06137112-888A-40C4-BD31-96BD10D39A6F}" type="datetimeFigureOut">
               <a:rPr lang="fr-CH" smtClean="0"/>
-              <a:t>09.01.2026</a:t>
+              <a:t>11.01.2026</a:t>
             </a:fld>
             <a:endParaRPr lang="fr-CH"/>
           </a:p>
@@ -4668,7 +4668,7 @@
           <a:p>
             <a:fld id="{06137112-888A-40C4-BD31-96BD10D39A6F}" type="datetimeFigureOut">
               <a:rPr lang="fr-CH" smtClean="0"/>
-              <a:t>09.01.2026</a:t>
+              <a:t>11.01.2026</a:t>
             </a:fld>
             <a:endParaRPr lang="fr-CH"/>
           </a:p>
@@ -4810,7 +4810,7 @@
           <a:p>
             <a:fld id="{06137112-888A-40C4-BD31-96BD10D39A6F}" type="datetimeFigureOut">
               <a:rPr lang="fr-CH" smtClean="0"/>
-              <a:t>09.01.2026</a:t>
+              <a:t>11.01.2026</a:t>
             </a:fld>
             <a:endParaRPr lang="fr-CH"/>
           </a:p>
@@ -4923,7 +4923,7 @@
           <a:p>
             <a:fld id="{06137112-888A-40C4-BD31-96BD10D39A6F}" type="datetimeFigureOut">
               <a:rPr lang="fr-CH" smtClean="0"/>
-              <a:t>09.01.2026</a:t>
+              <a:t>11.01.2026</a:t>
             </a:fld>
             <a:endParaRPr lang="fr-CH"/>
           </a:p>
@@ -5236,7 +5236,7 @@
           <a:p>
             <a:fld id="{06137112-888A-40C4-BD31-96BD10D39A6F}" type="datetimeFigureOut">
               <a:rPr lang="fr-CH" smtClean="0"/>
-              <a:t>09.01.2026</a:t>
+              <a:t>11.01.2026</a:t>
             </a:fld>
             <a:endParaRPr lang="fr-CH"/>
           </a:p>
@@ -5525,7 +5525,7 @@
           <a:p>
             <a:fld id="{06137112-888A-40C4-BD31-96BD10D39A6F}" type="datetimeFigureOut">
               <a:rPr lang="fr-CH" smtClean="0"/>
-              <a:t>09.01.2026</a:t>
+              <a:t>11.01.2026</a:t>
             </a:fld>
             <a:endParaRPr lang="fr-CH"/>
           </a:p>
@@ -5777,7 +5777,7 @@
           <a:p>
             <a:fld id="{06137112-888A-40C4-BD31-96BD10D39A6F}" type="datetimeFigureOut">
               <a:rPr lang="fr-CH" smtClean="0"/>
-              <a:t>09.01.2026</a:t>
+              <a:t>11.01.2026</a:t>
             </a:fld>
             <a:endParaRPr lang="fr-CH"/>
           </a:p>
@@ -8747,8 +8747,8 @@
         </p:nvSpPr>
         <p:spPr>
           <a:xfrm>
-            <a:off x="4694062" y="3912065"/>
-            <a:ext cx="7119201" cy="1551019"/>
+            <a:off x="4944979" y="4013217"/>
+            <a:ext cx="7119201" cy="1884436"/>
           </a:xfrm>
           <a:prstGeom prst="rect">
             <a:avLst/>
@@ -8756,7 +8756,7 @@
         </p:spPr>
         <p:txBody>
           <a:bodyPr vert="horz" lIns="91440" tIns="45720" rIns="91440" bIns="45720" rtlCol="0" anchor="b">
-            <a:normAutofit/>
+            <a:normAutofit lnSpcReduction="10000"/>
           </a:bodyPr>
           <a:lstStyle/>
           <a:p>

--- a/documents/Presentation_JS.pptx
+++ b/documents/Presentation_JS.pptx
@@ -226,7 +226,7 @@
           <a:p>
             <a:fld id="{828A8F36-A643-4FAA-8649-965D6B1446A9}" type="datetimeFigureOut">
               <a:rPr lang="fr-FR" smtClean="0"/>
-              <a:t>11/01/2026</a:t>
+              <a:t>14/01/2026</a:t>
             </a:fld>
             <a:endParaRPr lang="fr-FR"/>
           </a:p>
@@ -403,7 +403,7 @@
           <a:p>
             <a:fld id="{2456FC83-ED93-4984-B7AA-3DB9F84FF409}" type="datetimeFigureOut">
               <a:rPr lang="fr-FR" smtClean="0"/>
-              <a:t>11/01/2026</a:t>
+              <a:t>14/01/2026</a:t>
             </a:fld>
             <a:endParaRPr lang="fr-FR"/>
           </a:p>
@@ -741,58 +741,26 @@
           </a:p>
           <a:p>
             <a:r>
-              <a:rPr lang="fr-CH" dirty="0">
+              <a:rPr lang="fr-FR" sz="1200" kern="1200" dirty="0">
+                <a:solidFill>
+                  <a:schemeClr val="tx1"/>
+                </a:solidFill>
                 <a:effectLst/>
-              </a:rPr>
-              <a:t>Bienvenue à tous. </a:t>
-            </a:r>
-          </a:p>
-          <a:p>
-            <a:r>
-              <a:rPr lang="fr-CH" dirty="0">
-                <a:effectLst/>
-              </a:rPr>
-              <a:t>Aujourd’hui, on vous présente notre projet </a:t>
-            </a:r>
-            <a:r>
-              <a:rPr lang="fr-CH" dirty="0" err="1">
-                <a:effectLst/>
-              </a:rPr>
-              <a:t>SmartCockpit</a:t>
-            </a:r>
-            <a:r>
-              <a:rPr lang="fr-CH" dirty="0">
-                <a:effectLst/>
-              </a:rPr>
-              <a:t>, une solution JavaScript qui permet de suivre en temps réel les données d’un smartphone dans des environnements extrêmes. L’objectif : </a:t>
-            </a:r>
-          </a:p>
-          <a:p>
-            <a:pPr lvl="1"/>
-            <a:r>
-              <a:rPr lang="fr-CH" dirty="0">
-                <a:effectLst/>
-              </a:rPr>
-              <a:t>- centraliser</a:t>
-            </a:r>
-          </a:p>
-          <a:p>
-            <a:pPr lvl="1"/>
-            <a:r>
-              <a:rPr lang="fr-CH" dirty="0">
-                <a:effectLst/>
-              </a:rPr>
-              <a:t>- visualiser et exploiter les capteurs du téléphone à distance</a:t>
-            </a:r>
-          </a:p>
-          <a:p>
-            <a:pPr lvl="1"/>
-            <a:r>
-              <a:rPr lang="fr-CH" dirty="0">
-                <a:effectLst/>
-              </a:rPr>
-              <a:t>- là où l’observation directe est impossible</a:t>
-            </a:r>
+                <a:latin typeface="+mn-lt"/>
+                <a:ea typeface="+mn-ea"/>
+                <a:cs typeface="+mn-cs"/>
+              </a:rPr>
+              <a:t>Pouvoir centraliser et visualiser toutes les données du smartphone d’une personne qui se trouverai dans une situation extrême. (impossible de l’accompagner)</a:t>
+            </a:r>
+            <a:endParaRPr lang="fr-CH" sz="1200" kern="1200" dirty="0">
+              <a:solidFill>
+                <a:schemeClr val="tx1"/>
+              </a:solidFill>
+              <a:effectLst/>
+              <a:latin typeface="+mn-lt"/>
+              <a:ea typeface="+mn-ea"/>
+              <a:cs typeface="+mn-cs"/>
+            </a:endParaRPr>
           </a:p>
         </p:txBody>
       </p:sp>
@@ -3099,7 +3067,7 @@
           <a:p>
             <a:fld id="{06137112-888A-40C4-BD31-96BD10D39A6F}" type="datetimeFigureOut">
               <a:rPr lang="fr-CH" smtClean="0"/>
-              <a:t>11.01.2026</a:t>
+              <a:t>14.01.2026</a:t>
             </a:fld>
             <a:endParaRPr lang="fr-CH"/>
           </a:p>
@@ -3299,7 +3267,7 @@
           <a:p>
             <a:fld id="{06137112-888A-40C4-BD31-96BD10D39A6F}" type="datetimeFigureOut">
               <a:rPr lang="fr-CH" smtClean="0"/>
-              <a:t>11.01.2026</a:t>
+              <a:t>14.01.2026</a:t>
             </a:fld>
             <a:endParaRPr lang="fr-CH"/>
           </a:p>
@@ -3509,7 +3477,7 @@
           <a:p>
             <a:fld id="{06137112-888A-40C4-BD31-96BD10D39A6F}" type="datetimeFigureOut">
               <a:rPr lang="fr-CH" smtClean="0"/>
-              <a:t>11.01.2026</a:t>
+              <a:t>14.01.2026</a:t>
             </a:fld>
             <a:endParaRPr lang="fr-CH"/>
           </a:p>
@@ -3709,7 +3677,7 @@
           <a:p>
             <a:fld id="{06137112-888A-40C4-BD31-96BD10D39A6F}" type="datetimeFigureOut">
               <a:rPr lang="fr-CH" smtClean="0"/>
-              <a:t>11.01.2026</a:t>
+              <a:t>14.01.2026</a:t>
             </a:fld>
             <a:endParaRPr lang="fr-CH"/>
           </a:p>
@@ -3985,7 +3953,7 @@
           <a:p>
             <a:fld id="{06137112-888A-40C4-BD31-96BD10D39A6F}" type="datetimeFigureOut">
               <a:rPr lang="fr-CH" smtClean="0"/>
-              <a:t>11.01.2026</a:t>
+              <a:t>14.01.2026</a:t>
             </a:fld>
             <a:endParaRPr lang="fr-CH"/>
           </a:p>
@@ -4253,7 +4221,7 @@
           <a:p>
             <a:fld id="{06137112-888A-40C4-BD31-96BD10D39A6F}" type="datetimeFigureOut">
               <a:rPr lang="fr-CH" smtClean="0"/>
-              <a:t>11.01.2026</a:t>
+              <a:t>14.01.2026</a:t>
             </a:fld>
             <a:endParaRPr lang="fr-CH"/>
           </a:p>
@@ -4668,7 +4636,7 @@
           <a:p>
             <a:fld id="{06137112-888A-40C4-BD31-96BD10D39A6F}" type="datetimeFigureOut">
               <a:rPr lang="fr-CH" smtClean="0"/>
-              <a:t>11.01.2026</a:t>
+              <a:t>14.01.2026</a:t>
             </a:fld>
             <a:endParaRPr lang="fr-CH"/>
           </a:p>
@@ -4810,7 +4778,7 @@
           <a:p>
             <a:fld id="{06137112-888A-40C4-BD31-96BD10D39A6F}" type="datetimeFigureOut">
               <a:rPr lang="fr-CH" smtClean="0"/>
-              <a:t>11.01.2026</a:t>
+              <a:t>14.01.2026</a:t>
             </a:fld>
             <a:endParaRPr lang="fr-CH"/>
           </a:p>
@@ -4923,7 +4891,7 @@
           <a:p>
             <a:fld id="{06137112-888A-40C4-BD31-96BD10D39A6F}" type="datetimeFigureOut">
               <a:rPr lang="fr-CH" smtClean="0"/>
-              <a:t>11.01.2026</a:t>
+              <a:t>14.01.2026</a:t>
             </a:fld>
             <a:endParaRPr lang="fr-CH"/>
           </a:p>
@@ -5236,7 +5204,7 @@
           <a:p>
             <a:fld id="{06137112-888A-40C4-BD31-96BD10D39A6F}" type="datetimeFigureOut">
               <a:rPr lang="fr-CH" smtClean="0"/>
-              <a:t>11.01.2026</a:t>
+              <a:t>14.01.2026</a:t>
             </a:fld>
             <a:endParaRPr lang="fr-CH"/>
           </a:p>
@@ -5525,7 +5493,7 @@
           <a:p>
             <a:fld id="{06137112-888A-40C4-BD31-96BD10D39A6F}" type="datetimeFigureOut">
               <a:rPr lang="fr-CH" smtClean="0"/>
-              <a:t>11.01.2026</a:t>
+              <a:t>14.01.2026</a:t>
             </a:fld>
             <a:endParaRPr lang="fr-CH"/>
           </a:p>
@@ -5777,7 +5745,7 @@
           <a:p>
             <a:fld id="{06137112-888A-40C4-BD31-96BD10D39A6F}" type="datetimeFigureOut">
               <a:rPr lang="fr-CH" smtClean="0"/>
-              <a:t>11.01.2026</a:t>
+              <a:t>14.01.2026</a:t>
             </a:fld>
             <a:endParaRPr lang="fr-CH"/>
           </a:p>

--- a/documents/Presentation_JS.pptx
+++ b/documents/Presentation_JS.pptx
@@ -6630,8 +6630,24 @@
                 <a:ea typeface="+mn-ea"/>
                 <a:cs typeface="+mn-cs"/>
               </a:rPr>
-              <a:t>Ayman Akram</a:t>
-            </a:r>
+              <a:t>Akram</a:t>
+            </a:r>
+            <a:r>
+              <a:rPr lang="en-US" sz="1700" dirty="0">
+                <a:solidFill>
+                  <a:schemeClr val="bg1"/>
+                </a:solidFill>
+              </a:rPr>
+              <a:t> Ayman</a:t>
+            </a:r>
+            <a:endParaRPr lang="en-US" sz="1700" kern="1200" dirty="0">
+              <a:solidFill>
+                <a:schemeClr val="bg1"/>
+              </a:solidFill>
+              <a:latin typeface="+mn-lt"/>
+              <a:ea typeface="+mn-ea"/>
+              <a:cs typeface="+mn-cs"/>
+            </a:endParaRPr>
           </a:p>
         </p:txBody>
       </p:sp>
